--- a/Report/Affiliate_GLOBAL_Prototype_Review.pptx
+++ b/Report/Affiliate_GLOBAL_Prototype_Review.pptx
@@ -5,16 +5,16 @@
     <p:sldMasterId id="2147483648" r:id="rId1"/>
   </p:sldMasterIdLst>
   <p:sldIdLst>
-    <p:sldId id="256" r:id="rId7"/>
-    <p:sldId id="257" r:id="rId8"/>
-    <p:sldId id="258" r:id="rId9"/>
-    <p:sldId id="259" r:id="rId10"/>
-    <p:sldId id="260" r:id="rId11"/>
-    <p:sldId id="261" r:id="rId12"/>
-    <p:sldId id="262" r:id="rId13"/>
-    <p:sldId id="263" r:id="rId14"/>
+    <p:sldId id="256" r:id="rId2"/>
+    <p:sldId id="257" r:id="rId3"/>
+    <p:sldId id="258" r:id="rId4"/>
+    <p:sldId id="259" r:id="rId5"/>
+    <p:sldId id="260" r:id="rId6"/>
+    <p:sldId id="261" r:id="rId7"/>
+    <p:sldId id="262" r:id="rId8"/>
+    <p:sldId id="263" r:id="rId9"/>
   </p:sldIdLst>
-  <p:sldSz cx="12191969" cy="6858000" type="screen4x3"/>
+  <p:sldSz cx="12192000" cy="6858000"/>
   <p:notesSz cx="6858000" cy="9144000"/>
   <p:defaultTextStyle>
     <a:defPPr>
@@ -111,6 +111,22 @@
       </a:defRPr>
     </a:lvl9pPr>
   </p:defaultTextStyle>
+  <p:extLst>
+    <p:ext uri="{EFAFB233-063F-42B5-8137-9DF3F51BA10A}">
+      <p15:sldGuideLst xmlns:p15="http://schemas.microsoft.com/office/powerpoint/2012/main">
+        <p15:guide id="1" orient="horz" pos="2160">
+          <p15:clr>
+            <a:srgbClr val="A4A3A4"/>
+          </p15:clr>
+        </p15:guide>
+        <p15:guide id="2" pos="2880">
+          <p15:clr>
+            <a:srgbClr val="A4A3A4"/>
+          </p15:clr>
+        </p15:guide>
+      </p15:sldGuideLst>
+    </p:ext>
+  </p:extLst>
 </p:presentation>
 </file>
 
@@ -152,10 +168,9 @@
           <a:lstStyle/>
           <a:p>
             <a:r>
-              <a:rPr lang="en-US" smtClean="0"/>
+              <a:rPr lang="en-US"/>
               <a:t>Click to edit Master title style</a:t>
             </a:r>
-            <a:endParaRPr lang="en-US"/>
           </a:p>
         </p:txBody>
       </p:sp>
@@ -271,10 +286,9 @@
           </a:lstStyle>
           <a:p>
             <a:r>
-              <a:rPr lang="en-US" smtClean="0"/>
+              <a:rPr lang="en-US"/>
               <a:t>Click to edit Master subtitle style</a:t>
             </a:r>
-            <a:endParaRPr lang="en-US"/>
           </a:p>
         </p:txBody>
       </p:sp>
@@ -295,7 +309,7 @@
           <a:p>
             <a:fld id="{5BCAD085-E8A6-8845-BD4E-CB4CCA059FC4}" type="datetimeFigureOut">
               <a:rPr lang="en-US" smtClean="0"/>
-              <a:t>1/27/13</a:t>
+              <a:t>7/23/2026</a:t>
             </a:fld>
             <a:endParaRPr lang="en-US"/>
           </a:p>
@@ -389,10 +403,9 @@
           <a:lstStyle/>
           <a:p>
             <a:r>
-              <a:rPr lang="en-US" smtClean="0"/>
+              <a:rPr lang="en-US"/>
               <a:t>Click to edit Master title style</a:t>
             </a:r>
-            <a:endParaRPr lang="en-US"/>
           </a:p>
         </p:txBody>
       </p:sp>
@@ -413,38 +426,37 @@
           <a:p>
             <a:pPr lvl="0"/>
             <a:r>
-              <a:rPr lang="en-US" smtClean="0"/>
+              <a:rPr lang="en-US"/>
               <a:t>Click to edit Master text styles</a:t>
             </a:r>
           </a:p>
           <a:p>
             <a:pPr lvl="1"/>
             <a:r>
-              <a:rPr lang="en-US" smtClean="0"/>
+              <a:rPr lang="en-US"/>
               <a:t>Second level</a:t>
             </a:r>
           </a:p>
           <a:p>
             <a:pPr lvl="2"/>
             <a:r>
-              <a:rPr lang="en-US" smtClean="0"/>
+              <a:rPr lang="en-US"/>
               <a:t>Third level</a:t>
             </a:r>
           </a:p>
           <a:p>
             <a:pPr lvl="3"/>
             <a:r>
-              <a:rPr lang="en-US" smtClean="0"/>
+              <a:rPr lang="en-US"/>
               <a:t>Fourth level</a:t>
             </a:r>
           </a:p>
           <a:p>
             <a:pPr lvl="4"/>
             <a:r>
-              <a:rPr lang="en-US" smtClean="0"/>
+              <a:rPr lang="en-US"/>
               <a:t>Fifth level</a:t>
             </a:r>
-            <a:endParaRPr lang="en-US"/>
           </a:p>
         </p:txBody>
       </p:sp>
@@ -465,7 +477,7 @@
           <a:p>
             <a:fld id="{5BCAD085-E8A6-8845-BD4E-CB4CCA059FC4}" type="datetimeFigureOut">
               <a:rPr lang="en-US" smtClean="0"/>
-              <a:t>1/27/13</a:t>
+              <a:t>7/23/2026</a:t>
             </a:fld>
             <a:endParaRPr lang="en-US"/>
           </a:p>
@@ -564,10 +576,9 @@
           <a:lstStyle/>
           <a:p>
             <a:r>
-              <a:rPr lang="en-US" smtClean="0"/>
+              <a:rPr lang="en-US"/>
               <a:t>Click to edit Master title style</a:t>
             </a:r>
-            <a:endParaRPr lang="en-US"/>
           </a:p>
         </p:txBody>
       </p:sp>
@@ -593,38 +604,37 @@
           <a:p>
             <a:pPr lvl="0"/>
             <a:r>
-              <a:rPr lang="en-US" smtClean="0"/>
+              <a:rPr lang="en-US"/>
               <a:t>Click to edit Master text styles</a:t>
             </a:r>
           </a:p>
           <a:p>
             <a:pPr lvl="1"/>
             <a:r>
-              <a:rPr lang="en-US" smtClean="0"/>
+              <a:rPr lang="en-US"/>
               <a:t>Second level</a:t>
             </a:r>
           </a:p>
           <a:p>
             <a:pPr lvl="2"/>
             <a:r>
-              <a:rPr lang="en-US" smtClean="0"/>
+              <a:rPr lang="en-US"/>
               <a:t>Third level</a:t>
             </a:r>
           </a:p>
           <a:p>
             <a:pPr lvl="3"/>
             <a:r>
-              <a:rPr lang="en-US" smtClean="0"/>
+              <a:rPr lang="en-US"/>
               <a:t>Fourth level</a:t>
             </a:r>
           </a:p>
           <a:p>
             <a:pPr lvl="4"/>
             <a:r>
-              <a:rPr lang="en-US" smtClean="0"/>
+              <a:rPr lang="en-US"/>
               <a:t>Fifth level</a:t>
             </a:r>
-            <a:endParaRPr lang="en-US"/>
           </a:p>
         </p:txBody>
       </p:sp>
@@ -645,7 +655,7 @@
           <a:p>
             <a:fld id="{5BCAD085-E8A6-8845-BD4E-CB4CCA059FC4}" type="datetimeFigureOut">
               <a:rPr lang="en-US" smtClean="0"/>
-              <a:t>1/27/13</a:t>
+              <a:t>7/23/2026</a:t>
             </a:fld>
             <a:endParaRPr lang="en-US"/>
           </a:p>
@@ -739,10 +749,9 @@
           <a:lstStyle/>
           <a:p>
             <a:r>
-              <a:rPr lang="en-US" smtClean="0"/>
+              <a:rPr lang="en-US"/>
               <a:t>Click to edit Master title style</a:t>
             </a:r>
-            <a:endParaRPr lang="en-US"/>
           </a:p>
         </p:txBody>
       </p:sp>
@@ -763,38 +772,37 @@
           <a:p>
             <a:pPr lvl="0"/>
             <a:r>
-              <a:rPr lang="en-US" smtClean="0"/>
+              <a:rPr lang="en-US"/>
               <a:t>Click to edit Master text styles</a:t>
             </a:r>
           </a:p>
           <a:p>
             <a:pPr lvl="1"/>
             <a:r>
-              <a:rPr lang="en-US" smtClean="0"/>
+              <a:rPr lang="en-US"/>
               <a:t>Second level</a:t>
             </a:r>
           </a:p>
           <a:p>
             <a:pPr lvl="2"/>
             <a:r>
-              <a:rPr lang="en-US" smtClean="0"/>
+              <a:rPr lang="en-US"/>
               <a:t>Third level</a:t>
             </a:r>
           </a:p>
           <a:p>
             <a:pPr lvl="3"/>
             <a:r>
-              <a:rPr lang="en-US" smtClean="0"/>
+              <a:rPr lang="en-US"/>
               <a:t>Fourth level</a:t>
             </a:r>
           </a:p>
           <a:p>
             <a:pPr lvl="4"/>
             <a:r>
-              <a:rPr lang="en-US" smtClean="0"/>
+              <a:rPr lang="en-US"/>
               <a:t>Fifth level</a:t>
             </a:r>
-            <a:endParaRPr lang="en-US"/>
           </a:p>
         </p:txBody>
       </p:sp>
@@ -815,7 +823,7 @@
           <a:p>
             <a:fld id="{5BCAD085-E8A6-8845-BD4E-CB4CCA059FC4}" type="datetimeFigureOut">
               <a:rPr lang="en-US" smtClean="0"/>
-              <a:t>1/27/13</a:t>
+              <a:t>7/23/2026</a:t>
             </a:fld>
             <a:endParaRPr lang="en-US"/>
           </a:p>
@@ -918,10 +926,9 @@
           </a:lstStyle>
           <a:p>
             <a:r>
-              <a:rPr lang="en-US" smtClean="0"/>
+              <a:rPr lang="en-US"/>
               <a:t>Click to edit Master title style</a:t>
             </a:r>
-            <a:endParaRPr lang="en-US"/>
           </a:p>
         </p:txBody>
       </p:sp>
@@ -1038,7 +1045,7 @@
           <a:p>
             <a:pPr lvl="0"/>
             <a:r>
-              <a:rPr lang="en-US" smtClean="0"/>
+              <a:rPr lang="en-US"/>
               <a:t>Click to edit Master text styles</a:t>
             </a:r>
           </a:p>
@@ -1061,7 +1068,7 @@
           <a:p>
             <a:fld id="{5BCAD085-E8A6-8845-BD4E-CB4CCA059FC4}" type="datetimeFigureOut">
               <a:rPr lang="en-US" smtClean="0"/>
-              <a:t>1/27/13</a:t>
+              <a:t>7/23/2026</a:t>
             </a:fld>
             <a:endParaRPr lang="en-US"/>
           </a:p>
@@ -1155,10 +1162,9 @@
           <a:lstStyle/>
           <a:p>
             <a:r>
-              <a:rPr lang="en-US" smtClean="0"/>
+              <a:rPr lang="en-US"/>
               <a:t>Click to edit Master title style</a:t>
             </a:r>
-            <a:endParaRPr lang="en-US"/>
           </a:p>
         </p:txBody>
       </p:sp>
@@ -1212,38 +1218,37 @@
           <a:p>
             <a:pPr lvl="0"/>
             <a:r>
-              <a:rPr lang="en-US" smtClean="0"/>
+              <a:rPr lang="en-US"/>
               <a:t>Click to edit Master text styles</a:t>
             </a:r>
           </a:p>
           <a:p>
             <a:pPr lvl="1"/>
             <a:r>
-              <a:rPr lang="en-US" smtClean="0"/>
+              <a:rPr lang="en-US"/>
               <a:t>Second level</a:t>
             </a:r>
           </a:p>
           <a:p>
             <a:pPr lvl="2"/>
             <a:r>
-              <a:rPr lang="en-US" smtClean="0"/>
+              <a:rPr lang="en-US"/>
               <a:t>Third level</a:t>
             </a:r>
           </a:p>
           <a:p>
             <a:pPr lvl="3"/>
             <a:r>
-              <a:rPr lang="en-US" smtClean="0"/>
+              <a:rPr lang="en-US"/>
               <a:t>Fourth level</a:t>
             </a:r>
           </a:p>
           <a:p>
             <a:pPr lvl="4"/>
             <a:r>
-              <a:rPr lang="en-US" smtClean="0"/>
+              <a:rPr lang="en-US"/>
               <a:t>Fifth level</a:t>
             </a:r>
-            <a:endParaRPr lang="en-US"/>
           </a:p>
         </p:txBody>
       </p:sp>
@@ -1297,38 +1302,37 @@
           <a:p>
             <a:pPr lvl="0"/>
             <a:r>
-              <a:rPr lang="en-US" smtClean="0"/>
+              <a:rPr lang="en-US"/>
               <a:t>Click to edit Master text styles</a:t>
             </a:r>
           </a:p>
           <a:p>
             <a:pPr lvl="1"/>
             <a:r>
-              <a:rPr lang="en-US" smtClean="0"/>
+              <a:rPr lang="en-US"/>
               <a:t>Second level</a:t>
             </a:r>
           </a:p>
           <a:p>
             <a:pPr lvl="2"/>
             <a:r>
-              <a:rPr lang="en-US" smtClean="0"/>
+              <a:rPr lang="en-US"/>
               <a:t>Third level</a:t>
             </a:r>
           </a:p>
           <a:p>
             <a:pPr lvl="3"/>
             <a:r>
-              <a:rPr lang="en-US" smtClean="0"/>
+              <a:rPr lang="en-US"/>
               <a:t>Fourth level</a:t>
             </a:r>
           </a:p>
           <a:p>
             <a:pPr lvl="4"/>
             <a:r>
-              <a:rPr lang="en-US" smtClean="0"/>
+              <a:rPr lang="en-US"/>
               <a:t>Fifth level</a:t>
             </a:r>
-            <a:endParaRPr lang="en-US"/>
           </a:p>
         </p:txBody>
       </p:sp>
@@ -1349,7 +1353,7 @@
           <a:p>
             <a:fld id="{5BCAD085-E8A6-8845-BD4E-CB4CCA059FC4}" type="datetimeFigureOut">
               <a:rPr lang="en-US" smtClean="0"/>
-              <a:t>1/27/13</a:t>
+              <a:t>7/23/2026</a:t>
             </a:fld>
             <a:endParaRPr lang="en-US"/>
           </a:p>
@@ -1447,10 +1451,9 @@
           </a:lstStyle>
           <a:p>
             <a:r>
-              <a:rPr lang="en-US" smtClean="0"/>
+              <a:rPr lang="en-US"/>
               <a:t>Click to edit Master title style</a:t>
             </a:r>
-            <a:endParaRPr lang="en-US"/>
           </a:p>
         </p:txBody>
       </p:sp>
@@ -1513,7 +1516,7 @@
           <a:p>
             <a:pPr lvl="0"/>
             <a:r>
-              <a:rPr lang="en-US" smtClean="0"/>
+              <a:rPr lang="en-US"/>
               <a:t>Click to edit Master text styles</a:t>
             </a:r>
           </a:p>
@@ -1569,38 +1572,37 @@
           <a:p>
             <a:pPr lvl="0"/>
             <a:r>
-              <a:rPr lang="en-US" smtClean="0"/>
+              <a:rPr lang="en-US"/>
               <a:t>Click to edit Master text styles</a:t>
             </a:r>
           </a:p>
           <a:p>
             <a:pPr lvl="1"/>
             <a:r>
-              <a:rPr lang="en-US" smtClean="0"/>
+              <a:rPr lang="en-US"/>
               <a:t>Second level</a:t>
             </a:r>
           </a:p>
           <a:p>
             <a:pPr lvl="2"/>
             <a:r>
-              <a:rPr lang="en-US" smtClean="0"/>
+              <a:rPr lang="en-US"/>
               <a:t>Third level</a:t>
             </a:r>
           </a:p>
           <a:p>
             <a:pPr lvl="3"/>
             <a:r>
-              <a:rPr lang="en-US" smtClean="0"/>
+              <a:rPr lang="en-US"/>
               <a:t>Fourth level</a:t>
             </a:r>
           </a:p>
           <a:p>
             <a:pPr lvl="4"/>
             <a:r>
-              <a:rPr lang="en-US" smtClean="0"/>
+              <a:rPr lang="en-US"/>
               <a:t>Fifth level</a:t>
             </a:r>
-            <a:endParaRPr lang="en-US"/>
           </a:p>
         </p:txBody>
       </p:sp>
@@ -1663,7 +1665,7 @@
           <a:p>
             <a:pPr lvl="0"/>
             <a:r>
-              <a:rPr lang="en-US" smtClean="0"/>
+              <a:rPr lang="en-US"/>
               <a:t>Click to edit Master text styles</a:t>
             </a:r>
           </a:p>
@@ -1719,38 +1721,37 @@
           <a:p>
             <a:pPr lvl="0"/>
             <a:r>
-              <a:rPr lang="en-US" smtClean="0"/>
+              <a:rPr lang="en-US"/>
               <a:t>Click to edit Master text styles</a:t>
             </a:r>
           </a:p>
           <a:p>
             <a:pPr lvl="1"/>
             <a:r>
-              <a:rPr lang="en-US" smtClean="0"/>
+              <a:rPr lang="en-US"/>
               <a:t>Second level</a:t>
             </a:r>
           </a:p>
           <a:p>
             <a:pPr lvl="2"/>
             <a:r>
-              <a:rPr lang="en-US" smtClean="0"/>
+              <a:rPr lang="en-US"/>
               <a:t>Third level</a:t>
             </a:r>
           </a:p>
           <a:p>
             <a:pPr lvl="3"/>
             <a:r>
-              <a:rPr lang="en-US" smtClean="0"/>
+              <a:rPr lang="en-US"/>
               <a:t>Fourth level</a:t>
             </a:r>
           </a:p>
           <a:p>
             <a:pPr lvl="4"/>
             <a:r>
-              <a:rPr lang="en-US" smtClean="0"/>
+              <a:rPr lang="en-US"/>
               <a:t>Fifth level</a:t>
             </a:r>
-            <a:endParaRPr lang="en-US"/>
           </a:p>
         </p:txBody>
       </p:sp>
@@ -1771,7 +1772,7 @@
           <a:p>
             <a:fld id="{5BCAD085-E8A6-8845-BD4E-CB4CCA059FC4}" type="datetimeFigureOut">
               <a:rPr lang="en-US" smtClean="0"/>
-              <a:t>1/27/13</a:t>
+              <a:t>7/23/2026</a:t>
             </a:fld>
             <a:endParaRPr lang="en-US"/>
           </a:p>
@@ -1865,10 +1866,9 @@
           <a:lstStyle/>
           <a:p>
             <a:r>
-              <a:rPr lang="en-US" smtClean="0"/>
+              <a:rPr lang="en-US"/>
               <a:t>Click to edit Master title style</a:t>
             </a:r>
-            <a:endParaRPr lang="en-US"/>
           </a:p>
         </p:txBody>
       </p:sp>
@@ -1889,7 +1889,7 @@
           <a:p>
             <a:fld id="{5BCAD085-E8A6-8845-BD4E-CB4CCA059FC4}" type="datetimeFigureOut">
               <a:rPr lang="en-US" smtClean="0"/>
-              <a:t>1/27/13</a:t>
+              <a:t>7/23/2026</a:t>
             </a:fld>
             <a:endParaRPr lang="en-US"/>
           </a:p>
@@ -1984,7 +1984,7 @@
           <a:p>
             <a:fld id="{5BCAD085-E8A6-8845-BD4E-CB4CCA059FC4}" type="datetimeFigureOut">
               <a:rPr lang="en-US" smtClean="0"/>
-              <a:t>1/27/13</a:t>
+              <a:t>7/23/2026</a:t>
             </a:fld>
             <a:endParaRPr lang="en-US"/>
           </a:p>
@@ -2087,10 +2087,9 @@
           </a:lstStyle>
           <a:p>
             <a:r>
-              <a:rPr lang="en-US" smtClean="0"/>
+              <a:rPr lang="en-US"/>
               <a:t>Click to edit Master title style</a:t>
             </a:r>
-            <a:endParaRPr lang="en-US"/>
           </a:p>
         </p:txBody>
       </p:sp>
@@ -2144,38 +2143,37 @@
           <a:p>
             <a:pPr lvl="0"/>
             <a:r>
-              <a:rPr lang="en-US" smtClean="0"/>
+              <a:rPr lang="en-US"/>
               <a:t>Click to edit Master text styles</a:t>
             </a:r>
           </a:p>
           <a:p>
             <a:pPr lvl="1"/>
             <a:r>
-              <a:rPr lang="en-US" smtClean="0"/>
+              <a:rPr lang="en-US"/>
               <a:t>Second level</a:t>
             </a:r>
           </a:p>
           <a:p>
             <a:pPr lvl="2"/>
             <a:r>
-              <a:rPr lang="en-US" smtClean="0"/>
+              <a:rPr lang="en-US"/>
               <a:t>Third level</a:t>
             </a:r>
           </a:p>
           <a:p>
             <a:pPr lvl="3"/>
             <a:r>
-              <a:rPr lang="en-US" smtClean="0"/>
+              <a:rPr lang="en-US"/>
               <a:t>Fourth level</a:t>
             </a:r>
           </a:p>
           <a:p>
             <a:pPr lvl="4"/>
             <a:r>
-              <a:rPr lang="en-US" smtClean="0"/>
+              <a:rPr lang="en-US"/>
               <a:t>Fifth level</a:t>
             </a:r>
-            <a:endParaRPr lang="en-US"/>
           </a:p>
         </p:txBody>
       </p:sp>
@@ -2238,7 +2236,7 @@
           <a:p>
             <a:pPr lvl="0"/>
             <a:r>
-              <a:rPr lang="en-US" smtClean="0"/>
+              <a:rPr lang="en-US"/>
               <a:t>Click to edit Master text styles</a:t>
             </a:r>
           </a:p>
@@ -2261,7 +2259,7 @@
           <a:p>
             <a:fld id="{5BCAD085-E8A6-8845-BD4E-CB4CCA059FC4}" type="datetimeFigureOut">
               <a:rPr lang="en-US" smtClean="0"/>
-              <a:t>1/27/13</a:t>
+              <a:t>7/23/2026</a:t>
             </a:fld>
             <a:endParaRPr lang="en-US"/>
           </a:p>
@@ -2364,10 +2362,9 @@
           </a:lstStyle>
           <a:p>
             <a:r>
-              <a:rPr lang="en-US" smtClean="0"/>
+              <a:rPr lang="en-US"/>
               <a:t>Click to edit Master title style</a:t>
             </a:r>
-            <a:endParaRPr lang="en-US"/>
           </a:p>
         </p:txBody>
       </p:sp>
@@ -2491,7 +2488,7 @@
           <a:p>
             <a:pPr lvl="0"/>
             <a:r>
-              <a:rPr lang="en-US" smtClean="0"/>
+              <a:rPr lang="en-US"/>
               <a:t>Click to edit Master text styles</a:t>
             </a:r>
           </a:p>
@@ -2514,7 +2511,7 @@
           <a:p>
             <a:fld id="{5BCAD085-E8A6-8845-BD4E-CB4CCA059FC4}" type="datetimeFigureOut">
               <a:rPr lang="en-US" smtClean="0"/>
-              <a:t>1/27/13</a:t>
+              <a:t>7/23/2026</a:t>
             </a:fld>
             <a:endParaRPr lang="en-US"/>
           </a:p>
@@ -2623,10 +2620,9 @@
           <a:lstStyle/>
           <a:p>
             <a:r>
-              <a:rPr lang="en-US" smtClean="0"/>
+              <a:rPr lang="en-US"/>
               <a:t>Click to edit Master title style</a:t>
             </a:r>
-            <a:endParaRPr lang="en-US"/>
           </a:p>
         </p:txBody>
       </p:sp>
@@ -2657,38 +2653,37 @@
           <a:p>
             <a:pPr lvl="0"/>
             <a:r>
-              <a:rPr lang="en-US" smtClean="0"/>
+              <a:rPr lang="en-US"/>
               <a:t>Click to edit Master text styles</a:t>
             </a:r>
           </a:p>
           <a:p>
             <a:pPr lvl="1"/>
             <a:r>
-              <a:rPr lang="en-US" smtClean="0"/>
+              <a:rPr lang="en-US"/>
               <a:t>Second level</a:t>
             </a:r>
           </a:p>
           <a:p>
             <a:pPr lvl="2"/>
             <a:r>
-              <a:rPr lang="en-US" smtClean="0"/>
+              <a:rPr lang="en-US"/>
               <a:t>Third level</a:t>
             </a:r>
           </a:p>
           <a:p>
             <a:pPr lvl="3"/>
             <a:r>
-              <a:rPr lang="en-US" smtClean="0"/>
+              <a:rPr lang="en-US"/>
               <a:t>Fourth level</a:t>
             </a:r>
           </a:p>
           <a:p>
             <a:pPr lvl="4"/>
             <a:r>
-              <a:rPr lang="en-US" smtClean="0"/>
+              <a:rPr lang="en-US"/>
               <a:t>Fifth level</a:t>
             </a:r>
-            <a:endParaRPr lang="en-US"/>
           </a:p>
         </p:txBody>
       </p:sp>
@@ -2727,7 +2722,7 @@
           <a:p>
             <a:fld id="{5BCAD085-E8A6-8845-BD4E-CB4CCA059FC4}" type="datetimeFigureOut">
               <a:rPr lang="en-US" smtClean="0"/>
-              <a:t>1/27/13</a:t>
+              <a:t>7/23/2026</a:t>
             </a:fld>
             <a:endParaRPr lang="en-US"/>
           </a:p>
@@ -3086,7 +3081,7 @@
 </file>
 
 <file path=ppt/slides/slide1.xml><?xml version="1.0" encoding="utf-8"?>
-<p:sld xmlns:a="http://schemas.openxmlformats.org/drawingml/2006/main" xmlns:p="http://schemas.openxmlformats.org/presentationml/2006/main" xmlns:r="http://schemas.openxmlformats.org/officeDocument/2006/relationships">
+<p:sld xmlns:a="http://schemas.openxmlformats.org/drawingml/2006/main" xmlns:r="http://schemas.openxmlformats.org/officeDocument/2006/relationships" xmlns:p="http://schemas.openxmlformats.org/presentationml/2006/main">
   <p:cSld>
     <p:spTree>
       <p:nvGrpSpPr>
@@ -3094,7 +3089,14 @@
         <p:cNvGrpSpPr/>
         <p:nvPr/>
       </p:nvGrpSpPr>
-      <p:grpSpPr/>
+      <p:grpSpPr>
+        <a:xfrm>
+          <a:off x="0" y="0"/>
+          <a:ext cx="0" cy="0"/>
+          <a:chOff x="0" y="0"/>
+          <a:chExt cx="0" cy="0"/>
+        </a:xfrm>
+      </p:grpSpPr>
       <p:sp>
         <p:nvSpPr>
           <p:cNvPr id="2" name="Rectangle 1"/>
@@ -3118,7 +3120,7 @@
                 <a:srgbClr val="0A0E17"/>
               </a:gs>
             </a:gsLst>
-            <a:lin scaled="0" ang="18000000"/>
+            <a:lin ang="18000000" scaled="0"/>
           </a:gradFill>
           <a:ln>
             <a:noFill/>
@@ -3144,6 +3146,7 @@
           <a:lstStyle/>
           <a:p>
             <a:pPr algn="ctr"/>
+            <a:endParaRPr/>
           </a:p>
         </p:txBody>
       </p:sp>
@@ -3190,6 +3193,7 @@
           <a:lstStyle/>
           <a:p>
             <a:pPr algn="ctr"/>
+            <a:endParaRPr/>
           </a:p>
         </p:txBody>
       </p:sp>
@@ -3236,6 +3240,7 @@
           <a:lstStyle/>
           <a:p>
             <a:pPr algn="ctr"/>
+            <a:endParaRPr/>
           </a:p>
         </p:txBody>
       </p:sp>
@@ -3264,7 +3269,7 @@
                 <a:srgbClr val="22D3EE"/>
               </a:gs>
             </a:gsLst>
-            <a:lin scaled="0" ang="18900000"/>
+            <a:lin ang="18900000" scaled="0"/>
           </a:gradFill>
           <a:ln>
             <a:noFill/>
@@ -3319,7 +3324,7 @@
           <a:noFill/>
         </p:spPr>
         <p:txBody>
-          <a:bodyPr wrap="square" anchor="ctr" lIns="0" rIns="0" tIns="0" bIns="0">
+          <a:bodyPr wrap="square" lIns="0" tIns="0" rIns="0" bIns="0" anchor="ctr">
             <a:spAutoFit/>
           </a:bodyPr>
           <a:lstStyle/>
@@ -3386,7 +3391,7 @@
           <a:noFill/>
         </p:spPr>
         <p:txBody>
-          <a:bodyPr wrap="square" anchor="t" lIns="0" rIns="0" tIns="0" bIns="0">
+          <a:bodyPr wrap="square" lIns="0" tIns="0" rIns="0" bIns="0" anchor="t">
             <a:spAutoFit/>
           </a:bodyPr>
           <a:lstStyle/>
@@ -3431,7 +3436,7 @@
           <a:noFill/>
         </p:spPr>
         <p:txBody>
-          <a:bodyPr wrap="square" anchor="t" lIns="0" rIns="0" tIns="0" bIns="0">
+          <a:bodyPr wrap="square" lIns="0" tIns="0" rIns="0" bIns="0" anchor="t">
             <a:spAutoFit/>
           </a:bodyPr>
           <a:lstStyle/>
@@ -3498,7 +3503,7 @@
           <a:noFill/>
         </p:spPr>
         <p:txBody>
-          <a:bodyPr wrap="square" anchor="t" lIns="0" rIns="0" tIns="0" bIns="0">
+          <a:bodyPr wrap="square" lIns="0" tIns="0" rIns="0" bIns="0" anchor="t">
             <a:spAutoFit/>
           </a:bodyPr>
           <a:lstStyle/>
@@ -3571,6 +3576,7 @@
           <a:lstStyle/>
           <a:p>
             <a:pPr algn="ctr"/>
+            <a:endParaRPr/>
           </a:p>
         </p:txBody>
       </p:sp>
@@ -3615,6 +3621,7 @@
           <a:lstStyle/>
           <a:p>
             <a:pPr algn="ctr"/>
+            <a:endParaRPr/>
           </a:p>
         </p:txBody>
       </p:sp>
@@ -3635,7 +3642,7 @@
           <a:noFill/>
         </p:spPr>
         <p:txBody>
-          <a:bodyPr wrap="square" anchor="t" lIns="0" rIns="0" tIns="0" bIns="0">
+          <a:bodyPr wrap="square" lIns="0" tIns="0" rIns="0" bIns="0" anchor="t">
             <a:spAutoFit/>
           </a:bodyPr>
           <a:lstStyle/>
@@ -3680,7 +3687,7 @@
           <a:noFill/>
         </p:spPr>
         <p:txBody>
-          <a:bodyPr wrap="square" anchor="t" lIns="0" rIns="0" tIns="0" bIns="0">
+          <a:bodyPr wrap="square" lIns="0" tIns="0" rIns="0" bIns="0" anchor="t">
             <a:spAutoFit/>
           </a:bodyPr>
           <a:lstStyle/>
@@ -3753,6 +3760,7 @@
           <a:lstStyle/>
           <a:p>
             <a:pPr algn="ctr"/>
+            <a:endParaRPr/>
           </a:p>
         </p:txBody>
       </p:sp>
@@ -3797,6 +3805,7 @@
           <a:lstStyle/>
           <a:p>
             <a:pPr algn="ctr"/>
+            <a:endParaRPr/>
           </a:p>
         </p:txBody>
       </p:sp>
@@ -3817,7 +3826,7 @@
           <a:noFill/>
         </p:spPr>
         <p:txBody>
-          <a:bodyPr wrap="square" anchor="t" lIns="0" rIns="0" tIns="0" bIns="0">
+          <a:bodyPr wrap="square" lIns="0" tIns="0" rIns="0" bIns="0" anchor="t">
             <a:spAutoFit/>
           </a:bodyPr>
           <a:lstStyle/>
@@ -3862,7 +3871,7 @@
           <a:noFill/>
         </p:spPr>
         <p:txBody>
-          <a:bodyPr wrap="square" anchor="t" lIns="0" rIns="0" tIns="0" bIns="0">
+          <a:bodyPr wrap="square" lIns="0" tIns="0" rIns="0" bIns="0" anchor="t">
             <a:spAutoFit/>
           </a:bodyPr>
           <a:lstStyle/>
@@ -3935,6 +3944,7 @@
           <a:lstStyle/>
           <a:p>
             <a:pPr algn="ctr"/>
+            <a:endParaRPr/>
           </a:p>
         </p:txBody>
       </p:sp>
@@ -3979,6 +3989,7 @@
           <a:lstStyle/>
           <a:p>
             <a:pPr algn="ctr"/>
+            <a:endParaRPr/>
           </a:p>
         </p:txBody>
       </p:sp>
@@ -3999,7 +4010,7 @@
           <a:noFill/>
         </p:spPr>
         <p:txBody>
-          <a:bodyPr wrap="square" anchor="t" lIns="0" rIns="0" tIns="0" bIns="0">
+          <a:bodyPr wrap="square" lIns="0" tIns="0" rIns="0" bIns="0" anchor="t">
             <a:spAutoFit/>
           </a:bodyPr>
           <a:lstStyle/>
@@ -4044,7 +4055,7 @@
           <a:noFill/>
         </p:spPr>
         <p:txBody>
-          <a:bodyPr wrap="square" anchor="t" lIns="0" rIns="0" tIns="0" bIns="0">
+          <a:bodyPr wrap="square" lIns="0" tIns="0" rIns="0" bIns="0" anchor="t">
             <a:spAutoFit/>
           </a:bodyPr>
           <a:lstStyle/>
@@ -4117,6 +4128,7 @@
           <a:lstStyle/>
           <a:p>
             <a:pPr algn="ctr"/>
+            <a:endParaRPr/>
           </a:p>
         </p:txBody>
       </p:sp>
@@ -4161,6 +4173,7 @@
           <a:lstStyle/>
           <a:p>
             <a:pPr algn="ctr"/>
+            <a:endParaRPr/>
           </a:p>
         </p:txBody>
       </p:sp>
@@ -4181,7 +4194,7 @@
           <a:noFill/>
         </p:spPr>
         <p:txBody>
-          <a:bodyPr wrap="square" anchor="t" lIns="0" rIns="0" tIns="0" bIns="0">
+          <a:bodyPr wrap="square" lIns="0" tIns="0" rIns="0" bIns="0" anchor="t">
             <a:spAutoFit/>
           </a:bodyPr>
           <a:lstStyle/>
@@ -4226,7 +4239,7 @@
           <a:noFill/>
         </p:spPr>
         <p:txBody>
-          <a:bodyPr wrap="square" anchor="t" lIns="0" rIns="0" tIns="0" bIns="0">
+          <a:bodyPr wrap="square" lIns="0" tIns="0" rIns="0" bIns="0" anchor="t">
             <a:spAutoFit/>
           </a:bodyPr>
           <a:lstStyle/>
@@ -4299,6 +4312,7 @@
           <a:lstStyle/>
           <a:p>
             <a:pPr algn="ctr"/>
+            <a:endParaRPr/>
           </a:p>
         </p:txBody>
       </p:sp>
@@ -4343,33 +4357,10 @@
           <a:lstStyle/>
           <a:p>
             <a:pPr algn="ctr"/>
-          </a:p>
-        </p:txBody>
-      </p:sp>
-      <p:pic>
-        <p:nvPicPr>
-          <p:cNvPr id="28" name="Picture 27" descr="creator.png"/>
-          <p:cNvPicPr>
-            <a:picLocks noChangeAspect="1"/>
-          </p:cNvPicPr>
-          <p:nvPr/>
-        </p:nvPicPr>
-        <p:blipFill>
-          <a:blip r:embed="rId2"/>
-          <a:stretch>
-            <a:fillRect/>
-          </a:stretch>
-        </p:blipFill>
-        <p:spPr>
-          <a:xfrm>
-            <a:off x="7507224" y="1982570"/>
-            <a:ext cx="4187952" cy="2801419"/>
-          </a:xfrm>
-          <a:prstGeom prst="rect">
-            <a:avLst/>
-          </a:prstGeom>
-        </p:spPr>
-      </p:pic>
+            <a:endParaRPr/>
+          </a:p>
+        </p:txBody>
+      </p:sp>
       <p:sp>
         <p:nvSpPr>
           <p:cNvPr id="29" name="TextBox 28"/>
@@ -4387,7 +4378,7 @@
           <a:noFill/>
         </p:spPr>
         <p:txBody>
-          <a:bodyPr wrap="square" anchor="t" lIns="0" rIns="0" tIns="0" bIns="0">
+          <a:bodyPr wrap="square" lIns="0" tIns="0" rIns="0" bIns="0" anchor="t">
             <a:spAutoFit/>
           </a:bodyPr>
           <a:lstStyle/>
@@ -4432,7 +4423,7 @@
           <a:noFill/>
         </p:spPr>
         <p:txBody>
-          <a:bodyPr wrap="square" anchor="t" lIns="0" rIns="0" tIns="0" bIns="0">
+          <a:bodyPr wrap="square" lIns="0" tIns="0" rIns="0" bIns="0" anchor="t">
             <a:spAutoFit/>
           </a:bodyPr>
           <a:lstStyle/>
@@ -4486,7 +4477,7 @@
           <a:noFill/>
         </p:spPr>
         <p:txBody>
-          <a:bodyPr wrap="square" anchor="t" lIns="0" rIns="0" tIns="0" bIns="0">
+          <a:bodyPr wrap="square" lIns="0" tIns="0" rIns="0" bIns="0" anchor="t">
             <a:spAutoFit/>
           </a:bodyPr>
           <a:lstStyle/>
@@ -4514,6 +4505,30 @@
           </a:p>
         </p:txBody>
       </p:sp>
+      <p:pic>
+        <p:nvPicPr>
+          <p:cNvPr id="32" name="Picture 31" descr="shot-creator.png"/>
+          <p:cNvPicPr>
+            <a:picLocks noChangeAspect="1"/>
+          </p:cNvPicPr>
+          <p:nvPr/>
+        </p:nvPicPr>
+        <p:blipFill>
+          <a:blip r:embed="rId2"/>
+          <a:stretch>
+            <a:fillRect/>
+          </a:stretch>
+        </p:blipFill>
+        <p:spPr>
+          <a:xfrm>
+            <a:off x="7507224" y="1982570"/>
+            <a:ext cx="4187952" cy="2801419"/>
+          </a:xfrm>
+          <a:prstGeom prst="rect">
+            <a:avLst/>
+          </a:prstGeom>
+        </p:spPr>
+      </p:pic>
     </p:spTree>
   </p:cSld>
   <p:clrMapOvr>
@@ -4523,7 +4538,7 @@
 </file>
 
 <file path=ppt/slides/slide2.xml><?xml version="1.0" encoding="utf-8"?>
-<p:sld xmlns:a="http://schemas.openxmlformats.org/drawingml/2006/main" xmlns:p="http://schemas.openxmlformats.org/presentationml/2006/main" xmlns:r="http://schemas.openxmlformats.org/officeDocument/2006/relationships">
+<p:sld xmlns:a="http://schemas.openxmlformats.org/drawingml/2006/main" xmlns:r="http://schemas.openxmlformats.org/officeDocument/2006/relationships" xmlns:p="http://schemas.openxmlformats.org/presentationml/2006/main">
   <p:cSld>
     <p:spTree>
       <p:nvGrpSpPr>
@@ -4531,7 +4546,14 @@
         <p:cNvGrpSpPr/>
         <p:nvPr/>
       </p:nvGrpSpPr>
-      <p:grpSpPr/>
+      <p:grpSpPr>
+        <a:xfrm>
+          <a:off x="0" y="0"/>
+          <a:ext cx="0" cy="0"/>
+          <a:chOff x="0" y="0"/>
+          <a:chExt cx="0" cy="0"/>
+        </a:xfrm>
+      </p:grpSpPr>
       <p:sp>
         <p:nvSpPr>
           <p:cNvPr id="2" name="Rectangle 1"/>
@@ -4540,7 +4562,7 @@
         </p:nvSpPr>
         <p:spPr>
           <a:xfrm>
-            <a:off x="0" y="0"/>
+            <a:off x="0" y="8709"/>
             <a:ext cx="12191969" cy="6858000"/>
           </a:xfrm>
           <a:prstGeom prst="rect">
@@ -4555,7 +4577,7 @@
                 <a:srgbClr val="0A0E17"/>
               </a:gs>
             </a:gsLst>
-            <a:lin scaled="0" ang="18000000"/>
+            <a:lin ang="18000000" scaled="0"/>
           </a:gradFill>
           <a:ln>
             <a:noFill/>
@@ -4581,6 +4603,7 @@
           <a:lstStyle/>
           <a:p>
             <a:pPr algn="ctr"/>
+            <a:endParaRPr/>
           </a:p>
         </p:txBody>
       </p:sp>
@@ -4627,6 +4650,7 @@
           <a:lstStyle/>
           <a:p>
             <a:pPr algn="ctr"/>
+            <a:endParaRPr/>
           </a:p>
         </p:txBody>
       </p:sp>
@@ -4673,6 +4697,7 @@
           <a:lstStyle/>
           <a:p>
             <a:pPr algn="ctr"/>
+            <a:endParaRPr/>
           </a:p>
         </p:txBody>
       </p:sp>
@@ -4693,7 +4718,7 @@
           <a:noFill/>
         </p:spPr>
         <p:txBody>
-          <a:bodyPr wrap="square" anchor="t" lIns="0" rIns="0" tIns="0" bIns="0">
+          <a:bodyPr wrap="square" lIns="0" tIns="0" rIns="0" bIns="0" anchor="t">
             <a:spAutoFit/>
           </a:bodyPr>
           <a:lstStyle/>
@@ -4738,7 +4763,7 @@
           <a:noFill/>
         </p:spPr>
         <p:txBody>
-          <a:bodyPr wrap="square" anchor="t" lIns="0" rIns="0" tIns="0" bIns="0">
+          <a:bodyPr wrap="square" lIns="0" tIns="0" rIns="0" bIns="0" anchor="t">
             <a:spAutoFit/>
           </a:bodyPr>
           <a:lstStyle/>
@@ -4775,7 +4800,7 @@
         <p:spPr>
           <a:xfrm>
             <a:off x="566928" y="1298448"/>
-            <a:ext cx="11064240" cy="457200"/>
+            <a:ext cx="11064240" cy="216662"/>
           </a:xfrm>
           <a:prstGeom prst="rect">
             <a:avLst/>
@@ -4783,7 +4808,7 @@
           <a:noFill/>
         </p:spPr>
         <p:txBody>
-          <a:bodyPr wrap="square" anchor="t" lIns="0" rIns="0" tIns="0" bIns="0">
+          <a:bodyPr wrap="square" lIns="0" tIns="0" rIns="0" bIns="0" anchor="t">
             <a:spAutoFit/>
           </a:bodyPr>
           <a:lstStyle/>
@@ -4800,14 +4825,416 @@
               </a:spcAft>
             </a:pPr>
             <a:r>
-              <a:rPr sz="1250" b="0" i="0">
+              <a:rPr sz="1250" b="0" i="0" dirty="0" err="1">
                 <a:solidFill>
                   <a:srgbClr val="93A1B8"/>
                 </a:solidFill>
                 <a:latin typeface="Segoe UI"/>
               </a:rPr>
-              <a:t>Không code trước rồi mới hiểu. Mỗi bước trả lời một câu hỏi và tạo ra một đầu ra làm nền cho bước sau — thứ tự này chính là câu trả lời khi bị hỏi “sao làm X trước Y”.</a:t>
-            </a:r>
+              <a:t>Không</a:t>
+            </a:r>
+            <a:r>
+              <a:rPr sz="1250" b="0" i="0" dirty="0">
+                <a:solidFill>
+                  <a:srgbClr val="93A1B8"/>
+                </a:solidFill>
+                <a:latin typeface="Segoe UI"/>
+              </a:rPr>
+              <a:t> code </a:t>
+            </a:r>
+            <a:r>
+              <a:rPr sz="1250" b="0" i="0" dirty="0" err="1">
+                <a:solidFill>
+                  <a:srgbClr val="93A1B8"/>
+                </a:solidFill>
+                <a:latin typeface="Segoe UI"/>
+              </a:rPr>
+              <a:t>trước</a:t>
+            </a:r>
+            <a:r>
+              <a:rPr sz="1250" b="0" i="0" dirty="0">
+                <a:solidFill>
+                  <a:srgbClr val="93A1B8"/>
+                </a:solidFill>
+                <a:latin typeface="Segoe UI"/>
+              </a:rPr>
+              <a:t> </a:t>
+            </a:r>
+            <a:r>
+              <a:rPr sz="1250" b="0" i="0" dirty="0" err="1">
+                <a:solidFill>
+                  <a:srgbClr val="93A1B8"/>
+                </a:solidFill>
+                <a:latin typeface="Segoe UI"/>
+              </a:rPr>
+              <a:t>rồi</a:t>
+            </a:r>
+            <a:r>
+              <a:rPr sz="1250" b="0" i="0" dirty="0">
+                <a:solidFill>
+                  <a:srgbClr val="93A1B8"/>
+                </a:solidFill>
+                <a:latin typeface="Segoe UI"/>
+              </a:rPr>
+              <a:t> </a:t>
+            </a:r>
+            <a:r>
+              <a:rPr sz="1250" b="0" i="0" dirty="0" err="1">
+                <a:solidFill>
+                  <a:srgbClr val="93A1B8"/>
+                </a:solidFill>
+                <a:latin typeface="Segoe UI"/>
+              </a:rPr>
+              <a:t>mới</a:t>
+            </a:r>
+            <a:r>
+              <a:rPr sz="1250" b="0" i="0" dirty="0">
+                <a:solidFill>
+                  <a:srgbClr val="93A1B8"/>
+                </a:solidFill>
+                <a:latin typeface="Segoe UI"/>
+              </a:rPr>
+              <a:t> </a:t>
+            </a:r>
+            <a:r>
+              <a:rPr sz="1250" b="0" i="0" dirty="0" err="1">
+                <a:solidFill>
+                  <a:srgbClr val="93A1B8"/>
+                </a:solidFill>
+                <a:latin typeface="Segoe UI"/>
+              </a:rPr>
+              <a:t>hiểu</a:t>
+            </a:r>
+            <a:r>
+              <a:rPr sz="1250" b="0" i="0" dirty="0">
+                <a:solidFill>
+                  <a:srgbClr val="93A1B8"/>
+                </a:solidFill>
+                <a:latin typeface="Segoe UI"/>
+              </a:rPr>
+              <a:t>. </a:t>
+            </a:r>
+            <a:r>
+              <a:rPr sz="1250" b="0" i="0" dirty="0" err="1">
+                <a:solidFill>
+                  <a:srgbClr val="93A1B8"/>
+                </a:solidFill>
+                <a:latin typeface="Segoe UI"/>
+              </a:rPr>
+              <a:t>Mỗi</a:t>
+            </a:r>
+            <a:r>
+              <a:rPr sz="1250" b="0" i="0" dirty="0">
+                <a:solidFill>
+                  <a:srgbClr val="93A1B8"/>
+                </a:solidFill>
+                <a:latin typeface="Segoe UI"/>
+              </a:rPr>
+              <a:t> </a:t>
+            </a:r>
+            <a:r>
+              <a:rPr sz="1250" b="0" i="0" dirty="0" err="1">
+                <a:solidFill>
+                  <a:srgbClr val="93A1B8"/>
+                </a:solidFill>
+                <a:latin typeface="Segoe UI"/>
+              </a:rPr>
+              <a:t>bước</a:t>
+            </a:r>
+            <a:r>
+              <a:rPr sz="1250" b="0" i="0" dirty="0">
+                <a:solidFill>
+                  <a:srgbClr val="93A1B8"/>
+                </a:solidFill>
+                <a:latin typeface="Segoe UI"/>
+              </a:rPr>
+              <a:t> </a:t>
+            </a:r>
+            <a:r>
+              <a:rPr sz="1250" b="0" i="0" dirty="0" err="1">
+                <a:solidFill>
+                  <a:srgbClr val="93A1B8"/>
+                </a:solidFill>
+                <a:latin typeface="Segoe UI"/>
+              </a:rPr>
+              <a:t>trả</a:t>
+            </a:r>
+            <a:r>
+              <a:rPr sz="1250" b="0" i="0" dirty="0">
+                <a:solidFill>
+                  <a:srgbClr val="93A1B8"/>
+                </a:solidFill>
+                <a:latin typeface="Segoe UI"/>
+              </a:rPr>
+              <a:t> </a:t>
+            </a:r>
+            <a:r>
+              <a:rPr sz="1250" b="0" i="0" dirty="0" err="1">
+                <a:solidFill>
+                  <a:srgbClr val="93A1B8"/>
+                </a:solidFill>
+                <a:latin typeface="Segoe UI"/>
+              </a:rPr>
+              <a:t>lời</a:t>
+            </a:r>
+            <a:r>
+              <a:rPr sz="1250" b="0" i="0" dirty="0">
+                <a:solidFill>
+                  <a:srgbClr val="93A1B8"/>
+                </a:solidFill>
+                <a:latin typeface="Segoe UI"/>
+              </a:rPr>
+              <a:t> </a:t>
+            </a:r>
+            <a:r>
+              <a:rPr sz="1250" b="0" i="0" dirty="0" err="1">
+                <a:solidFill>
+                  <a:srgbClr val="93A1B8"/>
+                </a:solidFill>
+                <a:latin typeface="Segoe UI"/>
+              </a:rPr>
+              <a:t>một</a:t>
+            </a:r>
+            <a:r>
+              <a:rPr sz="1250" b="0" i="0" dirty="0">
+                <a:solidFill>
+                  <a:srgbClr val="93A1B8"/>
+                </a:solidFill>
+                <a:latin typeface="Segoe UI"/>
+              </a:rPr>
+              <a:t> </a:t>
+            </a:r>
+            <a:r>
+              <a:rPr sz="1250" b="0" i="0" dirty="0" err="1">
+                <a:solidFill>
+                  <a:srgbClr val="93A1B8"/>
+                </a:solidFill>
+                <a:latin typeface="Segoe UI"/>
+              </a:rPr>
+              <a:t>câu</a:t>
+            </a:r>
+            <a:r>
+              <a:rPr sz="1250" b="0" i="0" dirty="0">
+                <a:solidFill>
+                  <a:srgbClr val="93A1B8"/>
+                </a:solidFill>
+                <a:latin typeface="Segoe UI"/>
+              </a:rPr>
+              <a:t> </a:t>
+            </a:r>
+            <a:r>
+              <a:rPr sz="1250" b="0" i="0" dirty="0" err="1">
+                <a:solidFill>
+                  <a:srgbClr val="93A1B8"/>
+                </a:solidFill>
+                <a:latin typeface="Segoe UI"/>
+              </a:rPr>
+              <a:t>hỏi</a:t>
+            </a:r>
+            <a:r>
+              <a:rPr sz="1250" b="0" i="0" dirty="0">
+                <a:solidFill>
+                  <a:srgbClr val="93A1B8"/>
+                </a:solidFill>
+                <a:latin typeface="Segoe UI"/>
+              </a:rPr>
+              <a:t> </a:t>
+            </a:r>
+            <a:r>
+              <a:rPr sz="1250" b="0" i="0" dirty="0" err="1">
+                <a:solidFill>
+                  <a:srgbClr val="93A1B8"/>
+                </a:solidFill>
+                <a:latin typeface="Segoe UI"/>
+              </a:rPr>
+              <a:t>và</a:t>
+            </a:r>
+            <a:r>
+              <a:rPr sz="1250" b="0" i="0" dirty="0">
+                <a:solidFill>
+                  <a:srgbClr val="93A1B8"/>
+                </a:solidFill>
+                <a:latin typeface="Segoe UI"/>
+              </a:rPr>
+              <a:t> </a:t>
+            </a:r>
+            <a:r>
+              <a:rPr sz="1250" b="0" i="0" dirty="0" err="1">
+                <a:solidFill>
+                  <a:srgbClr val="93A1B8"/>
+                </a:solidFill>
+                <a:latin typeface="Segoe UI"/>
+              </a:rPr>
+              <a:t>tạo</a:t>
+            </a:r>
+            <a:r>
+              <a:rPr sz="1250" b="0" i="0" dirty="0">
+                <a:solidFill>
+                  <a:srgbClr val="93A1B8"/>
+                </a:solidFill>
+                <a:latin typeface="Segoe UI"/>
+              </a:rPr>
+              <a:t> </a:t>
+            </a:r>
+            <a:r>
+              <a:rPr sz="1250" b="0" i="0" dirty="0" err="1">
+                <a:solidFill>
+                  <a:srgbClr val="93A1B8"/>
+                </a:solidFill>
+                <a:latin typeface="Segoe UI"/>
+              </a:rPr>
+              <a:t>ra</a:t>
+            </a:r>
+            <a:r>
+              <a:rPr sz="1250" b="0" i="0" dirty="0">
+                <a:solidFill>
+                  <a:srgbClr val="93A1B8"/>
+                </a:solidFill>
+                <a:latin typeface="Segoe UI"/>
+              </a:rPr>
+              <a:t> </a:t>
+            </a:r>
+            <a:r>
+              <a:rPr sz="1250" b="0" i="0" dirty="0" err="1">
+                <a:solidFill>
+                  <a:srgbClr val="93A1B8"/>
+                </a:solidFill>
+                <a:latin typeface="Segoe UI"/>
+              </a:rPr>
+              <a:t>một</a:t>
+            </a:r>
+            <a:r>
+              <a:rPr sz="1250" b="0" i="0" dirty="0">
+                <a:solidFill>
+                  <a:srgbClr val="93A1B8"/>
+                </a:solidFill>
+                <a:latin typeface="Segoe UI"/>
+              </a:rPr>
+              <a:t> </a:t>
+            </a:r>
+            <a:r>
+              <a:rPr sz="1250" b="0" i="0" dirty="0" err="1">
+                <a:solidFill>
+                  <a:srgbClr val="93A1B8"/>
+                </a:solidFill>
+                <a:latin typeface="Segoe UI"/>
+              </a:rPr>
+              <a:t>đầu</a:t>
+            </a:r>
+            <a:r>
+              <a:rPr sz="1250" b="0" i="0" dirty="0">
+                <a:solidFill>
+                  <a:srgbClr val="93A1B8"/>
+                </a:solidFill>
+                <a:latin typeface="Segoe UI"/>
+              </a:rPr>
+              <a:t> </a:t>
+            </a:r>
+            <a:r>
+              <a:rPr sz="1250" b="0" i="0" dirty="0" err="1">
+                <a:solidFill>
+                  <a:srgbClr val="93A1B8"/>
+                </a:solidFill>
+                <a:latin typeface="Segoe UI"/>
+              </a:rPr>
+              <a:t>ra</a:t>
+            </a:r>
+            <a:r>
+              <a:rPr sz="1250" b="0" i="0" dirty="0">
+                <a:solidFill>
+                  <a:srgbClr val="93A1B8"/>
+                </a:solidFill>
+                <a:latin typeface="Segoe UI"/>
+              </a:rPr>
+              <a:t> </a:t>
+            </a:r>
+            <a:r>
+              <a:rPr sz="1250" b="0" i="0" dirty="0" err="1">
+                <a:solidFill>
+                  <a:srgbClr val="93A1B8"/>
+                </a:solidFill>
+                <a:latin typeface="Segoe UI"/>
+              </a:rPr>
+              <a:t>làm</a:t>
+            </a:r>
+            <a:r>
+              <a:rPr sz="1250" b="0" i="0" dirty="0">
+                <a:solidFill>
+                  <a:srgbClr val="93A1B8"/>
+                </a:solidFill>
+                <a:latin typeface="Segoe UI"/>
+              </a:rPr>
+              <a:t> </a:t>
+            </a:r>
+            <a:r>
+              <a:rPr sz="1250" b="0" i="0" dirty="0" err="1">
+                <a:solidFill>
+                  <a:srgbClr val="93A1B8"/>
+                </a:solidFill>
+                <a:latin typeface="Segoe UI"/>
+              </a:rPr>
+              <a:t>nền</a:t>
+            </a:r>
+            <a:r>
+              <a:rPr sz="1250" b="0" i="0" dirty="0">
+                <a:solidFill>
+                  <a:srgbClr val="93A1B8"/>
+                </a:solidFill>
+                <a:latin typeface="Segoe UI"/>
+              </a:rPr>
+              <a:t> </a:t>
+            </a:r>
+            <a:r>
+              <a:rPr sz="1250" b="0" i="0" dirty="0" err="1">
+                <a:solidFill>
+                  <a:srgbClr val="93A1B8"/>
+                </a:solidFill>
+                <a:latin typeface="Segoe UI"/>
+              </a:rPr>
+              <a:t>cho</a:t>
+            </a:r>
+            <a:r>
+              <a:rPr sz="1250" b="0" i="0" dirty="0">
+                <a:solidFill>
+                  <a:srgbClr val="93A1B8"/>
+                </a:solidFill>
+                <a:latin typeface="Segoe UI"/>
+              </a:rPr>
+              <a:t> </a:t>
+            </a:r>
+            <a:r>
+              <a:rPr sz="1250" b="0" i="0" dirty="0" err="1">
+                <a:solidFill>
+                  <a:srgbClr val="93A1B8"/>
+                </a:solidFill>
+                <a:latin typeface="Segoe UI"/>
+              </a:rPr>
+              <a:t>bước</a:t>
+            </a:r>
+            <a:r>
+              <a:rPr sz="1250" b="0" i="0" dirty="0">
+                <a:solidFill>
+                  <a:srgbClr val="93A1B8"/>
+                </a:solidFill>
+                <a:latin typeface="Segoe UI"/>
+              </a:rPr>
+              <a:t> </a:t>
+            </a:r>
+            <a:r>
+              <a:rPr sz="1250" b="0" i="0" dirty="0" err="1">
+                <a:solidFill>
+                  <a:srgbClr val="93A1B8"/>
+                </a:solidFill>
+                <a:latin typeface="Segoe UI"/>
+              </a:rPr>
+              <a:t>sau</a:t>
+            </a:r>
+            <a:endParaRPr sz="1250" b="0" i="0" dirty="0">
+              <a:solidFill>
+                <a:srgbClr val="93A1B8"/>
+              </a:solidFill>
+              <a:latin typeface="Segoe UI"/>
+            </a:endParaRPr>
           </a:p>
         </p:txBody>
       </p:sp>
@@ -4856,6 +5283,7 @@
           <a:lstStyle/>
           <a:p>
             <a:pPr algn="ctr"/>
+            <a:endParaRPr/>
           </a:p>
         </p:txBody>
       </p:sp>
@@ -4900,6 +5328,7 @@
           <a:lstStyle/>
           <a:p>
             <a:pPr algn="ctr"/>
+            <a:endParaRPr/>
           </a:p>
         </p:txBody>
       </p:sp>
@@ -4977,7 +5406,7 @@
           <a:noFill/>
         </p:spPr>
         <p:txBody>
-          <a:bodyPr wrap="square" anchor="t" lIns="0" rIns="0" tIns="0" bIns="0">
+          <a:bodyPr wrap="square" lIns="0" tIns="0" rIns="0" bIns="0" anchor="t">
             <a:spAutoFit/>
           </a:bodyPr>
           <a:lstStyle/>
@@ -5022,7 +5451,7 @@
           <a:noFill/>
         </p:spPr>
         <p:txBody>
-          <a:bodyPr wrap="square" anchor="t" lIns="0" rIns="0" tIns="0" bIns="0">
+          <a:bodyPr wrap="square" lIns="0" tIns="0" rIns="0" bIns="0" anchor="t">
             <a:spAutoFit/>
           </a:bodyPr>
           <a:lstStyle/>
@@ -5091,6 +5520,7 @@
           <a:lstStyle/>
           <a:p>
             <a:pPr algn="ctr"/>
+            <a:endParaRPr/>
           </a:p>
         </p:txBody>
       </p:sp>
@@ -5111,7 +5541,7 @@
           <a:noFill/>
         </p:spPr>
         <p:txBody>
-          <a:bodyPr wrap="square" anchor="t" lIns="0" rIns="0" tIns="0" bIns="0">
+          <a:bodyPr wrap="square" lIns="0" tIns="0" rIns="0" bIns="0" anchor="t">
             <a:spAutoFit/>
           </a:bodyPr>
           <a:lstStyle/>
@@ -5128,14 +5558,209 @@
               </a:spcAft>
             </a:pPr>
             <a:r>
-              <a:rPr sz="950" b="0" i="0">
+              <a:rPr sz="950" b="0" i="0" dirty="0">
                 <a:solidFill>
                   <a:srgbClr val="93A1B8"/>
                 </a:solidFill>
                 <a:latin typeface="Segoe UI"/>
               </a:rPr>
-              <a:t>Personas · luồng tiền · 8 quyết định lõi, mỗi cái bác được 2 phương án</a:t>
-            </a:r>
+              <a:t>Personas · </a:t>
+            </a:r>
+            <a:r>
+              <a:rPr sz="950" b="0" i="0" dirty="0" err="1">
+                <a:solidFill>
+                  <a:srgbClr val="93A1B8"/>
+                </a:solidFill>
+                <a:latin typeface="Segoe UI"/>
+              </a:rPr>
+              <a:t>luồng</a:t>
+            </a:r>
+            <a:r>
+              <a:rPr sz="950" b="0" i="0" dirty="0">
+                <a:solidFill>
+                  <a:srgbClr val="93A1B8"/>
+                </a:solidFill>
+                <a:latin typeface="Segoe UI"/>
+              </a:rPr>
+              <a:t> </a:t>
+            </a:r>
+            <a:r>
+              <a:rPr sz="950" b="0" i="0" dirty="0" err="1">
+                <a:solidFill>
+                  <a:srgbClr val="93A1B8"/>
+                </a:solidFill>
+                <a:latin typeface="Segoe UI"/>
+              </a:rPr>
+              <a:t>tiền</a:t>
+            </a:r>
+            <a:r>
+              <a:rPr sz="950" b="0" i="0" dirty="0">
+                <a:solidFill>
+                  <a:srgbClr val="93A1B8"/>
+                </a:solidFill>
+                <a:latin typeface="Segoe UI"/>
+              </a:rPr>
+              <a:t> · 8 </a:t>
+            </a:r>
+            <a:r>
+              <a:rPr sz="950" b="0" i="0" dirty="0" err="1">
+                <a:solidFill>
+                  <a:srgbClr val="93A1B8"/>
+                </a:solidFill>
+                <a:latin typeface="Segoe UI"/>
+              </a:rPr>
+              <a:t>quyết</a:t>
+            </a:r>
+            <a:r>
+              <a:rPr sz="950" b="0" i="0" dirty="0">
+                <a:solidFill>
+                  <a:srgbClr val="93A1B8"/>
+                </a:solidFill>
+                <a:latin typeface="Segoe UI"/>
+              </a:rPr>
+              <a:t> </a:t>
+            </a:r>
+            <a:r>
+              <a:rPr sz="950" b="0" i="0" dirty="0" err="1">
+                <a:solidFill>
+                  <a:srgbClr val="93A1B8"/>
+                </a:solidFill>
+                <a:latin typeface="Segoe UI"/>
+              </a:rPr>
+              <a:t>định</a:t>
+            </a:r>
+            <a:r>
+              <a:rPr sz="950" b="0" i="0" dirty="0">
+                <a:solidFill>
+                  <a:srgbClr val="93A1B8"/>
+                </a:solidFill>
+                <a:latin typeface="Segoe UI"/>
+              </a:rPr>
+              <a:t> </a:t>
+            </a:r>
+            <a:r>
+              <a:rPr sz="950" b="0" i="0" dirty="0" err="1">
+                <a:solidFill>
+                  <a:srgbClr val="93A1B8"/>
+                </a:solidFill>
+                <a:latin typeface="Segoe UI"/>
+              </a:rPr>
+              <a:t>lõi</a:t>
+            </a:r>
+            <a:r>
+              <a:rPr sz="950" b="0" i="0" dirty="0">
+                <a:solidFill>
+                  <a:srgbClr val="93A1B8"/>
+                </a:solidFill>
+                <a:latin typeface="Segoe UI"/>
+              </a:rPr>
+              <a:t>, </a:t>
+            </a:r>
+            <a:r>
+              <a:rPr sz="950" b="0" i="0" dirty="0" err="1">
+                <a:solidFill>
+                  <a:srgbClr val="93A1B8"/>
+                </a:solidFill>
+                <a:latin typeface="Segoe UI"/>
+              </a:rPr>
+              <a:t>mỗi</a:t>
+            </a:r>
+            <a:r>
+              <a:rPr sz="950" b="0" i="0" dirty="0">
+                <a:solidFill>
+                  <a:srgbClr val="93A1B8"/>
+                </a:solidFill>
+                <a:latin typeface="Segoe UI"/>
+              </a:rPr>
+              <a:t> </a:t>
+            </a:r>
+            <a:r>
+              <a:rPr sz="950" b="0" i="0" dirty="0" err="1">
+                <a:solidFill>
+                  <a:srgbClr val="93A1B8"/>
+                </a:solidFill>
+                <a:latin typeface="Segoe UI"/>
+              </a:rPr>
+              <a:t>cái</a:t>
+            </a:r>
+            <a:r>
+              <a:rPr sz="950" b="0" i="0" dirty="0">
+                <a:solidFill>
+                  <a:srgbClr val="93A1B8"/>
+                </a:solidFill>
+                <a:latin typeface="Segoe UI"/>
+              </a:rPr>
+              <a:t> </a:t>
+            </a:r>
+            <a:r>
+              <a:rPr sz="950" b="0" i="0" dirty="0" err="1">
+                <a:solidFill>
+                  <a:srgbClr val="93A1B8"/>
+                </a:solidFill>
+                <a:latin typeface="Segoe UI"/>
+              </a:rPr>
+              <a:t>bác</a:t>
+            </a:r>
+            <a:r>
+              <a:rPr sz="950" b="0" i="0" dirty="0">
+                <a:solidFill>
+                  <a:srgbClr val="93A1B8"/>
+                </a:solidFill>
+                <a:latin typeface="Segoe UI"/>
+              </a:rPr>
+              <a:t> </a:t>
+            </a:r>
+            <a:r>
+              <a:rPr sz="950" b="0" i="0" dirty="0" err="1">
+                <a:solidFill>
+                  <a:srgbClr val="93A1B8"/>
+                </a:solidFill>
+                <a:latin typeface="Segoe UI"/>
+              </a:rPr>
+              <a:t>được</a:t>
+            </a:r>
+            <a:r>
+              <a:rPr sz="950" b="0" i="0" dirty="0">
+                <a:solidFill>
+                  <a:srgbClr val="93A1B8"/>
+                </a:solidFill>
+                <a:latin typeface="Segoe UI"/>
+              </a:rPr>
+              <a:t> 2 </a:t>
+            </a:r>
+            <a:r>
+              <a:rPr sz="950" b="0" i="0" dirty="0" err="1">
+                <a:solidFill>
+                  <a:srgbClr val="93A1B8"/>
+                </a:solidFill>
+                <a:latin typeface="Segoe UI"/>
+              </a:rPr>
+              <a:t>phương</a:t>
+            </a:r>
+            <a:r>
+              <a:rPr sz="950" b="0" i="0" dirty="0">
+                <a:solidFill>
+                  <a:srgbClr val="93A1B8"/>
+                </a:solidFill>
+                <a:latin typeface="Segoe UI"/>
+              </a:rPr>
+              <a:t> </a:t>
+            </a:r>
+            <a:r>
+              <a:rPr sz="950" b="0" i="0" dirty="0" err="1">
+                <a:solidFill>
+                  <a:srgbClr val="93A1B8"/>
+                </a:solidFill>
+                <a:latin typeface="Segoe UI"/>
+              </a:rPr>
+              <a:t>án</a:t>
+            </a:r>
+            <a:endParaRPr sz="950" b="0" i="0" dirty="0">
+              <a:solidFill>
+                <a:srgbClr val="93A1B8"/>
+              </a:solidFill>
+              <a:latin typeface="Segoe UI"/>
+            </a:endParaRPr>
           </a:p>
         </p:txBody>
       </p:sp>
@@ -5180,6 +5805,7 @@
           <a:lstStyle/>
           <a:p>
             <a:pPr algn="ctr"/>
+            <a:endParaRPr/>
           </a:p>
         </p:txBody>
       </p:sp>
@@ -5228,6 +5854,7 @@
           <a:lstStyle/>
           <a:p>
             <a:pPr algn="ctr"/>
+            <a:endParaRPr/>
           </a:p>
         </p:txBody>
       </p:sp>
@@ -5272,6 +5899,7 @@
           <a:lstStyle/>
           <a:p>
             <a:pPr algn="ctr"/>
+            <a:endParaRPr/>
           </a:p>
         </p:txBody>
       </p:sp>
@@ -5349,7 +5977,7 @@
           <a:noFill/>
         </p:spPr>
         <p:txBody>
-          <a:bodyPr wrap="square" anchor="t" lIns="0" rIns="0" tIns="0" bIns="0">
+          <a:bodyPr wrap="square" lIns="0" tIns="0" rIns="0" bIns="0" anchor="t">
             <a:spAutoFit/>
           </a:bodyPr>
           <a:lstStyle/>
@@ -5394,7 +6022,7 @@
           <a:noFill/>
         </p:spPr>
         <p:txBody>
-          <a:bodyPr wrap="square" anchor="t" lIns="0" rIns="0" tIns="0" bIns="0">
+          <a:bodyPr wrap="square" lIns="0" tIns="0" rIns="0" bIns="0" anchor="t">
             <a:spAutoFit/>
           </a:bodyPr>
           <a:lstStyle/>
@@ -5463,6 +6091,7 @@
           <a:lstStyle/>
           <a:p>
             <a:pPr algn="ctr"/>
+            <a:endParaRPr/>
           </a:p>
         </p:txBody>
       </p:sp>
@@ -5483,7 +6112,7 @@
           <a:noFill/>
         </p:spPr>
         <p:txBody>
-          <a:bodyPr wrap="square" anchor="t" lIns="0" rIns="0" tIns="0" bIns="0">
+          <a:bodyPr wrap="square" lIns="0" tIns="0" rIns="0" bIns="0" anchor="t">
             <a:spAutoFit/>
           </a:bodyPr>
           <a:lstStyle/>
@@ -5552,6 +6181,7 @@
           <a:lstStyle/>
           <a:p>
             <a:pPr algn="ctr"/>
+            <a:endParaRPr/>
           </a:p>
         </p:txBody>
       </p:sp>
@@ -5600,6 +6230,7 @@
           <a:lstStyle/>
           <a:p>
             <a:pPr algn="ctr"/>
+            <a:endParaRPr/>
           </a:p>
         </p:txBody>
       </p:sp>
@@ -5644,6 +6275,7 @@
           <a:lstStyle/>
           <a:p>
             <a:pPr algn="ctr"/>
+            <a:endParaRPr/>
           </a:p>
         </p:txBody>
       </p:sp>
@@ -5721,7 +6353,7 @@
           <a:noFill/>
         </p:spPr>
         <p:txBody>
-          <a:bodyPr wrap="square" anchor="t" lIns="0" rIns="0" tIns="0" bIns="0">
+          <a:bodyPr wrap="square" lIns="0" tIns="0" rIns="0" bIns="0" anchor="t">
             <a:spAutoFit/>
           </a:bodyPr>
           <a:lstStyle/>
@@ -5766,7 +6398,7 @@
           <a:noFill/>
         </p:spPr>
         <p:txBody>
-          <a:bodyPr wrap="square" anchor="t" lIns="0" rIns="0" tIns="0" bIns="0">
+          <a:bodyPr wrap="square" lIns="0" tIns="0" rIns="0" bIns="0" anchor="t">
             <a:spAutoFit/>
           </a:bodyPr>
           <a:lstStyle/>
@@ -5783,13 +6415,94 @@
               </a:spcAft>
             </a:pPr>
             <a:r>
-              <a:rPr sz="1050" b="1" i="0">
+              <a:rPr sz="1050" b="1" i="0" dirty="0" err="1">
                 <a:solidFill>
                   <a:srgbClr val="6E7BFF"/>
                 </a:solidFill>
                 <a:latin typeface="Segoe UI"/>
               </a:rPr>
-              <a:t>Đặt ranh giới &amp; lòng tin ở đâu?</a:t>
+              <a:t>Đặt</a:t>
+            </a:r>
+            <a:r>
+              <a:rPr sz="1050" b="1" i="0" dirty="0">
+                <a:solidFill>
+                  <a:srgbClr val="6E7BFF"/>
+                </a:solidFill>
+                <a:latin typeface="Segoe UI"/>
+              </a:rPr>
+              <a:t> </a:t>
+            </a:r>
+            <a:r>
+              <a:rPr sz="1050" b="1" i="0" dirty="0" err="1">
+                <a:solidFill>
+                  <a:srgbClr val="6E7BFF"/>
+                </a:solidFill>
+                <a:latin typeface="Segoe UI"/>
+              </a:rPr>
+              <a:t>ranh</a:t>
+            </a:r>
+            <a:r>
+              <a:rPr sz="1050" b="1" i="0" dirty="0">
+                <a:solidFill>
+                  <a:srgbClr val="6E7BFF"/>
+                </a:solidFill>
+                <a:latin typeface="Segoe UI"/>
+              </a:rPr>
+              <a:t> </a:t>
+            </a:r>
+            <a:r>
+              <a:rPr sz="1050" b="1" i="0" dirty="0" err="1">
+                <a:solidFill>
+                  <a:srgbClr val="6E7BFF"/>
+                </a:solidFill>
+                <a:latin typeface="Segoe UI"/>
+              </a:rPr>
+              <a:t>giới</a:t>
+            </a:r>
+            <a:r>
+              <a:rPr sz="1050" b="1" i="0" dirty="0">
+                <a:solidFill>
+                  <a:srgbClr val="6E7BFF"/>
+                </a:solidFill>
+                <a:latin typeface="Segoe UI"/>
+              </a:rPr>
+              <a:t> &amp; </a:t>
+            </a:r>
+            <a:r>
+              <a:rPr sz="1050" b="1" i="0" dirty="0" err="1">
+                <a:solidFill>
+                  <a:srgbClr val="6E7BFF"/>
+                </a:solidFill>
+                <a:latin typeface="Segoe UI"/>
+              </a:rPr>
+              <a:t>lòng</a:t>
+            </a:r>
+            <a:r>
+              <a:rPr sz="1050" b="1" i="0" dirty="0">
+                <a:solidFill>
+                  <a:srgbClr val="6E7BFF"/>
+                </a:solidFill>
+                <a:latin typeface="Segoe UI"/>
+              </a:rPr>
+              <a:t> tin ở </a:t>
+            </a:r>
+            <a:r>
+              <a:rPr sz="1050" b="1" i="0" dirty="0" err="1">
+                <a:solidFill>
+                  <a:srgbClr val="6E7BFF"/>
+                </a:solidFill>
+                <a:latin typeface="Segoe UI"/>
+              </a:rPr>
+              <a:t>đâu</a:t>
+            </a:r>
+            <a:r>
+              <a:rPr sz="1050" b="1" i="0" dirty="0">
+                <a:solidFill>
+                  <a:srgbClr val="6E7BFF"/>
+                </a:solidFill>
+                <a:latin typeface="Segoe UI"/>
+              </a:rPr>
+              <a:t>?</a:t>
             </a:r>
           </a:p>
         </p:txBody>
@@ -5835,6 +6548,7 @@
           <a:lstStyle/>
           <a:p>
             <a:pPr algn="ctr"/>
+            <a:endParaRPr/>
           </a:p>
         </p:txBody>
       </p:sp>
@@ -5855,7 +6569,7 @@
           <a:noFill/>
         </p:spPr>
         <p:txBody>
-          <a:bodyPr wrap="square" anchor="t" lIns="0" rIns="0" tIns="0" bIns="0">
+          <a:bodyPr wrap="square" lIns="0" tIns="0" rIns="0" bIns="0" anchor="t">
             <a:spAutoFit/>
           </a:bodyPr>
           <a:lstStyle/>
@@ -5924,6 +6638,7 @@
           <a:lstStyle/>
           <a:p>
             <a:pPr algn="ctr"/>
+            <a:endParaRPr/>
           </a:p>
         </p:txBody>
       </p:sp>
@@ -5972,6 +6687,7 @@
           <a:lstStyle/>
           <a:p>
             <a:pPr algn="ctr"/>
+            <a:endParaRPr/>
           </a:p>
         </p:txBody>
       </p:sp>
@@ -6016,6 +6732,7 @@
           <a:lstStyle/>
           <a:p>
             <a:pPr algn="ctr"/>
+            <a:endParaRPr/>
           </a:p>
         </p:txBody>
       </p:sp>
@@ -6093,7 +6810,7 @@
           <a:noFill/>
         </p:spPr>
         <p:txBody>
-          <a:bodyPr wrap="square" anchor="t" lIns="0" rIns="0" tIns="0" bIns="0">
+          <a:bodyPr wrap="square" lIns="0" tIns="0" rIns="0" bIns="0" anchor="t">
             <a:spAutoFit/>
           </a:bodyPr>
           <a:lstStyle/>
@@ -6138,7 +6855,7 @@
           <a:noFill/>
         </p:spPr>
         <p:txBody>
-          <a:bodyPr wrap="square" anchor="t" lIns="0" rIns="0" tIns="0" bIns="0">
+          <a:bodyPr wrap="square" lIns="0" tIns="0" rIns="0" bIns="0" anchor="t">
             <a:spAutoFit/>
           </a:bodyPr>
           <a:lstStyle/>
@@ -6207,6 +6924,7 @@
           <a:lstStyle/>
           <a:p>
             <a:pPr algn="ctr"/>
+            <a:endParaRPr/>
           </a:p>
         </p:txBody>
       </p:sp>
@@ -6227,7 +6945,7 @@
           <a:noFill/>
         </p:spPr>
         <p:txBody>
-          <a:bodyPr wrap="square" anchor="t" lIns="0" rIns="0" tIns="0" bIns="0">
+          <a:bodyPr wrap="square" lIns="0" tIns="0" rIns="0" bIns="0" anchor="t">
             <a:spAutoFit/>
           </a:bodyPr>
           <a:lstStyle/>
@@ -6296,6 +7014,7 @@
           <a:lstStyle/>
           <a:p>
             <a:pPr algn="ctr"/>
+            <a:endParaRPr/>
           </a:p>
         </p:txBody>
       </p:sp>
@@ -6344,6 +7063,7 @@
           <a:lstStyle/>
           <a:p>
             <a:pPr algn="ctr"/>
+            <a:endParaRPr/>
           </a:p>
         </p:txBody>
       </p:sp>
@@ -6388,6 +7108,7 @@
           <a:lstStyle/>
           <a:p>
             <a:pPr algn="ctr"/>
+            <a:endParaRPr/>
           </a:p>
         </p:txBody>
       </p:sp>
@@ -6465,7 +7186,7 @@
           <a:noFill/>
         </p:spPr>
         <p:txBody>
-          <a:bodyPr wrap="square" anchor="t" lIns="0" rIns="0" tIns="0" bIns="0">
+          <a:bodyPr wrap="square" lIns="0" tIns="0" rIns="0" bIns="0" anchor="t">
             <a:spAutoFit/>
           </a:bodyPr>
           <a:lstStyle/>
@@ -6510,7 +7231,7 @@
           <a:noFill/>
         </p:spPr>
         <p:txBody>
-          <a:bodyPr wrap="square" anchor="t" lIns="0" rIns="0" tIns="0" bIns="0">
+          <a:bodyPr wrap="square" lIns="0" tIns="0" rIns="0" bIns="0" anchor="t">
             <a:spAutoFit/>
           </a:bodyPr>
           <a:lstStyle/>
@@ -6579,6 +7300,7 @@
           <a:lstStyle/>
           <a:p>
             <a:pPr algn="ctr"/>
+            <a:endParaRPr/>
           </a:p>
         </p:txBody>
       </p:sp>
@@ -6599,7 +7321,7 @@
           <a:noFill/>
         </p:spPr>
         <p:txBody>
-          <a:bodyPr wrap="square" anchor="t" lIns="0" rIns="0" tIns="0" bIns="0">
+          <a:bodyPr wrap="square" lIns="0" tIns="0" rIns="0" bIns="0" anchor="t">
             <a:spAutoFit/>
           </a:bodyPr>
           <a:lstStyle/>
@@ -6672,6 +7394,7 @@
           <a:lstStyle/>
           <a:p>
             <a:pPr algn="ctr"/>
+            <a:endParaRPr/>
           </a:p>
         </p:txBody>
       </p:sp>
@@ -6692,7 +7415,7 @@
           <a:noFill/>
         </p:spPr>
         <p:txBody>
-          <a:bodyPr wrap="square" anchor="ctr" lIns="0" rIns="0" tIns="0" bIns="0">
+          <a:bodyPr wrap="square" lIns="0" tIns="0" rIns="0" bIns="0" anchor="ctr">
             <a:spAutoFit/>
           </a:bodyPr>
           <a:lstStyle/>
@@ -6746,7 +7469,7 @@
           <a:noFill/>
         </p:spPr>
         <p:txBody>
-          <a:bodyPr wrap="square" anchor="t" lIns="0" rIns="0" tIns="0" bIns="0">
+          <a:bodyPr wrap="square" lIns="0" tIns="0" rIns="0" bIns="0" anchor="t">
             <a:spAutoFit/>
           </a:bodyPr>
           <a:lstStyle/>
@@ -6800,7 +7523,7 @@
           <a:noFill/>
         </p:spPr>
         <p:txBody>
-          <a:bodyPr wrap="square" anchor="t" lIns="0" rIns="0" tIns="0" bIns="0">
+          <a:bodyPr wrap="square" lIns="0" tIns="0" rIns="0" bIns="0" anchor="t">
             <a:spAutoFit/>
           </a:bodyPr>
           <a:lstStyle/>
@@ -6837,7 +7560,7 @@
 </file>
 
 <file path=ppt/slides/slide3.xml><?xml version="1.0" encoding="utf-8"?>
-<p:sld xmlns:a="http://schemas.openxmlformats.org/drawingml/2006/main" xmlns:p="http://schemas.openxmlformats.org/presentationml/2006/main" xmlns:r="http://schemas.openxmlformats.org/officeDocument/2006/relationships">
+<p:sld xmlns:a="http://schemas.openxmlformats.org/drawingml/2006/main" xmlns:r="http://schemas.openxmlformats.org/officeDocument/2006/relationships" xmlns:p="http://schemas.openxmlformats.org/presentationml/2006/main">
   <p:cSld>
     <p:spTree>
       <p:nvGrpSpPr>
@@ -6845,7 +7568,14 @@
         <p:cNvGrpSpPr/>
         <p:nvPr/>
       </p:nvGrpSpPr>
-      <p:grpSpPr/>
+      <p:grpSpPr>
+        <a:xfrm>
+          <a:off x="0" y="0"/>
+          <a:ext cx="0" cy="0"/>
+          <a:chOff x="0" y="0"/>
+          <a:chExt cx="0" cy="0"/>
+        </a:xfrm>
+      </p:grpSpPr>
       <p:sp>
         <p:nvSpPr>
           <p:cNvPr id="2" name="Rectangle 1"/>
@@ -6869,7 +7599,7 @@
                 <a:srgbClr val="0A0E17"/>
               </a:gs>
             </a:gsLst>
-            <a:lin scaled="0" ang="18000000"/>
+            <a:lin ang="18000000" scaled="0"/>
           </a:gradFill>
           <a:ln>
             <a:noFill/>
@@ -6895,6 +7625,7 @@
           <a:lstStyle/>
           <a:p>
             <a:pPr algn="ctr"/>
+            <a:endParaRPr/>
           </a:p>
         </p:txBody>
       </p:sp>
@@ -6941,6 +7672,7 @@
           <a:lstStyle/>
           <a:p>
             <a:pPr algn="ctr"/>
+            <a:endParaRPr/>
           </a:p>
         </p:txBody>
       </p:sp>
@@ -6987,6 +7719,7 @@
           <a:lstStyle/>
           <a:p>
             <a:pPr algn="ctr"/>
+            <a:endParaRPr/>
           </a:p>
         </p:txBody>
       </p:sp>
@@ -7007,7 +7740,7 @@
           <a:noFill/>
         </p:spPr>
         <p:txBody>
-          <a:bodyPr wrap="square" anchor="t" lIns="0" rIns="0" tIns="0" bIns="0">
+          <a:bodyPr wrap="square" lIns="0" tIns="0" rIns="0" bIns="0" anchor="t">
             <a:spAutoFit/>
           </a:bodyPr>
           <a:lstStyle/>
@@ -7052,7 +7785,7 @@
           <a:noFill/>
         </p:spPr>
         <p:txBody>
-          <a:bodyPr wrap="square" anchor="t" lIns="0" rIns="0" tIns="0" bIns="0">
+          <a:bodyPr wrap="square" lIns="0" tIns="0" rIns="0" bIns="0" anchor="t">
             <a:spAutoFit/>
           </a:bodyPr>
           <a:lstStyle/>
@@ -7121,7 +7854,7 @@
           </a:fontRef>
         </p:style>
         <p:txBody>
-          <a:bodyPr rtlCol="0" anchor="ctr" wrap="square" lIns="109728" rIns="36576"/>
+          <a:bodyPr wrap="square" lIns="109728" rIns="36576" rtlCol="0" anchor="ctr"/>
           <a:lstStyle/>
           <a:p>
             <a:pPr algn="ctr"/>
@@ -7178,6 +7911,7 @@
           <a:lstStyle/>
           <a:p>
             <a:pPr algn="ctr"/>
+            <a:endParaRPr/>
           </a:p>
         </p:txBody>
       </p:sp>
@@ -7222,6 +7956,7 @@
           <a:lstStyle/>
           <a:p>
             <a:pPr algn="ctr"/>
+            <a:endParaRPr/>
           </a:p>
         </p:txBody>
       </p:sp>
@@ -7266,7 +8001,7 @@
           </a:fontRef>
         </p:style>
         <p:txBody>
-          <a:bodyPr rtlCol="0" anchor="ctr" wrap="square" lIns="109728" rIns="36576"/>
+          <a:bodyPr wrap="square" lIns="109728" rIns="36576" rtlCol="0" anchor="ctr"/>
           <a:lstStyle/>
           <a:p>
             <a:pPr algn="ctr"/>
@@ -7323,6 +8058,7 @@
           <a:lstStyle/>
           <a:p>
             <a:pPr algn="ctr"/>
+            <a:endParaRPr/>
           </a:p>
         </p:txBody>
       </p:sp>
@@ -7367,6 +8103,7 @@
           <a:lstStyle/>
           <a:p>
             <a:pPr algn="ctr"/>
+            <a:endParaRPr/>
           </a:p>
         </p:txBody>
       </p:sp>
@@ -7411,7 +8148,7 @@
           </a:fontRef>
         </p:style>
         <p:txBody>
-          <a:bodyPr rtlCol="0" anchor="ctr" wrap="square" lIns="109728" rIns="36576"/>
+          <a:bodyPr wrap="square" lIns="109728" rIns="36576" rtlCol="0" anchor="ctr"/>
           <a:lstStyle/>
           <a:p>
             <a:pPr algn="ctr"/>
@@ -7468,6 +8205,7 @@
           <a:lstStyle/>
           <a:p>
             <a:pPr algn="ctr"/>
+            <a:endParaRPr/>
           </a:p>
         </p:txBody>
       </p:sp>
@@ -7512,6 +8250,7 @@
           <a:lstStyle/>
           <a:p>
             <a:pPr algn="ctr"/>
+            <a:endParaRPr/>
           </a:p>
         </p:txBody>
       </p:sp>
@@ -7556,7 +8295,7 @@
           </a:fontRef>
         </p:style>
         <p:txBody>
-          <a:bodyPr rtlCol="0" anchor="ctr" wrap="square" lIns="109728" rIns="36576"/>
+          <a:bodyPr wrap="square" lIns="109728" rIns="36576" rtlCol="0" anchor="ctr"/>
           <a:lstStyle/>
           <a:p>
             <a:pPr algn="ctr"/>
@@ -7613,6 +8352,7 @@
           <a:lstStyle/>
           <a:p>
             <a:pPr algn="ctr"/>
+            <a:endParaRPr/>
           </a:p>
         </p:txBody>
       </p:sp>
@@ -7657,6 +8397,7 @@
           <a:lstStyle/>
           <a:p>
             <a:pPr algn="ctr"/>
+            <a:endParaRPr/>
           </a:p>
         </p:txBody>
       </p:sp>
@@ -7701,7 +8442,7 @@
           </a:fontRef>
         </p:style>
         <p:txBody>
-          <a:bodyPr rtlCol="0" anchor="ctr" wrap="square" lIns="109728" rIns="36576"/>
+          <a:bodyPr wrap="square" lIns="109728" rIns="36576" rtlCol="0" anchor="ctr"/>
           <a:lstStyle/>
           <a:p>
             <a:pPr algn="ctr"/>
@@ -7758,6 +8499,7 @@
           <a:lstStyle/>
           <a:p>
             <a:pPr algn="ctr"/>
+            <a:endParaRPr/>
           </a:p>
         </p:txBody>
       </p:sp>
@@ -7802,6 +8544,7 @@
           <a:lstStyle/>
           <a:p>
             <a:pPr algn="ctr"/>
+            <a:endParaRPr/>
           </a:p>
         </p:txBody>
       </p:sp>
@@ -7846,7 +8589,7 @@
           </a:fontRef>
         </p:style>
         <p:txBody>
-          <a:bodyPr rtlCol="0" anchor="ctr" wrap="square" lIns="109728" rIns="36576"/>
+          <a:bodyPr wrap="square" lIns="109728" rIns="36576" rtlCol="0" anchor="ctr"/>
           <a:lstStyle/>
           <a:p>
             <a:pPr algn="ctr"/>
@@ -7903,6 +8646,7 @@
           <a:lstStyle/>
           <a:p>
             <a:pPr algn="ctr"/>
+            <a:endParaRPr/>
           </a:p>
         </p:txBody>
       </p:sp>
@@ -7947,6 +8691,7 @@
           <a:lstStyle/>
           <a:p>
             <a:pPr algn="ctr"/>
+            <a:endParaRPr/>
           </a:p>
         </p:txBody>
       </p:sp>
@@ -7991,7 +8736,7 @@
           </a:fontRef>
         </p:style>
         <p:txBody>
-          <a:bodyPr rtlCol="0" anchor="ctr" wrap="square" lIns="109728" rIns="36576"/>
+          <a:bodyPr wrap="square" lIns="109728" rIns="36576" rtlCol="0" anchor="ctr"/>
           <a:lstStyle/>
           <a:p>
             <a:pPr algn="ctr"/>
@@ -8048,6 +8793,7 @@
           <a:lstStyle/>
           <a:p>
             <a:pPr algn="ctr"/>
+            <a:endParaRPr/>
           </a:p>
         </p:txBody>
       </p:sp>
@@ -8092,6 +8838,7 @@
           <a:lstStyle/>
           <a:p>
             <a:pPr algn="ctr"/>
+            <a:endParaRPr/>
           </a:p>
         </p:txBody>
       </p:sp>
@@ -8136,7 +8883,7 @@
           </a:fontRef>
         </p:style>
         <p:txBody>
-          <a:bodyPr rtlCol="0" anchor="ctr" wrap="square" lIns="109728" rIns="36576"/>
+          <a:bodyPr wrap="square" lIns="109728" rIns="36576" rtlCol="0" anchor="ctr"/>
           <a:lstStyle/>
           <a:p>
             <a:pPr algn="ctr"/>
@@ -8193,6 +8940,7 @@
           <a:lstStyle/>
           <a:p>
             <a:pPr algn="ctr"/>
+            <a:endParaRPr/>
           </a:p>
         </p:txBody>
       </p:sp>
@@ -8213,7 +8961,7 @@
           <a:noFill/>
         </p:spPr>
         <p:txBody>
-          <a:bodyPr wrap="square" anchor="t" lIns="0" rIns="0" tIns="0" bIns="0">
+          <a:bodyPr wrap="square" lIns="0" tIns="0" rIns="0" bIns="0" anchor="t">
             <a:spAutoFit/>
           </a:bodyPr>
           <a:lstStyle/>
@@ -8286,6 +9034,7 @@
           <a:lstStyle/>
           <a:p>
             <a:pPr algn="ctr"/>
+            <a:endParaRPr/>
           </a:p>
         </p:txBody>
       </p:sp>
@@ -8334,6 +9083,7 @@
           <a:lstStyle/>
           <a:p>
             <a:pPr algn="ctr"/>
+            <a:endParaRPr/>
           </a:p>
         </p:txBody>
       </p:sp>
@@ -8354,7 +9104,7 @@
           <a:noFill/>
         </p:spPr>
         <p:txBody>
-          <a:bodyPr wrap="square" anchor="t" lIns="0" rIns="0" tIns="0" bIns="0">
+          <a:bodyPr wrap="square" lIns="0" tIns="0" rIns="0" bIns="0" anchor="t">
             <a:spAutoFit/>
           </a:bodyPr>
           <a:lstStyle/>
@@ -8399,7 +9149,7 @@
           <a:noFill/>
         </p:spPr>
         <p:txBody>
-          <a:bodyPr wrap="square" anchor="t" lIns="0" rIns="0" tIns="0" bIns="0">
+          <a:bodyPr wrap="square" lIns="0" tIns="0" rIns="0" bIns="0" anchor="t">
             <a:spAutoFit/>
           </a:bodyPr>
           <a:lstStyle/>
@@ -8472,6 +9222,7 @@
           <a:lstStyle/>
           <a:p>
             <a:pPr algn="ctr"/>
+            <a:endParaRPr/>
           </a:p>
         </p:txBody>
       </p:sp>
@@ -8520,6 +9271,7 @@
           <a:lstStyle/>
           <a:p>
             <a:pPr algn="ctr"/>
+            <a:endParaRPr/>
           </a:p>
         </p:txBody>
       </p:sp>
@@ -8540,7 +9292,7 @@
           <a:noFill/>
         </p:spPr>
         <p:txBody>
-          <a:bodyPr wrap="square" anchor="t" lIns="0" rIns="0" tIns="0" bIns="0">
+          <a:bodyPr wrap="square" lIns="0" tIns="0" rIns="0" bIns="0" anchor="t">
             <a:spAutoFit/>
           </a:bodyPr>
           <a:lstStyle/>
@@ -8585,7 +9337,7 @@
           <a:noFill/>
         </p:spPr>
         <p:txBody>
-          <a:bodyPr wrap="square" anchor="t" lIns="0" rIns="0" tIns="0" bIns="0">
+          <a:bodyPr wrap="square" lIns="0" tIns="0" rIns="0" bIns="0" anchor="t">
             <a:spAutoFit/>
           </a:bodyPr>
           <a:lstStyle/>
@@ -8658,6 +9410,7 @@
           <a:lstStyle/>
           <a:p>
             <a:pPr algn="ctr"/>
+            <a:endParaRPr/>
           </a:p>
         </p:txBody>
       </p:sp>
@@ -8706,6 +9459,7 @@
           <a:lstStyle/>
           <a:p>
             <a:pPr algn="ctr"/>
+            <a:endParaRPr/>
           </a:p>
         </p:txBody>
       </p:sp>
@@ -8726,7 +9480,7 @@
           <a:noFill/>
         </p:spPr>
         <p:txBody>
-          <a:bodyPr wrap="square" anchor="t" lIns="0" rIns="0" tIns="0" bIns="0">
+          <a:bodyPr wrap="square" lIns="0" tIns="0" rIns="0" bIns="0" anchor="t">
             <a:spAutoFit/>
           </a:bodyPr>
           <a:lstStyle/>
@@ -8771,7 +9525,7 @@
           <a:noFill/>
         </p:spPr>
         <p:txBody>
-          <a:bodyPr wrap="square" anchor="t" lIns="0" rIns="0" tIns="0" bIns="0">
+          <a:bodyPr wrap="square" lIns="0" tIns="0" rIns="0" bIns="0" anchor="t">
             <a:spAutoFit/>
           </a:bodyPr>
           <a:lstStyle/>
@@ -8844,6 +9598,7 @@
           <a:lstStyle/>
           <a:p>
             <a:pPr algn="ctr"/>
+            <a:endParaRPr/>
           </a:p>
         </p:txBody>
       </p:sp>
@@ -8892,6 +9647,7 @@
           <a:lstStyle/>
           <a:p>
             <a:pPr algn="ctr"/>
+            <a:endParaRPr/>
           </a:p>
         </p:txBody>
       </p:sp>
@@ -8912,7 +9668,7 @@
           <a:noFill/>
         </p:spPr>
         <p:txBody>
-          <a:bodyPr wrap="square" anchor="t" lIns="0" rIns="0" tIns="0" bIns="0">
+          <a:bodyPr wrap="square" lIns="0" tIns="0" rIns="0" bIns="0" anchor="t">
             <a:spAutoFit/>
           </a:bodyPr>
           <a:lstStyle/>
@@ -8957,7 +9713,7 @@
           <a:noFill/>
         </p:spPr>
         <p:txBody>
-          <a:bodyPr wrap="square" anchor="t" lIns="0" rIns="0" tIns="0" bIns="0">
+          <a:bodyPr wrap="square" lIns="0" tIns="0" rIns="0" bIns="0" anchor="t">
             <a:spAutoFit/>
           </a:bodyPr>
           <a:lstStyle/>
@@ -9030,6 +9786,7 @@
           <a:lstStyle/>
           <a:p>
             <a:pPr algn="ctr"/>
+            <a:endParaRPr/>
           </a:p>
         </p:txBody>
       </p:sp>
@@ -9078,6 +9835,7 @@
           <a:lstStyle/>
           <a:p>
             <a:pPr algn="ctr"/>
+            <a:endParaRPr/>
           </a:p>
         </p:txBody>
       </p:sp>
@@ -9098,7 +9856,7 @@
           <a:noFill/>
         </p:spPr>
         <p:txBody>
-          <a:bodyPr wrap="square" anchor="t" lIns="0" rIns="0" tIns="0" bIns="0">
+          <a:bodyPr wrap="square" lIns="0" tIns="0" rIns="0" bIns="0" anchor="t">
             <a:spAutoFit/>
           </a:bodyPr>
           <a:lstStyle/>
@@ -9143,7 +9901,7 @@
           <a:noFill/>
         </p:spPr>
         <p:txBody>
-          <a:bodyPr wrap="square" anchor="t" lIns="0" rIns="0" tIns="0" bIns="0">
+          <a:bodyPr wrap="square" lIns="0" tIns="0" rIns="0" bIns="0" anchor="t">
             <a:spAutoFit/>
           </a:bodyPr>
           <a:lstStyle/>
@@ -9216,6 +9974,7 @@
           <a:lstStyle/>
           <a:p>
             <a:pPr algn="ctr"/>
+            <a:endParaRPr/>
           </a:p>
         </p:txBody>
       </p:sp>
@@ -9260,33 +10019,10 @@
           <a:lstStyle/>
           <a:p>
             <a:pPr algn="ctr"/>
-          </a:p>
-        </p:txBody>
-      </p:sp>
-      <p:pic>
-        <p:nvPicPr>
-          <p:cNvPr id="53" name="Picture 52" descr="ops.png"/>
-          <p:cNvPicPr>
-            <a:picLocks noChangeAspect="1"/>
-          </p:cNvPicPr>
-          <p:nvPr/>
-        </p:nvPicPr>
-        <p:blipFill>
-          <a:blip r:embed="rId2"/>
-          <a:stretch>
-            <a:fillRect/>
-          </a:stretch>
-        </p:blipFill>
-        <p:spPr>
-          <a:xfrm>
-            <a:off x="7690104" y="2908915"/>
-            <a:ext cx="4005072" cy="2548928"/>
-          </a:xfrm>
-          <a:prstGeom prst="rect">
-            <a:avLst/>
-          </a:prstGeom>
-        </p:spPr>
-      </p:pic>
+            <a:endParaRPr/>
+          </a:p>
+        </p:txBody>
+      </p:sp>
       <p:sp>
         <p:nvSpPr>
           <p:cNvPr id="54" name="TextBox 53"/>
@@ -9304,7 +10040,7 @@
           <a:noFill/>
         </p:spPr>
         <p:txBody>
-          <a:bodyPr wrap="square" anchor="t" lIns="0" rIns="0" tIns="0" bIns="0">
+          <a:bodyPr wrap="square" lIns="0" tIns="0" rIns="0" bIns="0" anchor="t">
             <a:spAutoFit/>
           </a:bodyPr>
           <a:lstStyle/>
@@ -9349,7 +10085,7 @@
           <a:noFill/>
         </p:spPr>
         <p:txBody>
-          <a:bodyPr wrap="square" anchor="t" lIns="0" rIns="0" tIns="0" bIns="0">
+          <a:bodyPr wrap="square" lIns="0" tIns="0" rIns="0" bIns="0" anchor="t">
             <a:spAutoFit/>
           </a:bodyPr>
           <a:lstStyle/>
@@ -9403,7 +10139,7 @@
           <a:noFill/>
         </p:spPr>
         <p:txBody>
-          <a:bodyPr wrap="square" anchor="t" lIns="0" rIns="0" tIns="0" bIns="0">
+          <a:bodyPr wrap="square" lIns="0" tIns="0" rIns="0" bIns="0" anchor="t">
             <a:spAutoFit/>
           </a:bodyPr>
           <a:lstStyle/>
@@ -9431,6 +10167,30 @@
           </a:p>
         </p:txBody>
       </p:sp>
+      <p:pic>
+        <p:nvPicPr>
+          <p:cNvPr id="57" name="Picture 56" descr="shot-ops.png"/>
+          <p:cNvPicPr>
+            <a:picLocks noChangeAspect="1"/>
+          </p:cNvPicPr>
+          <p:nvPr/>
+        </p:nvPicPr>
+        <p:blipFill>
+          <a:blip r:embed="rId2"/>
+          <a:stretch>
+            <a:fillRect/>
+          </a:stretch>
+        </p:blipFill>
+        <p:spPr>
+          <a:xfrm>
+            <a:off x="7690104" y="2908915"/>
+            <a:ext cx="4005072" cy="2548928"/>
+          </a:xfrm>
+          <a:prstGeom prst="rect">
+            <a:avLst/>
+          </a:prstGeom>
+        </p:spPr>
+      </p:pic>
     </p:spTree>
   </p:cSld>
   <p:clrMapOvr>
@@ -9440,7 +10200,7 @@
 </file>
 
 <file path=ppt/slides/slide4.xml><?xml version="1.0" encoding="utf-8"?>
-<p:sld xmlns:a="http://schemas.openxmlformats.org/drawingml/2006/main" xmlns:p="http://schemas.openxmlformats.org/presentationml/2006/main" xmlns:r="http://schemas.openxmlformats.org/officeDocument/2006/relationships">
+<p:sld xmlns:a="http://schemas.openxmlformats.org/drawingml/2006/main" xmlns:r="http://schemas.openxmlformats.org/officeDocument/2006/relationships" xmlns:p="http://schemas.openxmlformats.org/presentationml/2006/main">
   <p:cSld>
     <p:spTree>
       <p:nvGrpSpPr>
@@ -9448,7 +10208,14 @@
         <p:cNvGrpSpPr/>
         <p:nvPr/>
       </p:nvGrpSpPr>
-      <p:grpSpPr/>
+      <p:grpSpPr>
+        <a:xfrm>
+          <a:off x="0" y="0"/>
+          <a:ext cx="0" cy="0"/>
+          <a:chOff x="0" y="0"/>
+          <a:chExt cx="0" cy="0"/>
+        </a:xfrm>
+      </p:grpSpPr>
       <p:sp>
         <p:nvSpPr>
           <p:cNvPr id="2" name="Rectangle 1"/>
@@ -9472,7 +10239,7 @@
                 <a:srgbClr val="0A0E17"/>
               </a:gs>
             </a:gsLst>
-            <a:lin scaled="0" ang="18000000"/>
+            <a:lin ang="18000000" scaled="0"/>
           </a:gradFill>
           <a:ln>
             <a:noFill/>
@@ -9498,6 +10265,7 @@
           <a:lstStyle/>
           <a:p>
             <a:pPr algn="ctr"/>
+            <a:endParaRPr/>
           </a:p>
         </p:txBody>
       </p:sp>
@@ -9544,6 +10312,7 @@
           <a:lstStyle/>
           <a:p>
             <a:pPr algn="ctr"/>
+            <a:endParaRPr/>
           </a:p>
         </p:txBody>
       </p:sp>
@@ -9590,6 +10359,7 @@
           <a:lstStyle/>
           <a:p>
             <a:pPr algn="ctr"/>
+            <a:endParaRPr/>
           </a:p>
         </p:txBody>
       </p:sp>
@@ -9610,7 +10380,7 @@
           <a:noFill/>
         </p:spPr>
         <p:txBody>
-          <a:bodyPr wrap="square" anchor="t" lIns="0" rIns="0" tIns="0" bIns="0">
+          <a:bodyPr wrap="square" lIns="0" tIns="0" rIns="0" bIns="0" anchor="t">
             <a:spAutoFit/>
           </a:bodyPr>
           <a:lstStyle/>
@@ -9655,7 +10425,7 @@
           <a:noFill/>
         </p:spPr>
         <p:txBody>
-          <a:bodyPr wrap="square" anchor="t" lIns="0" rIns="0" tIns="0" bIns="0">
+          <a:bodyPr wrap="square" lIns="0" tIns="0" rIns="0" bIns="0" anchor="t">
             <a:spAutoFit/>
           </a:bodyPr>
           <a:lstStyle/>
@@ -9700,7 +10470,7 @@
           <a:noFill/>
         </p:spPr>
         <p:txBody>
-          <a:bodyPr wrap="square" anchor="t" lIns="0" rIns="0" tIns="0" bIns="0">
+          <a:bodyPr wrap="square" lIns="0" tIns="0" rIns="0" bIns="0" anchor="t">
             <a:spAutoFit/>
           </a:bodyPr>
           <a:lstStyle/>
@@ -9773,6 +10543,7 @@
           <a:lstStyle/>
           <a:p>
             <a:pPr algn="ctr"/>
+            <a:endParaRPr/>
           </a:p>
         </p:txBody>
       </p:sp>
@@ -9793,7 +10564,7 @@
           <a:noFill/>
         </p:spPr>
         <p:txBody>
-          <a:bodyPr wrap="square" anchor="ctr" lIns="0" rIns="0" tIns="0" bIns="0">
+          <a:bodyPr wrap="square" lIns="0" tIns="0" rIns="0" bIns="0" anchor="ctr">
             <a:spAutoFit/>
           </a:bodyPr>
           <a:lstStyle/>
@@ -9809,15 +10580,7 @@
                 <a:spcPts val="200"/>
               </a:spcAft>
             </a:pPr>
-            <a:r>
-              <a:rPr sz="950" b="1" i="0">
-                <a:solidFill>
-                  <a:srgbClr val="93A1B8"/>
-                </a:solidFill>
-                <a:latin typeface="Segoe UI"/>
-              </a:rPr>
-              <a:t/>
-            </a:r>
+            <a:endParaRPr/>
           </a:p>
         </p:txBody>
       </p:sp>
@@ -9838,7 +10601,7 @@
           <a:noFill/>
         </p:spPr>
         <p:txBody>
-          <a:bodyPr wrap="square" anchor="ctr" lIns="0" rIns="0" tIns="0" bIns="0">
+          <a:bodyPr wrap="square" lIns="0" tIns="0" rIns="0" bIns="0" anchor="ctr">
             <a:spAutoFit/>
           </a:bodyPr>
           <a:lstStyle/>
@@ -9883,7 +10646,7 @@
           <a:noFill/>
         </p:spPr>
         <p:txBody>
-          <a:bodyPr wrap="square" anchor="ctr" lIns="0" rIns="0" tIns="0" bIns="0">
+          <a:bodyPr wrap="square" lIns="0" tIns="0" rIns="0" bIns="0" anchor="ctr">
             <a:spAutoFit/>
           </a:bodyPr>
           <a:lstStyle/>
@@ -9928,7 +10691,7 @@
           <a:noFill/>
         </p:spPr>
         <p:txBody>
-          <a:bodyPr wrap="square" anchor="ctr" lIns="0" rIns="0" tIns="0" bIns="0">
+          <a:bodyPr wrap="square" lIns="0" tIns="0" rIns="0" bIns="0" anchor="ctr">
             <a:spAutoFit/>
           </a:bodyPr>
           <a:lstStyle/>
@@ -10001,6 +10764,7 @@
           <a:lstStyle/>
           <a:p>
             <a:pPr algn="ctr"/>
+            <a:endParaRPr/>
           </a:p>
         </p:txBody>
       </p:sp>
@@ -10078,7 +10842,7 @@
           <a:noFill/>
         </p:spPr>
         <p:txBody>
-          <a:bodyPr wrap="square" anchor="ctr" lIns="0" rIns="0" tIns="0" bIns="0">
+          <a:bodyPr wrap="square" lIns="0" tIns="0" rIns="0" bIns="0" anchor="ctr">
             <a:spAutoFit/>
           </a:bodyPr>
           <a:lstStyle/>
@@ -10123,7 +10887,7 @@
           <a:noFill/>
         </p:spPr>
         <p:txBody>
-          <a:bodyPr wrap="square" anchor="ctr" lIns="0" rIns="0" tIns="0" bIns="0">
+          <a:bodyPr wrap="square" lIns="0" tIns="0" rIns="0" bIns="0" anchor="ctr">
             <a:spAutoFit/>
           </a:bodyPr>
           <a:lstStyle/>
@@ -10168,7 +10932,7 @@
           <a:noFill/>
         </p:spPr>
         <p:txBody>
-          <a:bodyPr wrap="square" anchor="ctr" lIns="0" rIns="0" tIns="0" bIns="0">
+          <a:bodyPr wrap="square" lIns="0" tIns="0" rIns="0" bIns="0" anchor="ctr">
             <a:spAutoFit/>
           </a:bodyPr>
           <a:lstStyle/>
@@ -10241,6 +11005,7 @@
           <a:lstStyle/>
           <a:p>
             <a:pPr algn="ctr"/>
+            <a:endParaRPr/>
           </a:p>
         </p:txBody>
       </p:sp>
@@ -10318,7 +11083,7 @@
           <a:noFill/>
         </p:spPr>
         <p:txBody>
-          <a:bodyPr wrap="square" anchor="ctr" lIns="0" rIns="0" tIns="0" bIns="0">
+          <a:bodyPr wrap="square" lIns="0" tIns="0" rIns="0" bIns="0" anchor="ctr">
             <a:spAutoFit/>
           </a:bodyPr>
           <a:lstStyle/>
@@ -10363,7 +11128,7 @@
           <a:noFill/>
         </p:spPr>
         <p:txBody>
-          <a:bodyPr wrap="square" anchor="ctr" lIns="0" rIns="0" tIns="0" bIns="0">
+          <a:bodyPr wrap="square" lIns="0" tIns="0" rIns="0" bIns="0" anchor="ctr">
             <a:spAutoFit/>
           </a:bodyPr>
           <a:lstStyle/>
@@ -10408,7 +11173,7 @@
           <a:noFill/>
         </p:spPr>
         <p:txBody>
-          <a:bodyPr wrap="square" anchor="ctr" lIns="0" rIns="0" tIns="0" bIns="0">
+          <a:bodyPr wrap="square" lIns="0" tIns="0" rIns="0" bIns="0" anchor="ctr">
             <a:spAutoFit/>
           </a:bodyPr>
           <a:lstStyle/>
@@ -10481,6 +11246,7 @@
           <a:lstStyle/>
           <a:p>
             <a:pPr algn="ctr"/>
+            <a:endParaRPr/>
           </a:p>
         </p:txBody>
       </p:sp>
@@ -10558,7 +11324,7 @@
           <a:noFill/>
         </p:spPr>
         <p:txBody>
-          <a:bodyPr wrap="square" anchor="ctr" lIns="0" rIns="0" tIns="0" bIns="0">
+          <a:bodyPr wrap="square" lIns="0" tIns="0" rIns="0" bIns="0" anchor="ctr">
             <a:spAutoFit/>
           </a:bodyPr>
           <a:lstStyle/>
@@ -10603,7 +11369,7 @@
           <a:noFill/>
         </p:spPr>
         <p:txBody>
-          <a:bodyPr wrap="square" anchor="ctr" lIns="0" rIns="0" tIns="0" bIns="0">
+          <a:bodyPr wrap="square" lIns="0" tIns="0" rIns="0" bIns="0" anchor="ctr">
             <a:spAutoFit/>
           </a:bodyPr>
           <a:lstStyle/>
@@ -10648,7 +11414,7 @@
           <a:noFill/>
         </p:spPr>
         <p:txBody>
-          <a:bodyPr wrap="square" anchor="ctr" lIns="0" rIns="0" tIns="0" bIns="0">
+          <a:bodyPr wrap="square" lIns="0" tIns="0" rIns="0" bIns="0" anchor="ctr">
             <a:spAutoFit/>
           </a:bodyPr>
           <a:lstStyle/>
@@ -10721,6 +11487,7 @@
           <a:lstStyle/>
           <a:p>
             <a:pPr algn="ctr"/>
+            <a:endParaRPr/>
           </a:p>
         </p:txBody>
       </p:sp>
@@ -10798,7 +11565,7 @@
           <a:noFill/>
         </p:spPr>
         <p:txBody>
-          <a:bodyPr wrap="square" anchor="ctr" lIns="0" rIns="0" tIns="0" bIns="0">
+          <a:bodyPr wrap="square" lIns="0" tIns="0" rIns="0" bIns="0" anchor="ctr">
             <a:spAutoFit/>
           </a:bodyPr>
           <a:lstStyle/>
@@ -10843,7 +11610,7 @@
           <a:noFill/>
         </p:spPr>
         <p:txBody>
-          <a:bodyPr wrap="square" anchor="ctr" lIns="0" rIns="0" tIns="0" bIns="0">
+          <a:bodyPr wrap="square" lIns="0" tIns="0" rIns="0" bIns="0" anchor="ctr">
             <a:spAutoFit/>
           </a:bodyPr>
           <a:lstStyle/>
@@ -10888,7 +11655,7 @@
           <a:noFill/>
         </p:spPr>
         <p:txBody>
-          <a:bodyPr wrap="square" anchor="ctr" lIns="0" rIns="0" tIns="0" bIns="0">
+          <a:bodyPr wrap="square" lIns="0" tIns="0" rIns="0" bIns="0" anchor="ctr">
             <a:spAutoFit/>
           </a:bodyPr>
           <a:lstStyle/>
@@ -10961,6 +11728,7 @@
           <a:lstStyle/>
           <a:p>
             <a:pPr algn="ctr"/>
+            <a:endParaRPr/>
           </a:p>
         </p:txBody>
       </p:sp>
@@ -11038,7 +11806,7 @@
           <a:noFill/>
         </p:spPr>
         <p:txBody>
-          <a:bodyPr wrap="square" anchor="ctr" lIns="0" rIns="0" tIns="0" bIns="0">
+          <a:bodyPr wrap="square" lIns="0" tIns="0" rIns="0" bIns="0" anchor="ctr">
             <a:spAutoFit/>
           </a:bodyPr>
           <a:lstStyle/>
@@ -11083,7 +11851,7 @@
           <a:noFill/>
         </p:spPr>
         <p:txBody>
-          <a:bodyPr wrap="square" anchor="ctr" lIns="0" rIns="0" tIns="0" bIns="0">
+          <a:bodyPr wrap="square" lIns="0" tIns="0" rIns="0" bIns="0" anchor="ctr">
             <a:spAutoFit/>
           </a:bodyPr>
           <a:lstStyle/>
@@ -11128,7 +11896,7 @@
           <a:noFill/>
         </p:spPr>
         <p:txBody>
-          <a:bodyPr wrap="square" anchor="ctr" lIns="0" rIns="0" tIns="0" bIns="0">
+          <a:bodyPr wrap="square" lIns="0" tIns="0" rIns="0" bIns="0" anchor="ctr">
             <a:spAutoFit/>
           </a:bodyPr>
           <a:lstStyle/>
@@ -11173,7 +11941,7 @@
           <a:noFill/>
         </p:spPr>
         <p:txBody>
-          <a:bodyPr wrap="square" anchor="t" lIns="0" rIns="0" tIns="0" bIns="0">
+          <a:bodyPr wrap="square" lIns="0" tIns="0" rIns="0" bIns="0" anchor="t">
             <a:spAutoFit/>
           </a:bodyPr>
           <a:lstStyle/>
@@ -11227,7 +11995,7 @@
           <a:noFill/>
         </p:spPr>
         <p:txBody>
-          <a:bodyPr wrap="square" anchor="t" lIns="0" rIns="0" tIns="0" bIns="0">
+          <a:bodyPr wrap="square" lIns="0" tIns="0" rIns="0" bIns="0" anchor="t">
             <a:spAutoFit/>
           </a:bodyPr>
           <a:lstStyle/>
@@ -11264,7 +12032,7 @@
 </file>
 
 <file path=ppt/slides/slide5.xml><?xml version="1.0" encoding="utf-8"?>
-<p:sld xmlns:a="http://schemas.openxmlformats.org/drawingml/2006/main" xmlns:p="http://schemas.openxmlformats.org/presentationml/2006/main" xmlns:r="http://schemas.openxmlformats.org/officeDocument/2006/relationships">
+<p:sld xmlns:a="http://schemas.openxmlformats.org/drawingml/2006/main" xmlns:r="http://schemas.openxmlformats.org/officeDocument/2006/relationships" xmlns:p="http://schemas.openxmlformats.org/presentationml/2006/main">
   <p:cSld>
     <p:spTree>
       <p:nvGrpSpPr>
@@ -11272,7 +12040,14 @@
         <p:cNvGrpSpPr/>
         <p:nvPr/>
       </p:nvGrpSpPr>
-      <p:grpSpPr/>
+      <p:grpSpPr>
+        <a:xfrm>
+          <a:off x="0" y="0"/>
+          <a:ext cx="0" cy="0"/>
+          <a:chOff x="0" y="0"/>
+          <a:chExt cx="0" cy="0"/>
+        </a:xfrm>
+      </p:grpSpPr>
       <p:sp>
         <p:nvSpPr>
           <p:cNvPr id="2" name="Rectangle 1"/>
@@ -11296,7 +12071,7 @@
                 <a:srgbClr val="0A0E17"/>
               </a:gs>
             </a:gsLst>
-            <a:lin scaled="0" ang="18000000"/>
+            <a:lin ang="18000000" scaled="0"/>
           </a:gradFill>
           <a:ln>
             <a:noFill/>
@@ -11322,6 +12097,7 @@
           <a:lstStyle/>
           <a:p>
             <a:pPr algn="ctr"/>
+            <a:endParaRPr/>
           </a:p>
         </p:txBody>
       </p:sp>
@@ -11368,6 +12144,7 @@
           <a:lstStyle/>
           <a:p>
             <a:pPr algn="ctr"/>
+            <a:endParaRPr/>
           </a:p>
         </p:txBody>
       </p:sp>
@@ -11414,6 +12191,7 @@
           <a:lstStyle/>
           <a:p>
             <a:pPr algn="ctr"/>
+            <a:endParaRPr/>
           </a:p>
         </p:txBody>
       </p:sp>
@@ -11434,7 +12212,7 @@
           <a:noFill/>
         </p:spPr>
         <p:txBody>
-          <a:bodyPr wrap="square" anchor="t" lIns="0" rIns="0" tIns="0" bIns="0">
+          <a:bodyPr wrap="square" lIns="0" tIns="0" rIns="0" bIns="0" anchor="t">
             <a:spAutoFit/>
           </a:bodyPr>
           <a:lstStyle/>
@@ -11479,7 +12257,7 @@
           <a:noFill/>
         </p:spPr>
         <p:txBody>
-          <a:bodyPr wrap="square" anchor="t" lIns="0" rIns="0" tIns="0" bIns="0">
+          <a:bodyPr wrap="square" lIns="0" tIns="0" rIns="0" bIns="0" anchor="t">
             <a:spAutoFit/>
           </a:bodyPr>
           <a:lstStyle/>
@@ -11524,7 +12302,7 @@
           <a:noFill/>
         </p:spPr>
         <p:txBody>
-          <a:bodyPr wrap="square" anchor="t" lIns="0" rIns="0" tIns="0" bIns="0">
+          <a:bodyPr wrap="square" lIns="0" tIns="0" rIns="0" bIns="0" anchor="t">
             <a:spAutoFit/>
           </a:bodyPr>
           <a:lstStyle/>
@@ -11569,7 +12347,7 @@
           <a:noFill/>
         </p:spPr>
         <p:txBody>
-          <a:bodyPr wrap="square" anchor="t" lIns="0" rIns="0" tIns="0" bIns="0">
+          <a:bodyPr wrap="square" lIns="0" tIns="0" rIns="0" bIns="0" anchor="t">
             <a:spAutoFit/>
           </a:bodyPr>
           <a:lstStyle/>
@@ -11642,6 +12420,7 @@
           <a:lstStyle/>
           <a:p>
             <a:pPr algn="ctr"/>
+            <a:endParaRPr/>
           </a:p>
         </p:txBody>
       </p:sp>
@@ -11686,6 +12465,7 @@
           <a:lstStyle/>
           <a:p>
             <a:pPr algn="ctr"/>
+            <a:endParaRPr/>
           </a:p>
         </p:txBody>
       </p:sp>
@@ -11706,7 +12486,7 @@
           <a:noFill/>
         </p:spPr>
         <p:txBody>
-          <a:bodyPr wrap="square" anchor="t" lIns="0" rIns="0" tIns="0" bIns="0">
+          <a:bodyPr wrap="square" lIns="0" tIns="0" rIns="0" bIns="0" anchor="t">
             <a:spAutoFit/>
           </a:bodyPr>
           <a:lstStyle/>
@@ -11760,7 +12540,7 @@
           <a:noFill/>
         </p:spPr>
         <p:txBody>
-          <a:bodyPr wrap="square" anchor="t" lIns="0" rIns="0" tIns="0" bIns="0">
+          <a:bodyPr wrap="square" lIns="0" tIns="0" rIns="0" bIns="0" anchor="t">
             <a:spAutoFit/>
           </a:bodyPr>
           <a:lstStyle/>
@@ -11833,6 +12613,7 @@
           <a:lstStyle/>
           <a:p>
             <a:pPr algn="ctr"/>
+            <a:endParaRPr/>
           </a:p>
         </p:txBody>
       </p:sp>
@@ -11877,6 +12658,7 @@
           <a:lstStyle/>
           <a:p>
             <a:pPr algn="ctr"/>
+            <a:endParaRPr/>
           </a:p>
         </p:txBody>
       </p:sp>
@@ -11897,7 +12679,7 @@
           <a:noFill/>
         </p:spPr>
         <p:txBody>
-          <a:bodyPr wrap="square" anchor="t" lIns="0" rIns="0" tIns="0" bIns="0">
+          <a:bodyPr wrap="square" lIns="0" tIns="0" rIns="0" bIns="0" anchor="t">
             <a:spAutoFit/>
           </a:bodyPr>
           <a:lstStyle/>
@@ -11951,7 +12733,7 @@
           <a:noFill/>
         </p:spPr>
         <p:txBody>
-          <a:bodyPr wrap="square" anchor="t" lIns="0" rIns="0" tIns="0" bIns="0">
+          <a:bodyPr wrap="square" lIns="0" tIns="0" rIns="0" bIns="0" anchor="t">
             <a:spAutoFit/>
           </a:bodyPr>
           <a:lstStyle/>
@@ -12024,6 +12806,7 @@
           <a:lstStyle/>
           <a:p>
             <a:pPr algn="ctr"/>
+            <a:endParaRPr/>
           </a:p>
         </p:txBody>
       </p:sp>
@@ -12068,6 +12851,7 @@
           <a:lstStyle/>
           <a:p>
             <a:pPr algn="ctr"/>
+            <a:endParaRPr/>
           </a:p>
         </p:txBody>
       </p:sp>
@@ -12088,7 +12872,7 @@
           <a:noFill/>
         </p:spPr>
         <p:txBody>
-          <a:bodyPr wrap="square" anchor="t" lIns="0" rIns="0" tIns="0" bIns="0">
+          <a:bodyPr wrap="square" lIns="0" tIns="0" rIns="0" bIns="0" anchor="t">
             <a:spAutoFit/>
           </a:bodyPr>
           <a:lstStyle/>
@@ -12142,7 +12926,7 @@
           <a:noFill/>
         </p:spPr>
         <p:txBody>
-          <a:bodyPr wrap="square" anchor="t" lIns="0" rIns="0" tIns="0" bIns="0">
+          <a:bodyPr wrap="square" lIns="0" tIns="0" rIns="0" bIns="0" anchor="t">
             <a:spAutoFit/>
           </a:bodyPr>
           <a:lstStyle/>
@@ -12215,6 +12999,7 @@
           <a:lstStyle/>
           <a:p>
             <a:pPr algn="ctr"/>
+            <a:endParaRPr/>
           </a:p>
         </p:txBody>
       </p:sp>
@@ -12259,6 +13044,7 @@
           <a:lstStyle/>
           <a:p>
             <a:pPr algn="ctr"/>
+            <a:endParaRPr/>
           </a:p>
         </p:txBody>
       </p:sp>
@@ -12279,7 +13065,7 @@
           <a:noFill/>
         </p:spPr>
         <p:txBody>
-          <a:bodyPr wrap="square" anchor="t" lIns="0" rIns="0" tIns="0" bIns="0">
+          <a:bodyPr wrap="square" lIns="0" tIns="0" rIns="0" bIns="0" anchor="t">
             <a:spAutoFit/>
           </a:bodyPr>
           <a:lstStyle/>
@@ -12333,7 +13119,7 @@
           <a:noFill/>
         </p:spPr>
         <p:txBody>
-          <a:bodyPr wrap="square" anchor="t" lIns="0" rIns="0" tIns="0" bIns="0">
+          <a:bodyPr wrap="square" lIns="0" tIns="0" rIns="0" bIns="0" anchor="t">
             <a:spAutoFit/>
           </a:bodyPr>
           <a:lstStyle/>
@@ -12378,7 +13164,7 @@
           <a:noFill/>
         </p:spPr>
         <p:txBody>
-          <a:bodyPr wrap="square" anchor="t" lIns="0" rIns="0" tIns="0" bIns="0">
+          <a:bodyPr wrap="square" lIns="0" tIns="0" rIns="0" bIns="0" anchor="t">
             <a:spAutoFit/>
           </a:bodyPr>
           <a:lstStyle/>
@@ -12447,7 +13233,7 @@
           </a:fontRef>
         </p:style>
         <p:txBody>
-          <a:bodyPr rtlCol="0" anchor="ctr" wrap="square" lIns="45720" rIns="45720" tIns="18288" bIns="18288"/>
+          <a:bodyPr wrap="square" lIns="45720" tIns="18288" rIns="45720" bIns="18288" rtlCol="0" anchor="ctr"/>
           <a:lstStyle/>
           <a:p>
             <a:pPr algn="ctr"/>
@@ -12516,6 +13302,7 @@
           <a:lstStyle/>
           <a:p>
             <a:pPr algn="ctr"/>
+            <a:endParaRPr/>
           </a:p>
         </p:txBody>
       </p:sp>
@@ -12560,7 +13347,7 @@
           </a:fontRef>
         </p:style>
         <p:txBody>
-          <a:bodyPr rtlCol="0" anchor="ctr" wrap="square" lIns="45720" rIns="45720" tIns="18288" bIns="18288"/>
+          <a:bodyPr wrap="square" lIns="45720" tIns="18288" rIns="45720" bIns="18288" rtlCol="0" anchor="ctr"/>
           <a:lstStyle/>
           <a:p>
             <a:pPr algn="ctr"/>
@@ -12629,6 +13416,7 @@
           <a:lstStyle/>
           <a:p>
             <a:pPr algn="ctr"/>
+            <a:endParaRPr/>
           </a:p>
         </p:txBody>
       </p:sp>
@@ -12673,7 +13461,7 @@
           </a:fontRef>
         </p:style>
         <p:txBody>
-          <a:bodyPr rtlCol="0" anchor="ctr" wrap="square" lIns="45720" rIns="45720" tIns="18288" bIns="18288"/>
+          <a:bodyPr wrap="square" lIns="45720" tIns="18288" rIns="45720" bIns="18288" rtlCol="0" anchor="ctr"/>
           <a:lstStyle/>
           <a:p>
             <a:pPr algn="ctr"/>
@@ -12742,6 +13530,7 @@
           <a:lstStyle/>
           <a:p>
             <a:pPr algn="ctr"/>
+            <a:endParaRPr/>
           </a:p>
         </p:txBody>
       </p:sp>
@@ -12786,7 +13575,7 @@
           </a:fontRef>
         </p:style>
         <p:txBody>
-          <a:bodyPr rtlCol="0" anchor="ctr" wrap="square" lIns="45720" rIns="45720" tIns="18288" bIns="18288"/>
+          <a:bodyPr wrap="square" lIns="45720" tIns="18288" rIns="45720" bIns="18288" rtlCol="0" anchor="ctr"/>
           <a:lstStyle/>
           <a:p>
             <a:pPr algn="ctr"/>
@@ -12797,7 +13586,7 @@
                 </a:solidFill>
                 <a:latin typeface="Segoe UI"/>
               </a:rPr>
-              <a:t>Prisma / DB</a:t>
+              <a:t>Go · pgx / sqlc</a:t>
             </a:r>
           </a:p>
         </p:txBody>
@@ -12847,6 +13636,7 @@
           <a:lstStyle/>
           <a:p>
             <a:pPr algn="ctr"/>
+            <a:endParaRPr/>
           </a:p>
         </p:txBody>
       </p:sp>
@@ -12891,6 +13681,7 @@
           <a:lstStyle/>
           <a:p>
             <a:pPr algn="ctr"/>
+            <a:endParaRPr/>
           </a:p>
         </p:txBody>
       </p:sp>
@@ -12911,7 +13702,7 @@
           <a:noFill/>
         </p:spPr>
         <p:txBody>
-          <a:bodyPr wrap="square" anchor="t" lIns="0" rIns="0" tIns="0" bIns="0">
+          <a:bodyPr wrap="square" lIns="0" tIns="0" rIns="0" bIns="0" anchor="t">
             <a:spAutoFit/>
           </a:bodyPr>
           <a:lstStyle/>
@@ -12956,7 +13747,7 @@
           <a:noFill/>
         </p:spPr>
         <p:txBody>
-          <a:bodyPr wrap="square" anchor="t" lIns="0" rIns="0" tIns="0" bIns="0">
+          <a:bodyPr wrap="square" lIns="0" tIns="0" rIns="0" bIns="0" anchor="t">
             <a:spAutoFit/>
           </a:bodyPr>
           <a:lstStyle/>
@@ -13029,6 +13820,7 @@
           <a:lstStyle/>
           <a:p>
             <a:pPr algn="ctr"/>
+            <a:endParaRPr/>
           </a:p>
         </p:txBody>
       </p:sp>
@@ -13073,6 +13865,7 @@
           <a:lstStyle/>
           <a:p>
             <a:pPr algn="ctr"/>
+            <a:endParaRPr/>
           </a:p>
         </p:txBody>
       </p:sp>
@@ -13093,7 +13886,7 @@
           <a:noFill/>
         </p:spPr>
         <p:txBody>
-          <a:bodyPr wrap="square" anchor="t" lIns="0" rIns="0" tIns="0" bIns="0">
+          <a:bodyPr wrap="square" lIns="0" tIns="0" rIns="0" bIns="0" anchor="t">
             <a:spAutoFit/>
           </a:bodyPr>
           <a:lstStyle/>
@@ -13138,7 +13931,7 @@
           <a:noFill/>
         </p:spPr>
         <p:txBody>
-          <a:bodyPr wrap="square" anchor="t" lIns="0" rIns="0" tIns="0" bIns="0">
+          <a:bodyPr wrap="square" lIns="0" tIns="0" rIns="0" bIns="0" anchor="t">
             <a:spAutoFit/>
           </a:bodyPr>
           <a:lstStyle/>
@@ -13211,6 +14004,7 @@
           <a:lstStyle/>
           <a:p>
             <a:pPr algn="ctr"/>
+            <a:endParaRPr/>
           </a:p>
         </p:txBody>
       </p:sp>
@@ -13255,6 +14049,7 @@
           <a:lstStyle/>
           <a:p>
             <a:pPr algn="ctr"/>
+            <a:endParaRPr/>
           </a:p>
         </p:txBody>
       </p:sp>
@@ -13275,7 +14070,7 @@
           <a:noFill/>
         </p:spPr>
         <p:txBody>
-          <a:bodyPr wrap="square" anchor="t" lIns="0" rIns="0" tIns="0" bIns="0">
+          <a:bodyPr wrap="square" lIns="0" tIns="0" rIns="0" bIns="0" anchor="t">
             <a:spAutoFit/>
           </a:bodyPr>
           <a:lstStyle/>
@@ -13320,7 +14115,7 @@
           <a:noFill/>
         </p:spPr>
         <p:txBody>
-          <a:bodyPr wrap="square" anchor="t" lIns="0" rIns="0" tIns="0" bIns="0">
+          <a:bodyPr wrap="square" lIns="0" tIns="0" rIns="0" bIns="0" anchor="t">
             <a:spAutoFit/>
           </a:bodyPr>
           <a:lstStyle/>
@@ -13365,7 +14160,7 @@
           <a:noFill/>
         </p:spPr>
         <p:txBody>
-          <a:bodyPr wrap="square" anchor="t" lIns="0" rIns="0" tIns="0" bIns="0">
+          <a:bodyPr wrap="square" lIns="0" tIns="0" rIns="0" bIns="0" anchor="t">
             <a:spAutoFit/>
           </a:bodyPr>
           <a:lstStyle/>
@@ -13419,7 +14214,7 @@
           <a:noFill/>
         </p:spPr>
         <p:txBody>
-          <a:bodyPr wrap="square" anchor="t" lIns="0" rIns="0" tIns="0" bIns="0">
+          <a:bodyPr wrap="square" lIns="0" tIns="0" rIns="0" bIns="0" anchor="t">
             <a:spAutoFit/>
           </a:bodyPr>
           <a:lstStyle/>
@@ -13456,7 +14251,7 @@
 </file>
 
 <file path=ppt/slides/slide6.xml><?xml version="1.0" encoding="utf-8"?>
-<p:sld xmlns:a="http://schemas.openxmlformats.org/drawingml/2006/main" xmlns:p="http://schemas.openxmlformats.org/presentationml/2006/main" xmlns:r="http://schemas.openxmlformats.org/officeDocument/2006/relationships">
+<p:sld xmlns:a="http://schemas.openxmlformats.org/drawingml/2006/main" xmlns:r="http://schemas.openxmlformats.org/officeDocument/2006/relationships" xmlns:p="http://schemas.openxmlformats.org/presentationml/2006/main">
   <p:cSld>
     <p:spTree>
       <p:nvGrpSpPr>
@@ -13464,7 +14259,14 @@
         <p:cNvGrpSpPr/>
         <p:nvPr/>
       </p:nvGrpSpPr>
-      <p:grpSpPr/>
+      <p:grpSpPr>
+        <a:xfrm>
+          <a:off x="0" y="0"/>
+          <a:ext cx="0" cy="0"/>
+          <a:chOff x="0" y="0"/>
+          <a:chExt cx="0" cy="0"/>
+        </a:xfrm>
+      </p:grpSpPr>
       <p:sp>
         <p:nvSpPr>
           <p:cNvPr id="2" name="Rectangle 1"/>
@@ -13488,7 +14290,7 @@
                 <a:srgbClr val="0A0E17"/>
               </a:gs>
             </a:gsLst>
-            <a:lin scaled="0" ang="18000000"/>
+            <a:lin ang="18000000" scaled="0"/>
           </a:gradFill>
           <a:ln>
             <a:noFill/>
@@ -13514,6 +14316,7 @@
           <a:lstStyle/>
           <a:p>
             <a:pPr algn="ctr"/>
+            <a:endParaRPr/>
           </a:p>
         </p:txBody>
       </p:sp>
@@ -13560,6 +14363,7 @@
           <a:lstStyle/>
           <a:p>
             <a:pPr algn="ctr"/>
+            <a:endParaRPr/>
           </a:p>
         </p:txBody>
       </p:sp>
@@ -13606,6 +14410,7 @@
           <a:lstStyle/>
           <a:p>
             <a:pPr algn="ctr"/>
+            <a:endParaRPr/>
           </a:p>
         </p:txBody>
       </p:sp>
@@ -13626,7 +14431,7 @@
           <a:noFill/>
         </p:spPr>
         <p:txBody>
-          <a:bodyPr wrap="square" anchor="t" lIns="0" rIns="0" tIns="0" bIns="0">
+          <a:bodyPr wrap="square" lIns="0" tIns="0" rIns="0" bIns="0" anchor="t">
             <a:spAutoFit/>
           </a:bodyPr>
           <a:lstStyle/>
@@ -13671,7 +14476,7 @@
           <a:noFill/>
         </p:spPr>
         <p:txBody>
-          <a:bodyPr wrap="square" anchor="t" lIns="0" rIns="0" tIns="0" bIns="0">
+          <a:bodyPr wrap="square" lIns="0" tIns="0" rIns="0" bIns="0" anchor="t">
             <a:spAutoFit/>
           </a:bodyPr>
           <a:lstStyle/>
@@ -13744,6 +14549,7 @@
           <a:lstStyle/>
           <a:p>
             <a:pPr algn="ctr"/>
+            <a:endParaRPr/>
           </a:p>
         </p:txBody>
       </p:sp>
@@ -13821,7 +14627,7 @@
           <a:noFill/>
         </p:spPr>
         <p:txBody>
-          <a:bodyPr wrap="square" anchor="ctr" lIns="0" rIns="0" tIns="0" bIns="0">
+          <a:bodyPr wrap="square" lIns="0" tIns="0" rIns="0" bIns="0" anchor="ctr">
             <a:spAutoFit/>
           </a:bodyPr>
           <a:lstStyle/>
@@ -13866,7 +14672,7 @@
           <a:noFill/>
         </p:spPr>
         <p:txBody>
-          <a:bodyPr wrap="square" anchor="ctr" lIns="0" rIns="0" tIns="0" bIns="0">
+          <a:bodyPr wrap="square" lIns="0" tIns="0" rIns="0" bIns="0" anchor="ctr">
             <a:spAutoFit/>
           </a:bodyPr>
           <a:lstStyle/>
@@ -13939,6 +14745,7 @@
           <a:lstStyle/>
           <a:p>
             <a:pPr algn="ctr"/>
+            <a:endParaRPr/>
           </a:p>
         </p:txBody>
       </p:sp>
@@ -14016,7 +14823,7 @@
           <a:noFill/>
         </p:spPr>
         <p:txBody>
-          <a:bodyPr wrap="square" anchor="ctr" lIns="0" rIns="0" tIns="0" bIns="0">
+          <a:bodyPr wrap="square" lIns="0" tIns="0" rIns="0" bIns="0" anchor="ctr">
             <a:spAutoFit/>
           </a:bodyPr>
           <a:lstStyle/>
@@ -14061,7 +14868,7 @@
           <a:noFill/>
         </p:spPr>
         <p:txBody>
-          <a:bodyPr wrap="square" anchor="ctr" lIns="0" rIns="0" tIns="0" bIns="0">
+          <a:bodyPr wrap="square" lIns="0" tIns="0" rIns="0" bIns="0" anchor="ctr">
             <a:spAutoFit/>
           </a:bodyPr>
           <a:lstStyle/>
@@ -14134,6 +14941,7 @@
           <a:lstStyle/>
           <a:p>
             <a:pPr algn="ctr"/>
+            <a:endParaRPr/>
           </a:p>
         </p:txBody>
       </p:sp>
@@ -14211,7 +15019,7 @@
           <a:noFill/>
         </p:spPr>
         <p:txBody>
-          <a:bodyPr wrap="square" anchor="ctr" lIns="0" rIns="0" tIns="0" bIns="0">
+          <a:bodyPr wrap="square" lIns="0" tIns="0" rIns="0" bIns="0" anchor="ctr">
             <a:spAutoFit/>
           </a:bodyPr>
           <a:lstStyle/>
@@ -14256,7 +15064,7 @@
           <a:noFill/>
         </p:spPr>
         <p:txBody>
-          <a:bodyPr wrap="square" anchor="ctr" lIns="0" rIns="0" tIns="0" bIns="0">
+          <a:bodyPr wrap="square" lIns="0" tIns="0" rIns="0" bIns="0" anchor="ctr">
             <a:spAutoFit/>
           </a:bodyPr>
           <a:lstStyle/>
@@ -14329,6 +15137,7 @@
           <a:lstStyle/>
           <a:p>
             <a:pPr algn="ctr"/>
+            <a:endParaRPr/>
           </a:p>
         </p:txBody>
       </p:sp>
@@ -14406,7 +15215,7 @@
           <a:noFill/>
         </p:spPr>
         <p:txBody>
-          <a:bodyPr wrap="square" anchor="ctr" lIns="0" rIns="0" tIns="0" bIns="0">
+          <a:bodyPr wrap="square" lIns="0" tIns="0" rIns="0" bIns="0" anchor="ctr">
             <a:spAutoFit/>
           </a:bodyPr>
           <a:lstStyle/>
@@ -14451,7 +15260,7 @@
           <a:noFill/>
         </p:spPr>
         <p:txBody>
-          <a:bodyPr wrap="square" anchor="ctr" lIns="0" rIns="0" tIns="0" bIns="0">
+          <a:bodyPr wrap="square" lIns="0" tIns="0" rIns="0" bIns="0" anchor="ctr">
             <a:spAutoFit/>
           </a:bodyPr>
           <a:lstStyle/>
@@ -14524,6 +15333,7 @@
           <a:lstStyle/>
           <a:p>
             <a:pPr algn="ctr"/>
+            <a:endParaRPr/>
           </a:p>
         </p:txBody>
       </p:sp>
@@ -14601,7 +15411,7 @@
           <a:noFill/>
         </p:spPr>
         <p:txBody>
-          <a:bodyPr wrap="square" anchor="ctr" lIns="0" rIns="0" tIns="0" bIns="0">
+          <a:bodyPr wrap="square" lIns="0" tIns="0" rIns="0" bIns="0" anchor="ctr">
             <a:spAutoFit/>
           </a:bodyPr>
           <a:lstStyle/>
@@ -14646,7 +15456,7 @@
           <a:noFill/>
         </p:spPr>
         <p:txBody>
-          <a:bodyPr wrap="square" anchor="ctr" lIns="0" rIns="0" tIns="0" bIns="0">
+          <a:bodyPr wrap="square" lIns="0" tIns="0" rIns="0" bIns="0" anchor="ctr">
             <a:spAutoFit/>
           </a:bodyPr>
           <a:lstStyle/>
@@ -14719,6 +15529,7 @@
           <a:lstStyle/>
           <a:p>
             <a:pPr algn="ctr"/>
+            <a:endParaRPr/>
           </a:p>
         </p:txBody>
       </p:sp>
@@ -14796,7 +15607,7 @@
           <a:noFill/>
         </p:spPr>
         <p:txBody>
-          <a:bodyPr wrap="square" anchor="ctr" lIns="0" rIns="0" tIns="0" bIns="0">
+          <a:bodyPr wrap="square" lIns="0" tIns="0" rIns="0" bIns="0" anchor="ctr">
             <a:spAutoFit/>
           </a:bodyPr>
           <a:lstStyle/>
@@ -14841,7 +15652,7 @@
           <a:noFill/>
         </p:spPr>
         <p:txBody>
-          <a:bodyPr wrap="square" anchor="ctr" lIns="0" rIns="0" tIns="0" bIns="0">
+          <a:bodyPr wrap="square" lIns="0" tIns="0" rIns="0" bIns="0" anchor="ctr">
             <a:spAutoFit/>
           </a:bodyPr>
           <a:lstStyle/>
@@ -14914,6 +15725,7 @@
           <a:lstStyle/>
           <a:p>
             <a:pPr algn="ctr"/>
+            <a:endParaRPr/>
           </a:p>
         </p:txBody>
       </p:sp>
@@ -14991,7 +15803,7 @@
           <a:noFill/>
         </p:spPr>
         <p:txBody>
-          <a:bodyPr wrap="square" anchor="ctr" lIns="0" rIns="0" tIns="0" bIns="0">
+          <a:bodyPr wrap="square" lIns="0" tIns="0" rIns="0" bIns="0" anchor="ctr">
             <a:spAutoFit/>
           </a:bodyPr>
           <a:lstStyle/>
@@ -15036,7 +15848,7 @@
           <a:noFill/>
         </p:spPr>
         <p:txBody>
-          <a:bodyPr wrap="square" anchor="ctr" lIns="0" rIns="0" tIns="0" bIns="0">
+          <a:bodyPr wrap="square" lIns="0" tIns="0" rIns="0" bIns="0" anchor="ctr">
             <a:spAutoFit/>
           </a:bodyPr>
           <a:lstStyle/>
@@ -15109,6 +15921,7 @@
           <a:lstStyle/>
           <a:p>
             <a:pPr algn="ctr"/>
+            <a:endParaRPr/>
           </a:p>
         </p:txBody>
       </p:sp>
@@ -15153,33 +15966,10 @@
           <a:lstStyle/>
           <a:p>
             <a:pPr algn="ctr"/>
-          </a:p>
-        </p:txBody>
-      </p:sp>
-      <p:pic>
-        <p:nvPicPr>
-          <p:cNvPr id="37" name="Picture 36" descr="finance.png"/>
-          <p:cNvPicPr>
-            <a:picLocks noChangeAspect="1"/>
-          </p:cNvPicPr>
-          <p:nvPr/>
-        </p:nvPicPr>
-        <p:blipFill>
-          <a:blip r:embed="rId2"/>
-          <a:stretch>
-            <a:fillRect/>
-          </a:stretch>
-        </p:blipFill>
-        <p:spPr>
-          <a:xfrm>
-            <a:off x="8193024" y="1834511"/>
-            <a:ext cx="3502152" cy="2228857"/>
-          </a:xfrm>
-          <a:prstGeom prst="rect">
-            <a:avLst/>
-          </a:prstGeom>
-        </p:spPr>
-      </p:pic>
+            <a:endParaRPr/>
+          </a:p>
+        </p:txBody>
+      </p:sp>
       <p:sp>
         <p:nvSpPr>
           <p:cNvPr id="38" name="TextBox 37"/>
@@ -15197,7 +15987,7 @@
           <a:noFill/>
         </p:spPr>
         <p:txBody>
-          <a:bodyPr wrap="square" anchor="t" lIns="0" rIns="0" tIns="0" bIns="0">
+          <a:bodyPr wrap="square" lIns="0" tIns="0" rIns="0" bIns="0" anchor="t">
             <a:spAutoFit/>
           </a:bodyPr>
           <a:lstStyle/>
@@ -15270,6 +16060,7 @@
           <a:lstStyle/>
           <a:p>
             <a:pPr algn="ctr"/>
+            <a:endParaRPr/>
           </a:p>
         </p:txBody>
       </p:sp>
@@ -15290,7 +16081,7 @@
           <a:noFill/>
         </p:spPr>
         <p:txBody>
-          <a:bodyPr wrap="square" anchor="t" lIns="0" rIns="0" tIns="0" bIns="0">
+          <a:bodyPr wrap="square" lIns="0" tIns="0" rIns="0" bIns="0" anchor="t">
             <a:spAutoFit/>
           </a:bodyPr>
           <a:lstStyle/>
@@ -15335,7 +16126,7 @@
           <a:noFill/>
         </p:spPr>
         <p:txBody>
-          <a:bodyPr wrap="square" anchor="t" lIns="0" rIns="0" tIns="0" bIns="0">
+          <a:bodyPr wrap="square" lIns="0" tIns="0" rIns="0" bIns="0" anchor="t">
             <a:spAutoFit/>
           </a:bodyPr>
           <a:lstStyle/>
@@ -15380,7 +16171,7 @@
           <a:noFill/>
         </p:spPr>
         <p:txBody>
-          <a:bodyPr wrap="square" anchor="t" lIns="0" rIns="0" tIns="0" bIns="0">
+          <a:bodyPr wrap="square" lIns="0" tIns="0" rIns="0" bIns="0" anchor="t">
             <a:spAutoFit/>
           </a:bodyPr>
           <a:lstStyle/>
@@ -15403,7 +16194,7 @@
                 </a:solidFill>
                 <a:latin typeface="Segoe UI"/>
               </a:rPr>
-              <a:t>API tests xanh (gồm test RACE 3 người tranh 1 suất)</a:t>
+              <a:t>test xanh trên Go: 105 legacy + 13 differential Nest↔Go (gồm RACE 4 điểm bắt buộc)</a:t>
             </a:r>
           </a:p>
         </p:txBody>
@@ -15425,7 +16216,7 @@
           <a:noFill/>
         </p:spPr>
         <p:txBody>
-          <a:bodyPr wrap="square" anchor="t" lIns="0" rIns="0" tIns="0" bIns="0">
+          <a:bodyPr wrap="square" lIns="0" tIns="0" rIns="0" bIns="0" anchor="t">
             <a:spAutoFit/>
           </a:bodyPr>
           <a:lstStyle/>
@@ -15448,7 +16239,7 @@
                 </a:solidFill>
                 <a:latin typeface="Segoe UI"/>
               </a:rPr>
-              <a:t>17/17</a:t>
+              <a:t>25/25</a:t>
             </a:r>
           </a:p>
         </p:txBody>
@@ -15470,7 +16261,7 @@
           <a:noFill/>
         </p:spPr>
         <p:txBody>
-          <a:bodyPr wrap="square" anchor="t" lIns="0" rIns="0" tIns="0" bIns="0">
+          <a:bodyPr wrap="square" lIns="0" tIns="0" rIns="0" bIns="0" anchor="t">
             <a:spAutoFit/>
           </a:bodyPr>
           <a:lstStyle/>
@@ -15493,7 +16284,7 @@
                 </a:solidFill>
                 <a:latin typeface="Segoe UI"/>
               </a:rPr>
-              <a:t>E2E Playwright — login→KYC→duyệt→join→hàng chờ</a:t>
+              <a:t>E2E Playwright trên Go — toàn luồng tiền + 7 spec /portal</a:t>
             </a:r>
           </a:p>
         </p:txBody>
@@ -15515,7 +16306,7 @@
           <a:noFill/>
         </p:spPr>
         <p:txBody>
-          <a:bodyPr wrap="square" anchor="t" lIns="0" rIns="0" tIns="0" bIns="0">
+          <a:bodyPr wrap="square" lIns="0" tIns="0" rIns="0" bIns="0" anchor="t">
             <a:spAutoFit/>
           </a:bodyPr>
           <a:lstStyle/>
@@ -15569,7 +16360,7 @@
           <a:noFill/>
         </p:spPr>
         <p:txBody>
-          <a:bodyPr wrap="square" anchor="t" lIns="0" rIns="0" tIns="0" bIns="0">
+          <a:bodyPr wrap="square" lIns="0" tIns="0" rIns="0" bIns="0" anchor="t">
             <a:spAutoFit/>
           </a:bodyPr>
           <a:lstStyle/>
@@ -15597,6 +16388,30 @@
           </a:p>
         </p:txBody>
       </p:sp>
+      <p:pic>
+        <p:nvPicPr>
+          <p:cNvPr id="47" name="Picture 46" descr="shot-finance.png"/>
+          <p:cNvPicPr>
+            <a:picLocks noChangeAspect="1"/>
+          </p:cNvPicPr>
+          <p:nvPr/>
+        </p:nvPicPr>
+        <p:blipFill>
+          <a:blip r:embed="rId2"/>
+          <a:stretch>
+            <a:fillRect/>
+          </a:stretch>
+        </p:blipFill>
+        <p:spPr>
+          <a:xfrm>
+            <a:off x="8193024" y="1834511"/>
+            <a:ext cx="3502152" cy="2228857"/>
+          </a:xfrm>
+          <a:prstGeom prst="rect">
+            <a:avLst/>
+          </a:prstGeom>
+        </p:spPr>
+      </p:pic>
     </p:spTree>
   </p:cSld>
   <p:clrMapOvr>
@@ -15606,7 +16421,7 @@
 </file>
 
 <file path=ppt/slides/slide7.xml><?xml version="1.0" encoding="utf-8"?>
-<p:sld xmlns:a="http://schemas.openxmlformats.org/drawingml/2006/main" xmlns:p="http://schemas.openxmlformats.org/presentationml/2006/main" xmlns:r="http://schemas.openxmlformats.org/officeDocument/2006/relationships">
+<p:sld xmlns:a="http://schemas.openxmlformats.org/drawingml/2006/main" xmlns:r="http://schemas.openxmlformats.org/officeDocument/2006/relationships" xmlns:p="http://schemas.openxmlformats.org/presentationml/2006/main">
   <p:cSld>
     <p:spTree>
       <p:nvGrpSpPr>
@@ -15614,7 +16429,14 @@
         <p:cNvGrpSpPr/>
         <p:nvPr/>
       </p:nvGrpSpPr>
-      <p:grpSpPr/>
+      <p:grpSpPr>
+        <a:xfrm>
+          <a:off x="0" y="0"/>
+          <a:ext cx="0" cy="0"/>
+          <a:chOff x="0" y="0"/>
+          <a:chExt cx="0" cy="0"/>
+        </a:xfrm>
+      </p:grpSpPr>
       <p:sp>
         <p:nvSpPr>
           <p:cNvPr id="2" name="Rectangle 1"/>
@@ -15638,7 +16460,7 @@
                 <a:srgbClr val="0A0E17"/>
               </a:gs>
             </a:gsLst>
-            <a:lin scaled="0" ang="18000000"/>
+            <a:lin ang="18000000" scaled="0"/>
           </a:gradFill>
           <a:ln>
             <a:noFill/>
@@ -15664,6 +16486,7 @@
           <a:lstStyle/>
           <a:p>
             <a:pPr algn="ctr"/>
+            <a:endParaRPr/>
           </a:p>
         </p:txBody>
       </p:sp>
@@ -15710,6 +16533,7 @@
           <a:lstStyle/>
           <a:p>
             <a:pPr algn="ctr"/>
+            <a:endParaRPr/>
           </a:p>
         </p:txBody>
       </p:sp>
@@ -15756,6 +16580,7 @@
           <a:lstStyle/>
           <a:p>
             <a:pPr algn="ctr"/>
+            <a:endParaRPr/>
           </a:p>
         </p:txBody>
       </p:sp>
@@ -15776,7 +16601,7 @@
           <a:noFill/>
         </p:spPr>
         <p:txBody>
-          <a:bodyPr wrap="square" anchor="t" lIns="0" rIns="0" tIns="0" bIns="0">
+          <a:bodyPr wrap="square" lIns="0" tIns="0" rIns="0" bIns="0" anchor="t">
             <a:spAutoFit/>
           </a:bodyPr>
           <a:lstStyle/>
@@ -15821,7 +16646,7 @@
           <a:noFill/>
         </p:spPr>
         <p:txBody>
-          <a:bodyPr wrap="square" anchor="t" lIns="0" rIns="0" tIns="0" bIns="0">
+          <a:bodyPr wrap="square" lIns="0" tIns="0" rIns="0" bIns="0" anchor="t">
             <a:spAutoFit/>
           </a:bodyPr>
           <a:lstStyle/>
@@ -15894,6 +16719,7 @@
           <a:lstStyle/>
           <a:p>
             <a:pPr algn="ctr"/>
+            <a:endParaRPr/>
           </a:p>
         </p:txBody>
       </p:sp>
@@ -15938,33 +16764,10 @@
           <a:lstStyle/>
           <a:p>
             <a:pPr algn="ctr"/>
-          </a:p>
-        </p:txBody>
-      </p:sp>
-      <p:pic>
-        <p:nvPicPr>
-          <p:cNvPr id="9" name="Picture 8" descr="landing.png"/>
-          <p:cNvPicPr>
-            <a:picLocks noChangeAspect="1"/>
-          </p:cNvPicPr>
-          <p:nvPr/>
-        </p:nvPicPr>
-        <p:blipFill>
-          <a:blip r:embed="rId2"/>
-          <a:stretch>
-            <a:fillRect/>
-          </a:stretch>
-        </p:blipFill>
-        <p:spPr>
-          <a:xfrm>
-            <a:off x="808341" y="1426464"/>
-            <a:ext cx="3050810" cy="2496312"/>
-          </a:xfrm>
-          <a:prstGeom prst="rect">
-            <a:avLst/>
-          </a:prstGeom>
-        </p:spPr>
-      </p:pic>
+            <a:endParaRPr/>
+          </a:p>
+        </p:txBody>
+      </p:sp>
       <p:sp>
         <p:nvSpPr>
           <p:cNvPr id="10" name="TextBox 9"/>
@@ -15982,7 +16785,7 @@
           <a:noFill/>
         </p:spPr>
         <p:txBody>
-          <a:bodyPr wrap="square" anchor="t" lIns="0" rIns="0" tIns="0" bIns="0">
+          <a:bodyPr wrap="square" lIns="0" tIns="0" rIns="0" bIns="0" anchor="t">
             <a:spAutoFit/>
           </a:bodyPr>
           <a:lstStyle/>
@@ -16027,7 +16830,7 @@
           <a:noFill/>
         </p:spPr>
         <p:txBody>
-          <a:bodyPr wrap="square" anchor="t" lIns="0" rIns="0" tIns="0" bIns="0">
+          <a:bodyPr wrap="square" lIns="0" tIns="0" rIns="0" bIns="0" anchor="t">
             <a:spAutoFit/>
           </a:bodyPr>
           <a:lstStyle/>
@@ -16100,6 +16903,7 @@
           <a:lstStyle/>
           <a:p>
             <a:pPr algn="ctr"/>
+            <a:endParaRPr/>
           </a:p>
         </p:txBody>
       </p:sp>
@@ -16144,33 +16948,10 @@
           <a:lstStyle/>
           <a:p>
             <a:pPr algn="ctr"/>
-          </a:p>
-        </p:txBody>
-      </p:sp>
-      <p:pic>
-        <p:nvPicPr>
-          <p:cNvPr id="14" name="Picture 13" descr="admin-builder.png"/>
-          <p:cNvPicPr>
-            <a:picLocks noChangeAspect="1"/>
-          </p:cNvPicPr>
-          <p:nvPr/>
-        </p:nvPicPr>
-        <p:blipFill>
-          <a:blip r:embed="rId3"/>
-          <a:stretch>
-            <a:fillRect/>
-          </a:stretch>
-        </p:blipFill>
-        <p:spPr>
-          <a:xfrm>
-            <a:off x="4384029" y="1554952"/>
-            <a:ext cx="3423909" cy="2239334"/>
-          </a:xfrm>
-          <a:prstGeom prst="rect">
-            <a:avLst/>
-          </a:prstGeom>
-        </p:spPr>
-      </p:pic>
+            <a:endParaRPr/>
+          </a:p>
+        </p:txBody>
+      </p:sp>
       <p:sp>
         <p:nvSpPr>
           <p:cNvPr id="15" name="TextBox 14"/>
@@ -16188,7 +16969,7 @@
           <a:noFill/>
         </p:spPr>
         <p:txBody>
-          <a:bodyPr wrap="square" anchor="t" lIns="0" rIns="0" tIns="0" bIns="0">
+          <a:bodyPr wrap="square" lIns="0" tIns="0" rIns="0" bIns="0" anchor="t">
             <a:spAutoFit/>
           </a:bodyPr>
           <a:lstStyle/>
@@ -16233,7 +17014,7 @@
           <a:noFill/>
         </p:spPr>
         <p:txBody>
-          <a:bodyPr wrap="square" anchor="t" lIns="0" rIns="0" tIns="0" bIns="0">
+          <a:bodyPr wrap="square" lIns="0" tIns="0" rIns="0" bIns="0" anchor="t">
             <a:spAutoFit/>
           </a:bodyPr>
           <a:lstStyle/>
@@ -16306,6 +17087,7 @@
           <a:lstStyle/>
           <a:p>
             <a:pPr algn="ctr"/>
+            <a:endParaRPr/>
           </a:p>
         </p:txBody>
       </p:sp>
@@ -16350,33 +17132,10 @@
           <a:lstStyle/>
           <a:p>
             <a:pPr algn="ctr"/>
-          </a:p>
-        </p:txBody>
-      </p:sp>
-      <p:pic>
-        <p:nvPicPr>
-          <p:cNvPr id="19" name="Picture 18" descr="global.png"/>
-          <p:cNvPicPr>
-            <a:picLocks noChangeAspect="1"/>
-          </p:cNvPicPr>
-          <p:nvPr/>
-        </p:nvPicPr>
-        <p:blipFill>
-          <a:blip r:embed="rId4"/>
-          <a:stretch>
-            <a:fillRect/>
-          </a:stretch>
-        </p:blipFill>
-        <p:spPr>
-          <a:xfrm>
-            <a:off x="8146267" y="1585088"/>
-            <a:ext cx="3423909" cy="2179062"/>
-          </a:xfrm>
-          <a:prstGeom prst="rect">
-            <a:avLst/>
-          </a:prstGeom>
-        </p:spPr>
-      </p:pic>
+            <a:endParaRPr/>
+          </a:p>
+        </p:txBody>
+      </p:sp>
       <p:sp>
         <p:nvSpPr>
           <p:cNvPr id="20" name="TextBox 19"/>
@@ -16394,7 +17153,7 @@
           <a:noFill/>
         </p:spPr>
         <p:txBody>
-          <a:bodyPr wrap="square" anchor="t" lIns="0" rIns="0" tIns="0" bIns="0">
+          <a:bodyPr wrap="square" lIns="0" tIns="0" rIns="0" bIns="0" anchor="t">
             <a:spAutoFit/>
           </a:bodyPr>
           <a:lstStyle/>
@@ -16439,7 +17198,7 @@
           <a:noFill/>
         </p:spPr>
         <p:txBody>
-          <a:bodyPr wrap="square" anchor="t" lIns="0" rIns="0" tIns="0" bIns="0">
+          <a:bodyPr wrap="square" lIns="0" tIns="0" rIns="0" bIns="0" anchor="t">
             <a:spAutoFit/>
           </a:bodyPr>
           <a:lstStyle/>
@@ -16484,7 +17243,7 @@
           <a:noFill/>
         </p:spPr>
         <p:txBody>
-          <a:bodyPr wrap="square" anchor="t" lIns="0" rIns="0" tIns="0" bIns="0">
+          <a:bodyPr wrap="square" lIns="0" tIns="0" rIns="0" bIns="0" anchor="t">
             <a:spAutoFit/>
           </a:bodyPr>
           <a:lstStyle/>
@@ -16529,7 +17288,7 @@
           <a:noFill/>
         </p:spPr>
         <p:txBody>
-          <a:bodyPr wrap="square" anchor="ctr" lIns="0" rIns="0" tIns="0" bIns="0">
+          <a:bodyPr wrap="square" lIns="0" tIns="0" rIns="0" bIns="0" anchor="ctr">
             <a:spAutoFit/>
           </a:bodyPr>
           <a:lstStyle/>
@@ -16602,6 +17361,7 @@
           <a:lstStyle/>
           <a:p>
             <a:pPr algn="ctr"/>
+            <a:endParaRPr/>
           </a:p>
         </p:txBody>
       </p:sp>
@@ -16648,6 +17408,7 @@
           <a:lstStyle/>
           <a:p>
             <a:pPr algn="ctr"/>
+            <a:endParaRPr/>
           </a:p>
         </p:txBody>
       </p:sp>
@@ -16668,7 +17429,7 @@
           <a:noFill/>
         </p:spPr>
         <p:txBody>
-          <a:bodyPr wrap="square" anchor="ctr" lIns="0" rIns="0" tIns="0" bIns="0">
+          <a:bodyPr wrap="square" lIns="0" tIns="0" rIns="0" bIns="0" anchor="ctr">
             <a:spAutoFit/>
           </a:bodyPr>
           <a:lstStyle/>
@@ -16713,7 +17474,7 @@
           <a:noFill/>
         </p:spPr>
         <p:txBody>
-          <a:bodyPr wrap="square" anchor="ctr" lIns="0" rIns="0" tIns="0" bIns="0">
+          <a:bodyPr wrap="square" lIns="0" tIns="0" rIns="0" bIns="0" anchor="ctr">
             <a:spAutoFit/>
           </a:bodyPr>
           <a:lstStyle/>
@@ -16786,6 +17547,7 @@
           <a:lstStyle/>
           <a:p>
             <a:pPr algn="ctr"/>
+            <a:endParaRPr/>
           </a:p>
         </p:txBody>
       </p:sp>
@@ -16832,6 +17594,7 @@
           <a:lstStyle/>
           <a:p>
             <a:pPr algn="ctr"/>
+            <a:endParaRPr/>
           </a:p>
         </p:txBody>
       </p:sp>
@@ -16852,7 +17615,7 @@
           <a:noFill/>
         </p:spPr>
         <p:txBody>
-          <a:bodyPr wrap="square" anchor="ctr" lIns="0" rIns="0" tIns="0" bIns="0">
+          <a:bodyPr wrap="square" lIns="0" tIns="0" rIns="0" bIns="0" anchor="ctr">
             <a:spAutoFit/>
           </a:bodyPr>
           <a:lstStyle/>
@@ -16897,7 +17660,7 @@
           <a:noFill/>
         </p:spPr>
         <p:txBody>
-          <a:bodyPr wrap="square" anchor="ctr" lIns="0" rIns="0" tIns="0" bIns="0">
+          <a:bodyPr wrap="square" lIns="0" tIns="0" rIns="0" bIns="0" anchor="ctr">
             <a:spAutoFit/>
           </a:bodyPr>
           <a:lstStyle/>
@@ -16970,6 +17733,7 @@
           <a:lstStyle/>
           <a:p>
             <a:pPr algn="ctr"/>
+            <a:endParaRPr/>
           </a:p>
         </p:txBody>
       </p:sp>
@@ -17016,6 +17780,7 @@
           <a:lstStyle/>
           <a:p>
             <a:pPr algn="ctr"/>
+            <a:endParaRPr/>
           </a:p>
         </p:txBody>
       </p:sp>
@@ -17036,7 +17801,7 @@
           <a:noFill/>
         </p:spPr>
         <p:txBody>
-          <a:bodyPr wrap="square" anchor="ctr" lIns="0" rIns="0" tIns="0" bIns="0">
+          <a:bodyPr wrap="square" lIns="0" tIns="0" rIns="0" bIns="0" anchor="ctr">
             <a:spAutoFit/>
           </a:bodyPr>
           <a:lstStyle/>
@@ -17081,7 +17846,7 @@
           <a:noFill/>
         </p:spPr>
         <p:txBody>
-          <a:bodyPr wrap="square" anchor="ctr" lIns="0" rIns="0" tIns="0" bIns="0">
+          <a:bodyPr wrap="square" lIns="0" tIns="0" rIns="0" bIns="0" anchor="ctr">
             <a:spAutoFit/>
           </a:bodyPr>
           <a:lstStyle/>
@@ -17154,6 +17919,7 @@
           <a:lstStyle/>
           <a:p>
             <a:pPr algn="ctr"/>
+            <a:endParaRPr/>
           </a:p>
         </p:txBody>
       </p:sp>
@@ -17200,6 +17966,7 @@
           <a:lstStyle/>
           <a:p>
             <a:pPr algn="ctr"/>
+            <a:endParaRPr/>
           </a:p>
         </p:txBody>
       </p:sp>
@@ -17220,7 +17987,7 @@
           <a:noFill/>
         </p:spPr>
         <p:txBody>
-          <a:bodyPr wrap="square" anchor="ctr" lIns="0" rIns="0" tIns="0" bIns="0">
+          <a:bodyPr wrap="square" lIns="0" tIns="0" rIns="0" bIns="0" anchor="ctr">
             <a:spAutoFit/>
           </a:bodyPr>
           <a:lstStyle/>
@@ -17265,7 +18032,7 @@
           <a:noFill/>
         </p:spPr>
         <p:txBody>
-          <a:bodyPr wrap="square" anchor="ctr" lIns="0" rIns="0" tIns="0" bIns="0">
+          <a:bodyPr wrap="square" lIns="0" tIns="0" rIns="0" bIns="0" anchor="ctr">
             <a:spAutoFit/>
           </a:bodyPr>
           <a:lstStyle/>
@@ -17338,6 +18105,7 @@
           <a:lstStyle/>
           <a:p>
             <a:pPr algn="ctr"/>
+            <a:endParaRPr/>
           </a:p>
         </p:txBody>
       </p:sp>
@@ -17384,6 +18152,7 @@
           <a:lstStyle/>
           <a:p>
             <a:pPr algn="ctr"/>
+            <a:endParaRPr/>
           </a:p>
         </p:txBody>
       </p:sp>
@@ -17404,7 +18173,7 @@
           <a:noFill/>
         </p:spPr>
         <p:txBody>
-          <a:bodyPr wrap="square" anchor="ctr" lIns="0" rIns="0" tIns="0" bIns="0">
+          <a:bodyPr wrap="square" lIns="0" tIns="0" rIns="0" bIns="0" anchor="ctr">
             <a:spAutoFit/>
           </a:bodyPr>
           <a:lstStyle/>
@@ -17477,6 +18246,7 @@
           <a:lstStyle/>
           <a:p>
             <a:pPr algn="ctr"/>
+            <a:endParaRPr/>
           </a:p>
         </p:txBody>
       </p:sp>
@@ -17521,6 +18291,7 @@
           <a:lstStyle/>
           <a:p>
             <a:pPr algn="ctr"/>
+            <a:endParaRPr/>
           </a:p>
         </p:txBody>
       </p:sp>
@@ -17541,7 +18312,7 @@
           <a:noFill/>
         </p:spPr>
         <p:txBody>
-          <a:bodyPr wrap="square" anchor="t" lIns="0" rIns="0" tIns="0" bIns="0">
+          <a:bodyPr wrap="square" lIns="0" tIns="0" rIns="0" bIns="0" anchor="t">
             <a:spAutoFit/>
           </a:bodyPr>
           <a:lstStyle/>
@@ -17586,7 +18357,7 @@
           <a:noFill/>
         </p:spPr>
         <p:txBody>
-          <a:bodyPr wrap="square" anchor="t" lIns="0" rIns="0" tIns="0" bIns="0">
+          <a:bodyPr wrap="square" lIns="0" tIns="0" rIns="0" bIns="0" anchor="t">
             <a:spAutoFit/>
           </a:bodyPr>
           <a:lstStyle/>
@@ -17659,6 +18430,7 @@
           <a:lstStyle/>
           <a:p>
             <a:pPr algn="ctr"/>
+            <a:endParaRPr/>
           </a:p>
         </p:txBody>
       </p:sp>
@@ -17703,6 +18475,7 @@
           <a:lstStyle/>
           <a:p>
             <a:pPr algn="ctr"/>
+            <a:endParaRPr/>
           </a:p>
         </p:txBody>
       </p:sp>
@@ -17723,7 +18496,7 @@
           <a:noFill/>
         </p:spPr>
         <p:txBody>
-          <a:bodyPr wrap="square" anchor="t" lIns="0" rIns="0" tIns="0" bIns="0">
+          <a:bodyPr wrap="square" lIns="0" tIns="0" rIns="0" bIns="0" anchor="t">
             <a:spAutoFit/>
           </a:bodyPr>
           <a:lstStyle/>
@@ -17746,7 +18519,7 @@
                 </a:solidFill>
                 <a:latin typeface="Segoe UI"/>
               </a:rPr>
-              <a:t>17/17</a:t>
+              <a:t>25/25</a:t>
             </a:r>
           </a:p>
         </p:txBody>
@@ -17768,7 +18541,7 @@
           <a:noFill/>
         </p:spPr>
         <p:txBody>
-          <a:bodyPr wrap="square" anchor="t" lIns="0" rIns="0" tIns="0" bIns="0">
+          <a:bodyPr wrap="square" lIns="0" tIns="0" rIns="0" bIns="0" anchor="t">
             <a:spAutoFit/>
           </a:bodyPr>
           <a:lstStyle/>
@@ -17841,6 +18614,7 @@
           <a:lstStyle/>
           <a:p>
             <a:pPr algn="ctr"/>
+            <a:endParaRPr/>
           </a:p>
         </p:txBody>
       </p:sp>
@@ -17885,6 +18659,7 @@
           <a:lstStyle/>
           <a:p>
             <a:pPr algn="ctr"/>
+            <a:endParaRPr/>
           </a:p>
         </p:txBody>
       </p:sp>
@@ -17905,7 +18680,7 @@
           <a:noFill/>
         </p:spPr>
         <p:txBody>
-          <a:bodyPr wrap="square" anchor="t" lIns="0" rIns="0" tIns="0" bIns="0">
+          <a:bodyPr wrap="square" lIns="0" tIns="0" rIns="0" bIns="0" anchor="t">
             <a:spAutoFit/>
           </a:bodyPr>
           <a:lstStyle/>
@@ -17950,7 +18725,7 @@
           <a:noFill/>
         </p:spPr>
         <p:txBody>
-          <a:bodyPr wrap="square" anchor="t" lIns="0" rIns="0" tIns="0" bIns="0">
+          <a:bodyPr wrap="square" lIns="0" tIns="0" rIns="0" bIns="0" anchor="t">
             <a:spAutoFit/>
           </a:bodyPr>
           <a:lstStyle/>
@@ -18023,6 +18798,7 @@
           <a:lstStyle/>
           <a:p>
             <a:pPr algn="ctr"/>
+            <a:endParaRPr/>
           </a:p>
         </p:txBody>
       </p:sp>
@@ -18067,6 +18843,7 @@
           <a:lstStyle/>
           <a:p>
             <a:pPr algn="ctr"/>
+            <a:endParaRPr/>
           </a:p>
         </p:txBody>
       </p:sp>
@@ -18087,7 +18864,7 @@
           <a:noFill/>
         </p:spPr>
         <p:txBody>
-          <a:bodyPr wrap="square" anchor="t" lIns="0" rIns="0" tIns="0" bIns="0">
+          <a:bodyPr wrap="square" lIns="0" tIns="0" rIns="0" bIns="0" anchor="t">
             <a:spAutoFit/>
           </a:bodyPr>
           <a:lstStyle/>
@@ -18132,7 +18909,7 @@
           <a:noFill/>
         </p:spPr>
         <p:txBody>
-          <a:bodyPr wrap="square" anchor="t" lIns="0" rIns="0" tIns="0" bIns="0">
+          <a:bodyPr wrap="square" lIns="0" tIns="0" rIns="0" bIns="0" anchor="t">
             <a:spAutoFit/>
           </a:bodyPr>
           <a:lstStyle/>
@@ -18177,7 +18954,7 @@
           <a:noFill/>
         </p:spPr>
         <p:txBody>
-          <a:bodyPr wrap="square" anchor="t" lIns="0" rIns="0" tIns="0" bIns="0">
+          <a:bodyPr wrap="square" lIns="0" tIns="0" rIns="0" bIns="0" anchor="t">
             <a:spAutoFit/>
           </a:bodyPr>
           <a:lstStyle/>
@@ -18231,7 +19008,7 @@
           <a:noFill/>
         </p:spPr>
         <p:txBody>
-          <a:bodyPr wrap="square" anchor="t" lIns="0" rIns="0" tIns="0" bIns="0">
+          <a:bodyPr wrap="square" lIns="0" tIns="0" rIns="0" bIns="0" anchor="t">
             <a:spAutoFit/>
           </a:bodyPr>
           <a:lstStyle/>
@@ -18259,6 +19036,78 @@
           </a:p>
         </p:txBody>
       </p:sp>
+      <p:pic>
+        <p:nvPicPr>
+          <p:cNvPr id="61" name="Picture 60" descr="shot-landing.png"/>
+          <p:cNvPicPr>
+            <a:picLocks noChangeAspect="1"/>
+          </p:cNvPicPr>
+          <p:nvPr/>
+        </p:nvPicPr>
+        <p:blipFill>
+          <a:blip r:embed="rId2"/>
+          <a:stretch>
+            <a:fillRect/>
+          </a:stretch>
+        </p:blipFill>
+        <p:spPr>
+          <a:xfrm>
+            <a:off x="808341" y="1426464"/>
+            <a:ext cx="3050810" cy="2496312"/>
+          </a:xfrm>
+          <a:prstGeom prst="rect">
+            <a:avLst/>
+          </a:prstGeom>
+        </p:spPr>
+      </p:pic>
+      <p:pic>
+        <p:nvPicPr>
+          <p:cNvPr id="62" name="Picture 61" descr="shot-admin.png"/>
+          <p:cNvPicPr>
+            <a:picLocks noChangeAspect="1"/>
+          </p:cNvPicPr>
+          <p:nvPr/>
+        </p:nvPicPr>
+        <p:blipFill>
+          <a:blip r:embed="rId3"/>
+          <a:stretch>
+            <a:fillRect/>
+          </a:stretch>
+        </p:blipFill>
+        <p:spPr>
+          <a:xfrm>
+            <a:off x="4384029" y="1554952"/>
+            <a:ext cx="3423909" cy="2239334"/>
+          </a:xfrm>
+          <a:prstGeom prst="rect">
+            <a:avLst/>
+          </a:prstGeom>
+        </p:spPr>
+      </p:pic>
+      <p:pic>
+        <p:nvPicPr>
+          <p:cNvPr id="63" name="Picture 62" descr="shot-global.png"/>
+          <p:cNvPicPr>
+            <a:picLocks noChangeAspect="1"/>
+          </p:cNvPicPr>
+          <p:nvPr/>
+        </p:nvPicPr>
+        <p:blipFill>
+          <a:blip r:embed="rId4"/>
+          <a:stretch>
+            <a:fillRect/>
+          </a:stretch>
+        </p:blipFill>
+        <p:spPr>
+          <a:xfrm>
+            <a:off x="8146267" y="1585088"/>
+            <a:ext cx="3423909" cy="2179062"/>
+          </a:xfrm>
+          <a:prstGeom prst="rect">
+            <a:avLst/>
+          </a:prstGeom>
+        </p:spPr>
+      </p:pic>
     </p:spTree>
   </p:cSld>
   <p:clrMapOvr>
@@ -18268,7 +19117,7 @@
 </file>
 
 <file path=ppt/slides/slide8.xml><?xml version="1.0" encoding="utf-8"?>
-<p:sld xmlns:a="http://schemas.openxmlformats.org/drawingml/2006/main" xmlns:p="http://schemas.openxmlformats.org/presentationml/2006/main" xmlns:r="http://schemas.openxmlformats.org/officeDocument/2006/relationships">
+<p:sld xmlns:a="http://schemas.openxmlformats.org/drawingml/2006/main" xmlns:r="http://schemas.openxmlformats.org/officeDocument/2006/relationships" xmlns:p="http://schemas.openxmlformats.org/presentationml/2006/main">
   <p:cSld>
     <p:spTree>
       <p:nvGrpSpPr>
@@ -18276,7 +19125,14 @@
         <p:cNvGrpSpPr/>
         <p:nvPr/>
       </p:nvGrpSpPr>
-      <p:grpSpPr/>
+      <p:grpSpPr>
+        <a:xfrm>
+          <a:off x="0" y="0"/>
+          <a:ext cx="0" cy="0"/>
+          <a:chOff x="0" y="0"/>
+          <a:chExt cx="0" cy="0"/>
+        </a:xfrm>
+      </p:grpSpPr>
       <p:sp>
         <p:nvSpPr>
           <p:cNvPr id="2" name="Rectangle 1"/>
@@ -18300,7 +19156,7 @@
                 <a:srgbClr val="0A0E17"/>
               </a:gs>
             </a:gsLst>
-            <a:lin scaled="0" ang="18000000"/>
+            <a:lin ang="18000000" scaled="0"/>
           </a:gradFill>
           <a:ln>
             <a:noFill/>
@@ -18326,6 +19182,7 @@
           <a:lstStyle/>
           <a:p>
             <a:pPr algn="ctr"/>
+            <a:endParaRPr/>
           </a:p>
         </p:txBody>
       </p:sp>
@@ -18372,6 +19229,7 @@
           <a:lstStyle/>
           <a:p>
             <a:pPr algn="ctr"/>
+            <a:endParaRPr/>
           </a:p>
         </p:txBody>
       </p:sp>
@@ -18418,6 +19276,7 @@
           <a:lstStyle/>
           <a:p>
             <a:pPr algn="ctr"/>
+            <a:endParaRPr/>
           </a:p>
         </p:txBody>
       </p:sp>
@@ -18438,7 +19297,7 @@
           <a:noFill/>
         </p:spPr>
         <p:txBody>
-          <a:bodyPr wrap="square" anchor="t" lIns="0" rIns="0" tIns="0" bIns="0">
+          <a:bodyPr wrap="square" lIns="0" tIns="0" rIns="0" bIns="0" anchor="t">
             <a:spAutoFit/>
           </a:bodyPr>
           <a:lstStyle/>
@@ -18475,7 +19334,7 @@
         <p:spPr>
           <a:xfrm>
             <a:off x="566928" y="749808"/>
-            <a:ext cx="11064240" cy="822960"/>
+            <a:ext cx="11064240" cy="400110"/>
           </a:xfrm>
           <a:prstGeom prst="rect">
             <a:avLst/>
@@ -18483,7 +19342,7 @@
           <a:noFill/>
         </p:spPr>
         <p:txBody>
-          <a:bodyPr wrap="square" anchor="t" lIns="0" rIns="0" tIns="0" bIns="0">
+          <a:bodyPr wrap="square" lIns="0" tIns="0" rIns="0" bIns="0" anchor="t">
             <a:spAutoFit/>
           </a:bodyPr>
           <a:lstStyle/>
@@ -18500,13 +19359,58 @@
               </a:spcAft>
             </a:pPr>
             <a:r>
-              <a:rPr sz="2600" b="1" i="0">
+              <a:rPr sz="2600" b="1" i="0" dirty="0" err="1">
                 <a:solidFill>
                   <a:srgbClr val="EDF1F8"/>
                 </a:solidFill>
                 <a:latin typeface="Segoe UI"/>
               </a:rPr>
-              <a:t>Có cover hết affiliate chưa? — Trung thực: sâu chỗ đúng, cắt có lý do</a:t>
+              <a:t>Có</a:t>
+            </a:r>
+            <a:r>
+              <a:rPr sz="2600" b="1" i="0" dirty="0">
+                <a:solidFill>
+                  <a:srgbClr val="EDF1F8"/>
+                </a:solidFill>
+                <a:latin typeface="Segoe UI"/>
+              </a:rPr>
+              <a:t> cover </a:t>
+            </a:r>
+            <a:r>
+              <a:rPr sz="2600" b="1" i="0" dirty="0" err="1">
+                <a:solidFill>
+                  <a:srgbClr val="EDF1F8"/>
+                </a:solidFill>
+                <a:latin typeface="Segoe UI"/>
+              </a:rPr>
+              <a:t>hết</a:t>
+            </a:r>
+            <a:r>
+              <a:rPr sz="2600" b="1" i="0" dirty="0">
+                <a:solidFill>
+                  <a:srgbClr val="EDF1F8"/>
+                </a:solidFill>
+                <a:latin typeface="Segoe UI"/>
+              </a:rPr>
+              <a:t> affiliate </a:t>
+            </a:r>
+            <a:r>
+              <a:rPr sz="2600" b="1" i="0" dirty="0" err="1">
+                <a:solidFill>
+                  <a:srgbClr val="EDF1F8"/>
+                </a:solidFill>
+                <a:latin typeface="Segoe UI"/>
+              </a:rPr>
+              <a:t>chưa</a:t>
+            </a:r>
+            <a:r>
+              <a:rPr sz="2600" b="1" i="0" dirty="0">
+                <a:solidFill>
+                  <a:srgbClr val="EDF1F8"/>
+                </a:solidFill>
+                <a:latin typeface="Segoe UI"/>
+              </a:rPr>
+              <a:t>? </a:t>
             </a:r>
           </a:p>
         </p:txBody>
@@ -18528,7 +19432,7 @@
           <a:noFill/>
         </p:spPr>
         <p:txBody>
-          <a:bodyPr wrap="square" anchor="t" lIns="0" rIns="0" tIns="0" bIns="0">
+          <a:bodyPr wrap="square" lIns="0" tIns="0" rIns="0" bIns="0" anchor="t">
             <a:spAutoFit/>
           </a:bodyPr>
           <a:lstStyle/>
@@ -18545,31 +19449,427 @@
               </a:spcAft>
             </a:pPr>
             <a:r>
-              <a:rPr sz="1150" b="0" i="0">
+              <a:rPr sz="1150" b="0" i="0" dirty="0" err="1">
                 <a:solidFill>
                   <a:srgbClr val="93A1B8"/>
                 </a:solidFill>
                 <a:latin typeface="Segoe UI"/>
               </a:rPr>
-              <a:t>Không hứa làm hết. Nguyên tắc cắt: </a:t>
-            </a:r>
-            <a:r>
-              <a:rPr sz="1150" b="1" i="0">
+              <a:t>Không</a:t>
+            </a:r>
+            <a:r>
+              <a:rPr sz="1150" b="0" i="0" dirty="0">
+                <a:solidFill>
+                  <a:srgbClr val="93A1B8"/>
+                </a:solidFill>
+                <a:latin typeface="Segoe UI"/>
+              </a:rPr>
+              <a:t> </a:t>
+            </a:r>
+            <a:r>
+              <a:rPr sz="1150" b="0" i="0" dirty="0" err="1">
+                <a:solidFill>
+                  <a:srgbClr val="93A1B8"/>
+                </a:solidFill>
+                <a:latin typeface="Segoe UI"/>
+              </a:rPr>
+              <a:t>hứa</a:t>
+            </a:r>
+            <a:r>
+              <a:rPr sz="1150" b="0" i="0" dirty="0">
+                <a:solidFill>
+                  <a:srgbClr val="93A1B8"/>
+                </a:solidFill>
+                <a:latin typeface="Segoe UI"/>
+              </a:rPr>
+              <a:t> </a:t>
+            </a:r>
+            <a:r>
+              <a:rPr sz="1150" b="0" i="0" dirty="0" err="1">
+                <a:solidFill>
+                  <a:srgbClr val="93A1B8"/>
+                </a:solidFill>
+                <a:latin typeface="Segoe UI"/>
+              </a:rPr>
+              <a:t>làm</a:t>
+            </a:r>
+            <a:r>
+              <a:rPr sz="1150" b="0" i="0" dirty="0">
+                <a:solidFill>
+                  <a:srgbClr val="93A1B8"/>
+                </a:solidFill>
+                <a:latin typeface="Segoe UI"/>
+              </a:rPr>
+              <a:t> </a:t>
+            </a:r>
+            <a:r>
+              <a:rPr sz="1150" b="0" i="0" dirty="0" err="1">
+                <a:solidFill>
+                  <a:srgbClr val="93A1B8"/>
+                </a:solidFill>
+                <a:latin typeface="Segoe UI"/>
+              </a:rPr>
+              <a:t>hết</a:t>
+            </a:r>
+            <a:r>
+              <a:rPr sz="1150" b="0" i="0" dirty="0">
+                <a:solidFill>
+                  <a:srgbClr val="93A1B8"/>
+                </a:solidFill>
+                <a:latin typeface="Segoe UI"/>
+              </a:rPr>
+              <a:t>. Nguyên </a:t>
+            </a:r>
+            <a:r>
+              <a:rPr sz="1150" b="0" i="0" dirty="0" err="1">
+                <a:solidFill>
+                  <a:srgbClr val="93A1B8"/>
+                </a:solidFill>
+                <a:latin typeface="Segoe UI"/>
+              </a:rPr>
+              <a:t>tắc</a:t>
+            </a:r>
+            <a:r>
+              <a:rPr sz="1150" b="0" i="0" dirty="0">
+                <a:solidFill>
+                  <a:srgbClr val="93A1B8"/>
+                </a:solidFill>
+                <a:latin typeface="Segoe UI"/>
+              </a:rPr>
+              <a:t> </a:t>
+            </a:r>
+            <a:r>
+              <a:rPr sz="1150" b="0" i="0" dirty="0" err="1">
+                <a:solidFill>
+                  <a:srgbClr val="93A1B8"/>
+                </a:solidFill>
+                <a:latin typeface="Segoe UI"/>
+              </a:rPr>
+              <a:t>cắt</a:t>
+            </a:r>
+            <a:r>
+              <a:rPr sz="1150" b="0" i="0" dirty="0">
+                <a:solidFill>
+                  <a:srgbClr val="93A1B8"/>
+                </a:solidFill>
+                <a:latin typeface="Segoe UI"/>
+              </a:rPr>
+              <a:t>: </a:t>
+            </a:r>
+            <a:r>
+              <a:rPr sz="1150" b="1" i="0" dirty="0" err="1">
                 <a:solidFill>
                   <a:srgbClr val="EDF1F8"/>
                 </a:solidFill>
                 <a:latin typeface="Segoe UI"/>
               </a:rPr>
-              <a:t>không bao giờ cắt cách ly nước · tính đúng của tiền · audit</a:t>
-            </a:r>
-            <a:r>
-              <a:rPr sz="1150" b="0" i="0">
+              <a:t>không</a:t>
+            </a:r>
+            <a:r>
+              <a:rPr sz="1150" b="1" i="0" dirty="0">
+                <a:solidFill>
+                  <a:srgbClr val="EDF1F8"/>
+                </a:solidFill>
+                <a:latin typeface="Segoe UI"/>
+              </a:rPr>
+              <a:t> bao </a:t>
+            </a:r>
+            <a:r>
+              <a:rPr sz="1150" b="1" i="0" dirty="0" err="1">
+                <a:solidFill>
+                  <a:srgbClr val="EDF1F8"/>
+                </a:solidFill>
+                <a:latin typeface="Segoe UI"/>
+              </a:rPr>
+              <a:t>giờ</a:t>
+            </a:r>
+            <a:r>
+              <a:rPr sz="1150" b="1" i="0" dirty="0">
+                <a:solidFill>
+                  <a:srgbClr val="EDF1F8"/>
+                </a:solidFill>
+                <a:latin typeface="Segoe UI"/>
+              </a:rPr>
+              <a:t> </a:t>
+            </a:r>
+            <a:r>
+              <a:rPr sz="1150" b="1" i="0" dirty="0" err="1">
+                <a:solidFill>
+                  <a:srgbClr val="EDF1F8"/>
+                </a:solidFill>
+                <a:latin typeface="Segoe UI"/>
+              </a:rPr>
+              <a:t>cắt</a:t>
+            </a:r>
+            <a:r>
+              <a:rPr sz="1150" b="1" i="0" dirty="0">
+                <a:solidFill>
+                  <a:srgbClr val="EDF1F8"/>
+                </a:solidFill>
+                <a:latin typeface="Segoe UI"/>
+              </a:rPr>
+              <a:t> </a:t>
+            </a:r>
+            <a:r>
+              <a:rPr sz="1150" b="1" i="0" dirty="0" err="1">
+                <a:solidFill>
+                  <a:srgbClr val="EDF1F8"/>
+                </a:solidFill>
+                <a:latin typeface="Segoe UI"/>
+              </a:rPr>
+              <a:t>cách</a:t>
+            </a:r>
+            <a:r>
+              <a:rPr sz="1150" b="1" i="0" dirty="0">
+                <a:solidFill>
+                  <a:srgbClr val="EDF1F8"/>
+                </a:solidFill>
+                <a:latin typeface="Segoe UI"/>
+              </a:rPr>
+              <a:t> </a:t>
+            </a:r>
+            <a:r>
+              <a:rPr sz="1150" b="1" i="0" dirty="0" err="1">
+                <a:solidFill>
+                  <a:srgbClr val="EDF1F8"/>
+                </a:solidFill>
+                <a:latin typeface="Segoe UI"/>
+              </a:rPr>
+              <a:t>ly</a:t>
+            </a:r>
+            <a:r>
+              <a:rPr sz="1150" b="1" i="0" dirty="0">
+                <a:solidFill>
+                  <a:srgbClr val="EDF1F8"/>
+                </a:solidFill>
+                <a:latin typeface="Segoe UI"/>
+              </a:rPr>
+              <a:t> </a:t>
+            </a:r>
+            <a:r>
+              <a:rPr sz="1150" b="1" i="0" dirty="0" err="1">
+                <a:solidFill>
+                  <a:srgbClr val="EDF1F8"/>
+                </a:solidFill>
+                <a:latin typeface="Segoe UI"/>
+              </a:rPr>
+              <a:t>nước</a:t>
+            </a:r>
+            <a:r>
+              <a:rPr sz="1150" b="1" i="0" dirty="0">
+                <a:solidFill>
+                  <a:srgbClr val="EDF1F8"/>
+                </a:solidFill>
+                <a:latin typeface="Segoe UI"/>
+              </a:rPr>
+              <a:t> · </a:t>
+            </a:r>
+            <a:r>
+              <a:rPr sz="1150" b="1" i="0" dirty="0" err="1">
+                <a:solidFill>
+                  <a:srgbClr val="EDF1F8"/>
+                </a:solidFill>
+                <a:latin typeface="Segoe UI"/>
+              </a:rPr>
+              <a:t>tính</a:t>
+            </a:r>
+            <a:r>
+              <a:rPr sz="1150" b="1" i="0" dirty="0">
+                <a:solidFill>
+                  <a:srgbClr val="EDF1F8"/>
+                </a:solidFill>
+                <a:latin typeface="Segoe UI"/>
+              </a:rPr>
+              <a:t> </a:t>
+            </a:r>
+            <a:r>
+              <a:rPr sz="1150" b="1" i="0" dirty="0" err="1">
+                <a:solidFill>
+                  <a:srgbClr val="EDF1F8"/>
+                </a:solidFill>
+                <a:latin typeface="Segoe UI"/>
+              </a:rPr>
+              <a:t>đúng</a:t>
+            </a:r>
+            <a:r>
+              <a:rPr sz="1150" b="1" i="0" dirty="0">
+                <a:solidFill>
+                  <a:srgbClr val="EDF1F8"/>
+                </a:solidFill>
+                <a:latin typeface="Segoe UI"/>
+              </a:rPr>
+              <a:t> </a:t>
+            </a:r>
+            <a:r>
+              <a:rPr sz="1150" b="1" i="0" dirty="0" err="1">
+                <a:solidFill>
+                  <a:srgbClr val="EDF1F8"/>
+                </a:solidFill>
+                <a:latin typeface="Segoe UI"/>
+              </a:rPr>
+              <a:t>của</a:t>
+            </a:r>
+            <a:r>
+              <a:rPr sz="1150" b="1" i="0" dirty="0">
+                <a:solidFill>
+                  <a:srgbClr val="EDF1F8"/>
+                </a:solidFill>
+                <a:latin typeface="Segoe UI"/>
+              </a:rPr>
+              <a:t> </a:t>
+            </a:r>
+            <a:r>
+              <a:rPr sz="1150" b="1" i="0" dirty="0" err="1">
+                <a:solidFill>
+                  <a:srgbClr val="EDF1F8"/>
+                </a:solidFill>
+                <a:latin typeface="Segoe UI"/>
+              </a:rPr>
+              <a:t>tiền</a:t>
+            </a:r>
+            <a:r>
+              <a:rPr sz="1150" b="1" i="0" dirty="0">
+                <a:solidFill>
+                  <a:srgbClr val="EDF1F8"/>
+                </a:solidFill>
+                <a:latin typeface="Segoe UI"/>
+              </a:rPr>
+              <a:t> · audit</a:t>
+            </a:r>
+            <a:r>
+              <a:rPr sz="1150" b="0" i="0" dirty="0">
                 <a:solidFill>
                   <a:srgbClr val="93A1B8"/>
                 </a:solidFill>
                 <a:latin typeface="Segoe UI"/>
               </a:rPr>
-              <a:t> — chỉ cắt tính năng nice-to-have ngoài luồng tiền.</a:t>
+              <a:t> — </a:t>
+            </a:r>
+            <a:r>
+              <a:rPr sz="1150" b="0" i="0" dirty="0" err="1">
+                <a:solidFill>
+                  <a:srgbClr val="93A1B8"/>
+                </a:solidFill>
+                <a:latin typeface="Segoe UI"/>
+              </a:rPr>
+              <a:t>chỉ</a:t>
+            </a:r>
+            <a:r>
+              <a:rPr sz="1150" b="0" i="0" dirty="0">
+                <a:solidFill>
+                  <a:srgbClr val="93A1B8"/>
+                </a:solidFill>
+                <a:latin typeface="Segoe UI"/>
+              </a:rPr>
+              <a:t> </a:t>
+            </a:r>
+            <a:r>
+              <a:rPr sz="1150" b="0" i="0" dirty="0" err="1">
+                <a:solidFill>
+                  <a:srgbClr val="93A1B8"/>
+                </a:solidFill>
+                <a:latin typeface="Segoe UI"/>
+              </a:rPr>
+              <a:t>cắt</a:t>
+            </a:r>
+            <a:r>
+              <a:rPr sz="1150" b="0" i="0" dirty="0">
+                <a:solidFill>
+                  <a:srgbClr val="93A1B8"/>
+                </a:solidFill>
+                <a:latin typeface="Segoe UI"/>
+              </a:rPr>
+              <a:t> </a:t>
+            </a:r>
+            <a:r>
+              <a:rPr sz="1150" b="0" i="0" dirty="0" err="1">
+                <a:solidFill>
+                  <a:srgbClr val="93A1B8"/>
+                </a:solidFill>
+                <a:latin typeface="Segoe UI"/>
+              </a:rPr>
+              <a:t>tính</a:t>
+            </a:r>
+            <a:r>
+              <a:rPr sz="1150" b="0" i="0" dirty="0">
+                <a:solidFill>
+                  <a:srgbClr val="93A1B8"/>
+                </a:solidFill>
+                <a:latin typeface="Segoe UI"/>
+              </a:rPr>
+              <a:t> </a:t>
+            </a:r>
+            <a:r>
+              <a:rPr sz="1150" b="0" i="0" dirty="0" err="1">
+                <a:solidFill>
+                  <a:srgbClr val="93A1B8"/>
+                </a:solidFill>
+                <a:latin typeface="Segoe UI"/>
+              </a:rPr>
+              <a:t>năng</a:t>
+            </a:r>
+            <a:r>
+              <a:rPr sz="1150" b="0" i="0" dirty="0">
+                <a:solidFill>
+                  <a:srgbClr val="93A1B8"/>
+                </a:solidFill>
+                <a:latin typeface="Segoe UI"/>
+              </a:rPr>
+              <a:t> nice-to-have </a:t>
+            </a:r>
+            <a:r>
+              <a:rPr sz="1150" b="0" i="0" dirty="0" err="1">
+                <a:solidFill>
+                  <a:srgbClr val="93A1B8"/>
+                </a:solidFill>
+                <a:latin typeface="Segoe UI"/>
+              </a:rPr>
+              <a:t>ngoài</a:t>
+            </a:r>
+            <a:r>
+              <a:rPr sz="1150" b="0" i="0" dirty="0">
+                <a:solidFill>
+                  <a:srgbClr val="93A1B8"/>
+                </a:solidFill>
+                <a:latin typeface="Segoe UI"/>
+              </a:rPr>
+              <a:t> </a:t>
+            </a:r>
+            <a:r>
+              <a:rPr sz="1150" b="0" i="0" dirty="0" err="1">
+                <a:solidFill>
+                  <a:srgbClr val="93A1B8"/>
+                </a:solidFill>
+                <a:latin typeface="Segoe UI"/>
+              </a:rPr>
+              <a:t>luồng</a:t>
+            </a:r>
+            <a:r>
+              <a:rPr sz="1150" b="0" i="0" dirty="0">
+                <a:solidFill>
+                  <a:srgbClr val="93A1B8"/>
+                </a:solidFill>
+                <a:latin typeface="Segoe UI"/>
+              </a:rPr>
+              <a:t> </a:t>
+            </a:r>
+            <a:r>
+              <a:rPr sz="1150" b="0" i="0" dirty="0" err="1">
+                <a:solidFill>
+                  <a:srgbClr val="93A1B8"/>
+                </a:solidFill>
+                <a:latin typeface="Segoe UI"/>
+              </a:rPr>
+              <a:t>tiền</a:t>
+            </a:r>
+            <a:r>
+              <a:rPr sz="1150" b="0" i="0" dirty="0">
+                <a:solidFill>
+                  <a:srgbClr val="93A1B8"/>
+                </a:solidFill>
+                <a:latin typeface="Segoe UI"/>
+              </a:rPr>
+              <a:t>.</a:t>
             </a:r>
           </a:p>
         </p:txBody>
@@ -18619,6 +19919,7 @@
           <a:lstStyle/>
           <a:p>
             <a:pPr algn="ctr"/>
+            <a:endParaRPr/>
           </a:p>
         </p:txBody>
       </p:sp>
@@ -18665,6 +19966,7 @@
           <a:lstStyle/>
           <a:p>
             <a:pPr algn="ctr"/>
+            <a:endParaRPr/>
           </a:p>
         </p:txBody>
       </p:sp>
@@ -18709,6 +20011,7 @@
           <a:lstStyle/>
           <a:p>
             <a:pPr algn="ctr"/>
+            <a:endParaRPr/>
           </a:p>
         </p:txBody>
       </p:sp>
@@ -18753,6 +20056,7 @@
           <a:lstStyle/>
           <a:p>
             <a:pPr algn="ctr"/>
+            <a:endParaRPr/>
           </a:p>
         </p:txBody>
       </p:sp>
@@ -18773,7 +20077,7 @@
           <a:noFill/>
         </p:spPr>
         <p:txBody>
-          <a:bodyPr wrap="square" anchor="ctr" lIns="0" rIns="0" tIns="0" bIns="0">
+          <a:bodyPr wrap="square" lIns="0" tIns="0" rIns="0" bIns="0" anchor="ctr">
             <a:spAutoFit/>
           </a:bodyPr>
           <a:lstStyle/>
@@ -18842,6 +20146,7 @@
           <a:lstStyle/>
           <a:p>
             <a:pPr algn="ctr"/>
+            <a:endParaRPr/>
           </a:p>
         </p:txBody>
       </p:sp>
@@ -18862,7 +20167,7 @@
           <a:noFill/>
         </p:spPr>
         <p:txBody>
-          <a:bodyPr wrap="square" anchor="t" lIns="0" rIns="0" tIns="0" bIns="0">
+          <a:bodyPr wrap="square" lIns="0" tIns="0" rIns="0" bIns="0" anchor="t">
             <a:spAutoFit/>
           </a:bodyPr>
           <a:lstStyle/>
@@ -18931,6 +20236,7 @@
           <a:lstStyle/>
           <a:p>
             <a:pPr algn="ctr"/>
+            <a:endParaRPr/>
           </a:p>
         </p:txBody>
       </p:sp>
@@ -18951,7 +20257,7 @@
           <a:noFill/>
         </p:spPr>
         <p:txBody>
-          <a:bodyPr wrap="square" anchor="t" lIns="0" rIns="0" tIns="0" bIns="0">
+          <a:bodyPr wrap="square" lIns="0" tIns="0" rIns="0" bIns="0" anchor="t">
             <a:spAutoFit/>
           </a:bodyPr>
           <a:lstStyle/>
@@ -19020,6 +20326,7 @@
           <a:lstStyle/>
           <a:p>
             <a:pPr algn="ctr"/>
+            <a:endParaRPr/>
           </a:p>
         </p:txBody>
       </p:sp>
@@ -19040,7 +20347,7 @@
           <a:noFill/>
         </p:spPr>
         <p:txBody>
-          <a:bodyPr wrap="square" anchor="t" lIns="0" rIns="0" tIns="0" bIns="0">
+          <a:bodyPr wrap="square" lIns="0" tIns="0" rIns="0" bIns="0" anchor="t">
             <a:spAutoFit/>
           </a:bodyPr>
           <a:lstStyle/>
@@ -19109,6 +20416,7 @@
           <a:lstStyle/>
           <a:p>
             <a:pPr algn="ctr"/>
+            <a:endParaRPr/>
           </a:p>
         </p:txBody>
       </p:sp>
@@ -19129,7 +20437,7 @@
           <a:noFill/>
         </p:spPr>
         <p:txBody>
-          <a:bodyPr wrap="square" anchor="t" lIns="0" rIns="0" tIns="0" bIns="0">
+          <a:bodyPr wrap="square" lIns="0" tIns="0" rIns="0" bIns="0" anchor="t">
             <a:spAutoFit/>
           </a:bodyPr>
           <a:lstStyle/>
@@ -19198,6 +20506,7 @@
           <a:lstStyle/>
           <a:p>
             <a:pPr algn="ctr"/>
+            <a:endParaRPr/>
           </a:p>
         </p:txBody>
       </p:sp>
@@ -19218,7 +20527,7 @@
           <a:noFill/>
         </p:spPr>
         <p:txBody>
-          <a:bodyPr wrap="square" anchor="t" lIns="0" rIns="0" tIns="0" bIns="0">
+          <a:bodyPr wrap="square" lIns="0" tIns="0" rIns="0" bIns="0" anchor="t">
             <a:spAutoFit/>
           </a:bodyPr>
           <a:lstStyle/>
@@ -19287,6 +20596,7 @@
           <a:lstStyle/>
           <a:p>
             <a:pPr algn="ctr"/>
+            <a:endParaRPr/>
           </a:p>
         </p:txBody>
       </p:sp>
@@ -19307,7 +20617,7 @@
           <a:noFill/>
         </p:spPr>
         <p:txBody>
-          <a:bodyPr wrap="square" anchor="t" lIns="0" rIns="0" tIns="0" bIns="0">
+          <a:bodyPr wrap="square" lIns="0" tIns="0" rIns="0" bIns="0" anchor="t">
             <a:spAutoFit/>
           </a:bodyPr>
           <a:lstStyle/>
@@ -19380,6 +20690,7 @@
           <a:lstStyle/>
           <a:p>
             <a:pPr algn="ctr"/>
+            <a:endParaRPr/>
           </a:p>
         </p:txBody>
       </p:sp>
@@ -19426,6 +20737,7 @@
           <a:lstStyle/>
           <a:p>
             <a:pPr algn="ctr"/>
+            <a:endParaRPr/>
           </a:p>
         </p:txBody>
       </p:sp>
@@ -19470,6 +20782,7 @@
           <a:lstStyle/>
           <a:p>
             <a:pPr algn="ctr"/>
+            <a:endParaRPr/>
           </a:p>
         </p:txBody>
       </p:sp>
@@ -19514,6 +20827,7 @@
           <a:lstStyle/>
           <a:p>
             <a:pPr algn="ctr"/>
+            <a:endParaRPr/>
           </a:p>
         </p:txBody>
       </p:sp>
@@ -19534,7 +20848,7 @@
           <a:noFill/>
         </p:spPr>
         <p:txBody>
-          <a:bodyPr wrap="square" anchor="ctr" lIns="0" rIns="0" tIns="0" bIns="0">
+          <a:bodyPr wrap="square" lIns="0" tIns="0" rIns="0" bIns="0" anchor="ctr">
             <a:spAutoFit/>
           </a:bodyPr>
           <a:lstStyle/>
@@ -19603,6 +20917,7 @@
           <a:lstStyle/>
           <a:p>
             <a:pPr algn="ctr"/>
+            <a:endParaRPr/>
           </a:p>
         </p:txBody>
       </p:sp>
@@ -19623,7 +20938,7 @@
           <a:noFill/>
         </p:spPr>
         <p:txBody>
-          <a:bodyPr wrap="square" anchor="t" lIns="0" rIns="0" tIns="0" bIns="0">
+          <a:bodyPr wrap="square" lIns="0" tIns="0" rIns="0" bIns="0" anchor="t">
             <a:spAutoFit/>
           </a:bodyPr>
           <a:lstStyle/>
@@ -19692,6 +21007,7 @@
           <a:lstStyle/>
           <a:p>
             <a:pPr algn="ctr"/>
+            <a:endParaRPr/>
           </a:p>
         </p:txBody>
       </p:sp>
@@ -19712,7 +21028,7 @@
           <a:noFill/>
         </p:spPr>
         <p:txBody>
-          <a:bodyPr wrap="square" anchor="t" lIns="0" rIns="0" tIns="0" bIns="0">
+          <a:bodyPr wrap="square" lIns="0" tIns="0" rIns="0" bIns="0" anchor="t">
             <a:spAutoFit/>
           </a:bodyPr>
           <a:lstStyle/>
@@ -19781,6 +21097,7 @@
           <a:lstStyle/>
           <a:p>
             <a:pPr algn="ctr"/>
+            <a:endParaRPr/>
           </a:p>
         </p:txBody>
       </p:sp>
@@ -19801,7 +21118,7 @@
           <a:noFill/>
         </p:spPr>
         <p:txBody>
-          <a:bodyPr wrap="square" anchor="t" lIns="0" rIns="0" tIns="0" bIns="0">
+          <a:bodyPr wrap="square" lIns="0" tIns="0" rIns="0" bIns="0" anchor="t">
             <a:spAutoFit/>
           </a:bodyPr>
           <a:lstStyle/>
@@ -19870,6 +21187,7 @@
           <a:lstStyle/>
           <a:p>
             <a:pPr algn="ctr"/>
+            <a:endParaRPr/>
           </a:p>
         </p:txBody>
       </p:sp>
@@ -19890,7 +21208,7 @@
           <a:noFill/>
         </p:spPr>
         <p:txBody>
-          <a:bodyPr wrap="square" anchor="t" lIns="0" rIns="0" tIns="0" bIns="0">
+          <a:bodyPr wrap="square" lIns="0" tIns="0" rIns="0" bIns="0" anchor="t">
             <a:spAutoFit/>
           </a:bodyPr>
           <a:lstStyle/>
@@ -19959,6 +21277,7 @@
           <a:lstStyle/>
           <a:p>
             <a:pPr algn="ctr"/>
+            <a:endParaRPr/>
           </a:p>
         </p:txBody>
       </p:sp>
@@ -19979,7 +21298,7 @@
           <a:noFill/>
         </p:spPr>
         <p:txBody>
-          <a:bodyPr wrap="square" anchor="t" lIns="0" rIns="0" tIns="0" bIns="0">
+          <a:bodyPr wrap="square" lIns="0" tIns="0" rIns="0" bIns="0" anchor="t">
             <a:spAutoFit/>
           </a:bodyPr>
           <a:lstStyle/>
@@ -20048,6 +21367,7 @@
           <a:lstStyle/>
           <a:p>
             <a:pPr algn="ctr"/>
+            <a:endParaRPr/>
           </a:p>
         </p:txBody>
       </p:sp>
@@ -20068,7 +21388,7 @@
           <a:noFill/>
         </p:spPr>
         <p:txBody>
-          <a:bodyPr wrap="square" anchor="t" lIns="0" rIns="0" tIns="0" bIns="0">
+          <a:bodyPr wrap="square" lIns="0" tIns="0" rIns="0" bIns="0" anchor="t">
             <a:spAutoFit/>
           </a:bodyPr>
           <a:lstStyle/>
@@ -20141,6 +21461,7 @@
           <a:lstStyle/>
           <a:p>
             <a:pPr algn="ctr"/>
+            <a:endParaRPr/>
           </a:p>
         </p:txBody>
       </p:sp>
@@ -20187,6 +21508,7 @@
           <a:lstStyle/>
           <a:p>
             <a:pPr algn="ctr"/>
+            <a:endParaRPr/>
           </a:p>
         </p:txBody>
       </p:sp>
@@ -20231,6 +21553,7 @@
           <a:lstStyle/>
           <a:p>
             <a:pPr algn="ctr"/>
+            <a:endParaRPr/>
           </a:p>
         </p:txBody>
       </p:sp>
@@ -20275,6 +21598,7 @@
           <a:lstStyle/>
           <a:p>
             <a:pPr algn="ctr"/>
+            <a:endParaRPr/>
           </a:p>
         </p:txBody>
       </p:sp>
@@ -20295,7 +21619,7 @@
           <a:noFill/>
         </p:spPr>
         <p:txBody>
-          <a:bodyPr wrap="square" anchor="ctr" lIns="0" rIns="0" tIns="0" bIns="0">
+          <a:bodyPr wrap="square" lIns="0" tIns="0" rIns="0" bIns="0" anchor="ctr">
             <a:spAutoFit/>
           </a:bodyPr>
           <a:lstStyle/>
@@ -20364,6 +21688,7 @@
           <a:lstStyle/>
           <a:p>
             <a:pPr algn="ctr"/>
+            <a:endParaRPr/>
           </a:p>
         </p:txBody>
       </p:sp>
@@ -20384,7 +21709,7 @@
           <a:noFill/>
         </p:spPr>
         <p:txBody>
-          <a:bodyPr wrap="square" anchor="t" lIns="0" rIns="0" tIns="0" bIns="0">
+          <a:bodyPr wrap="square" lIns="0" tIns="0" rIns="0" bIns="0" anchor="t">
             <a:spAutoFit/>
           </a:bodyPr>
           <a:lstStyle/>
@@ -20453,6 +21778,7 @@
           <a:lstStyle/>
           <a:p>
             <a:pPr algn="ctr"/>
+            <a:endParaRPr/>
           </a:p>
         </p:txBody>
       </p:sp>
@@ -20473,7 +21799,7 @@
           <a:noFill/>
         </p:spPr>
         <p:txBody>
-          <a:bodyPr wrap="square" anchor="t" lIns="0" rIns="0" tIns="0" bIns="0">
+          <a:bodyPr wrap="square" lIns="0" tIns="0" rIns="0" bIns="0" anchor="t">
             <a:spAutoFit/>
           </a:bodyPr>
           <a:lstStyle/>
@@ -20542,6 +21868,7 @@
           <a:lstStyle/>
           <a:p>
             <a:pPr algn="ctr"/>
+            <a:endParaRPr/>
           </a:p>
         </p:txBody>
       </p:sp>
@@ -20562,7 +21889,7 @@
           <a:noFill/>
         </p:spPr>
         <p:txBody>
-          <a:bodyPr wrap="square" anchor="t" lIns="0" rIns="0" tIns="0" bIns="0">
+          <a:bodyPr wrap="square" lIns="0" tIns="0" rIns="0" bIns="0" anchor="t">
             <a:spAutoFit/>
           </a:bodyPr>
           <a:lstStyle/>
@@ -20631,6 +21958,7 @@
           <a:lstStyle/>
           <a:p>
             <a:pPr algn="ctr"/>
+            <a:endParaRPr/>
           </a:p>
         </p:txBody>
       </p:sp>
@@ -20651,7 +21979,7 @@
           <a:noFill/>
         </p:spPr>
         <p:txBody>
-          <a:bodyPr wrap="square" anchor="t" lIns="0" rIns="0" tIns="0" bIns="0">
+          <a:bodyPr wrap="square" lIns="0" tIns="0" rIns="0" bIns="0" anchor="t">
             <a:spAutoFit/>
           </a:bodyPr>
           <a:lstStyle/>
@@ -20720,6 +22048,7 @@
           <a:lstStyle/>
           <a:p>
             <a:pPr algn="ctr"/>
+            <a:endParaRPr/>
           </a:p>
         </p:txBody>
       </p:sp>
@@ -20740,7 +22069,7 @@
           <a:noFill/>
         </p:spPr>
         <p:txBody>
-          <a:bodyPr wrap="square" anchor="t" lIns="0" rIns="0" tIns="0" bIns="0">
+          <a:bodyPr wrap="square" lIns="0" tIns="0" rIns="0" bIns="0" anchor="t">
             <a:spAutoFit/>
           </a:bodyPr>
           <a:lstStyle/>
@@ -20809,6 +22138,7 @@
           <a:lstStyle/>
           <a:p>
             <a:pPr algn="ctr"/>
+            <a:endParaRPr/>
           </a:p>
         </p:txBody>
       </p:sp>
@@ -20829,7 +22159,7 @@
           <a:noFill/>
         </p:spPr>
         <p:txBody>
-          <a:bodyPr wrap="square" anchor="t" lIns="0" rIns="0" tIns="0" bIns="0">
+          <a:bodyPr wrap="square" lIns="0" tIns="0" rIns="0" bIns="0" anchor="t">
             <a:spAutoFit/>
           </a:bodyPr>
           <a:lstStyle/>
@@ -20902,6 +22232,7 @@
           <a:lstStyle/>
           <a:p>
             <a:pPr algn="ctr"/>
+            <a:endParaRPr/>
           </a:p>
         </p:txBody>
       </p:sp>
@@ -20948,6 +22279,7 @@
           <a:lstStyle/>
           <a:p>
             <a:pPr algn="ctr"/>
+            <a:endParaRPr/>
           </a:p>
         </p:txBody>
       </p:sp>
@@ -20992,6 +22324,7 @@
           <a:lstStyle/>
           <a:p>
             <a:pPr algn="ctr"/>
+            <a:endParaRPr/>
           </a:p>
         </p:txBody>
       </p:sp>
@@ -21036,6 +22369,7 @@
           <a:lstStyle/>
           <a:p>
             <a:pPr algn="ctr"/>
+            <a:endParaRPr/>
           </a:p>
         </p:txBody>
       </p:sp>
@@ -21056,7 +22390,7 @@
           <a:noFill/>
         </p:spPr>
         <p:txBody>
-          <a:bodyPr wrap="square" anchor="ctr" lIns="0" rIns="0" tIns="0" bIns="0">
+          <a:bodyPr wrap="square" lIns="0" tIns="0" rIns="0" bIns="0" anchor="ctr">
             <a:spAutoFit/>
           </a:bodyPr>
           <a:lstStyle/>
@@ -21125,6 +22459,7 @@
           <a:lstStyle/>
           <a:p>
             <a:pPr algn="ctr"/>
+            <a:endParaRPr/>
           </a:p>
         </p:txBody>
       </p:sp>
@@ -21145,7 +22480,7 @@
           <a:noFill/>
         </p:spPr>
         <p:txBody>
-          <a:bodyPr wrap="square" anchor="t" lIns="0" rIns="0" tIns="0" bIns="0">
+          <a:bodyPr wrap="square" lIns="0" tIns="0" rIns="0" bIns="0" anchor="t">
             <a:spAutoFit/>
           </a:bodyPr>
           <a:lstStyle/>
@@ -21214,6 +22549,7 @@
           <a:lstStyle/>
           <a:p>
             <a:pPr algn="ctr"/>
+            <a:endParaRPr/>
           </a:p>
         </p:txBody>
       </p:sp>
@@ -21234,7 +22570,7 @@
           <a:noFill/>
         </p:spPr>
         <p:txBody>
-          <a:bodyPr wrap="square" anchor="t" lIns="0" rIns="0" tIns="0" bIns="0">
+          <a:bodyPr wrap="square" lIns="0" tIns="0" rIns="0" bIns="0" anchor="t">
             <a:spAutoFit/>
           </a:bodyPr>
           <a:lstStyle/>
@@ -21303,6 +22639,7 @@
           <a:lstStyle/>
           <a:p>
             <a:pPr algn="ctr"/>
+            <a:endParaRPr/>
           </a:p>
         </p:txBody>
       </p:sp>
@@ -21323,7 +22660,7 @@
           <a:noFill/>
         </p:spPr>
         <p:txBody>
-          <a:bodyPr wrap="square" anchor="t" lIns="0" rIns="0" tIns="0" bIns="0">
+          <a:bodyPr wrap="square" lIns="0" tIns="0" rIns="0" bIns="0" anchor="t">
             <a:spAutoFit/>
           </a:bodyPr>
           <a:lstStyle/>
@@ -21392,6 +22729,7 @@
           <a:lstStyle/>
           <a:p>
             <a:pPr algn="ctr"/>
+            <a:endParaRPr/>
           </a:p>
         </p:txBody>
       </p:sp>
@@ -21412,7 +22750,7 @@
           <a:noFill/>
         </p:spPr>
         <p:txBody>
-          <a:bodyPr wrap="square" anchor="t" lIns="0" rIns="0" tIns="0" bIns="0">
+          <a:bodyPr wrap="square" lIns="0" tIns="0" rIns="0" bIns="0" anchor="t">
             <a:spAutoFit/>
           </a:bodyPr>
           <a:lstStyle/>
@@ -21481,6 +22819,7 @@
           <a:lstStyle/>
           <a:p>
             <a:pPr algn="ctr"/>
+            <a:endParaRPr/>
           </a:p>
         </p:txBody>
       </p:sp>
@@ -21501,7 +22840,7 @@
           <a:noFill/>
         </p:spPr>
         <p:txBody>
-          <a:bodyPr wrap="square" anchor="t" lIns="0" rIns="0" tIns="0" bIns="0">
+          <a:bodyPr wrap="square" lIns="0" tIns="0" rIns="0" bIns="0" anchor="t">
             <a:spAutoFit/>
           </a:bodyPr>
           <a:lstStyle/>
@@ -21570,6 +22909,7 @@
           <a:lstStyle/>
           <a:p>
             <a:pPr algn="ctr"/>
+            <a:endParaRPr/>
           </a:p>
         </p:txBody>
       </p:sp>
@@ -21590,7 +22930,7 @@
           <a:noFill/>
         </p:spPr>
         <p:txBody>
-          <a:bodyPr wrap="square" anchor="t" lIns="0" rIns="0" tIns="0" bIns="0">
+          <a:bodyPr wrap="square" lIns="0" tIns="0" rIns="0" bIns="0" anchor="t">
             <a:spAutoFit/>
           </a:bodyPr>
           <a:lstStyle/>
@@ -21663,6 +23003,7 @@
           <a:lstStyle/>
           <a:p>
             <a:pPr algn="ctr"/>
+            <a:endParaRPr/>
           </a:p>
         </p:txBody>
       </p:sp>
@@ -21707,6 +23048,7 @@
           <a:lstStyle/>
           <a:p>
             <a:pPr algn="ctr"/>
+            <a:endParaRPr/>
           </a:p>
         </p:txBody>
       </p:sp>
@@ -21727,7 +23069,7 @@
           <a:noFill/>
         </p:spPr>
         <p:txBody>
-          <a:bodyPr wrap="square" anchor="t" lIns="0" rIns="0" tIns="0" bIns="0">
+          <a:bodyPr wrap="square" lIns="0" tIns="0" rIns="0" bIns="0" anchor="t">
             <a:spAutoFit/>
           </a:bodyPr>
           <a:lstStyle/>
@@ -21772,7 +23114,7 @@
           <a:noFill/>
         </p:spPr>
         <p:txBody>
-          <a:bodyPr wrap="square" anchor="t" lIns="0" rIns="0" tIns="0" bIns="0">
+          <a:bodyPr wrap="square" lIns="0" tIns="0" rIns="0" bIns="0" anchor="t">
             <a:spAutoFit/>
           </a:bodyPr>
           <a:lstStyle/>
@@ -21795,7 +23137,7 @@
                 </a:solidFill>
                 <a:latin typeface="Segoe UI"/>
               </a:rPr>
-              <a:t>Luồng tiền khép kín VN+PH · 5 dashboard · cách ly + audit + test</a:t>
+              <a:t>Luồng tiền khép kín VN+PH trên backend Go · 5 dashboard · cách ly + audit + test</a:t>
             </a:r>
           </a:p>
         </p:txBody>
@@ -21841,6 +23183,7 @@
           <a:lstStyle/>
           <a:p>
             <a:pPr algn="ctr"/>
+            <a:endParaRPr/>
           </a:p>
         </p:txBody>
       </p:sp>
@@ -21889,6 +23232,7 @@
           <a:lstStyle/>
           <a:p>
             <a:pPr algn="ctr"/>
+            <a:endParaRPr/>
           </a:p>
         </p:txBody>
       </p:sp>
@@ -21933,6 +23277,7 @@
           <a:lstStyle/>
           <a:p>
             <a:pPr algn="ctr"/>
+            <a:endParaRPr/>
           </a:p>
         </p:txBody>
       </p:sp>
@@ -21953,7 +23298,7 @@
           <a:noFill/>
         </p:spPr>
         <p:txBody>
-          <a:bodyPr wrap="square" anchor="t" lIns="0" rIns="0" tIns="0" bIns="0">
+          <a:bodyPr wrap="square" lIns="0" tIns="0" rIns="0" bIns="0" anchor="t">
             <a:spAutoFit/>
           </a:bodyPr>
           <a:lstStyle/>
@@ -21998,7 +23343,7 @@
           <a:noFill/>
         </p:spPr>
         <p:txBody>
-          <a:bodyPr wrap="square" anchor="t" lIns="0" rIns="0" tIns="0" bIns="0">
+          <a:bodyPr wrap="square" lIns="0" tIns="0" rIns="0" bIns="0" anchor="t">
             <a:spAutoFit/>
           </a:bodyPr>
           <a:lstStyle/>
@@ -22067,6 +23412,7 @@
           <a:lstStyle/>
           <a:p>
             <a:pPr algn="ctr"/>
+            <a:endParaRPr/>
           </a:p>
         </p:txBody>
       </p:sp>
@@ -22115,6 +23461,7 @@
           <a:lstStyle/>
           <a:p>
             <a:pPr algn="ctr"/>
+            <a:endParaRPr/>
           </a:p>
         </p:txBody>
       </p:sp>
@@ -22159,6 +23506,7 @@
           <a:lstStyle/>
           <a:p>
             <a:pPr algn="ctr"/>
+            <a:endParaRPr/>
           </a:p>
         </p:txBody>
       </p:sp>
@@ -22179,7 +23527,7 @@
           <a:noFill/>
         </p:spPr>
         <p:txBody>
-          <a:bodyPr wrap="square" anchor="t" lIns="0" rIns="0" tIns="0" bIns="0">
+          <a:bodyPr wrap="square" lIns="0" tIns="0" rIns="0" bIns="0" anchor="t">
             <a:spAutoFit/>
           </a:bodyPr>
           <a:lstStyle/>
@@ -22224,7 +23572,7 @@
           <a:noFill/>
         </p:spPr>
         <p:txBody>
-          <a:bodyPr wrap="square" anchor="t" lIns="0" rIns="0" tIns="0" bIns="0">
+          <a:bodyPr wrap="square" lIns="0" tIns="0" rIns="0" bIns="0" anchor="t">
             <a:spAutoFit/>
           </a:bodyPr>
           <a:lstStyle/>
@@ -22261,7 +23609,7 @@
         <p:spPr>
           <a:xfrm>
             <a:off x="566928" y="6053328"/>
-            <a:ext cx="11064240" cy="365760"/>
+            <a:ext cx="11064240" cy="169277"/>
           </a:xfrm>
           <a:prstGeom prst="rect">
             <a:avLst/>
@@ -22269,7 +23617,7 @@
           <a:noFill/>
         </p:spPr>
         <p:txBody>
-          <a:bodyPr wrap="square" anchor="t" lIns="0" rIns="0" tIns="0" bIns="0">
+          <a:bodyPr wrap="square" lIns="0" tIns="0" rIns="0" bIns="0" anchor="t">
             <a:spAutoFit/>
           </a:bodyPr>
           <a:lstStyle/>
@@ -22286,23 +23634,281 @@
               </a:spcAft>
             </a:pPr>
             <a:r>
-              <a:rPr sz="1100" b="1" i="0">
+              <a:rPr sz="1100" b="1" i="0" dirty="0" err="1">
                 <a:solidFill>
                   <a:srgbClr val="EDF1F8"/>
                 </a:solidFill>
                 <a:latin typeface="Segoe UI"/>
               </a:rPr>
-              <a:t>Nền kỹ thuật chắc → mở rộng tính năng là thêm lớp, không phải viết lại. </a:t>
-            </a:r>
-            <a:r>
-              <a:rPr sz="1100" b="0" i="1">
-                <a:solidFill>
-                  <a:srgbClr val="93A1B8"/>
-                </a:solidFill>
-                <a:latin typeface="Segoe UI"/>
-              </a:rPr>
-              <a:t>Đó là điều một PM chịu trách nhiệm đầu ra cam kết.</a:t>
-            </a:r>
+              <a:t>Nền</a:t>
+            </a:r>
+            <a:r>
+              <a:rPr sz="1100" b="1" i="0" dirty="0">
+                <a:solidFill>
+                  <a:srgbClr val="EDF1F8"/>
+                </a:solidFill>
+                <a:latin typeface="Segoe UI"/>
+              </a:rPr>
+              <a:t> </a:t>
+            </a:r>
+            <a:r>
+              <a:rPr sz="1100" b="1" i="0" dirty="0" err="1">
+                <a:solidFill>
+                  <a:srgbClr val="EDF1F8"/>
+                </a:solidFill>
+                <a:latin typeface="Segoe UI"/>
+              </a:rPr>
+              <a:t>kỹ</a:t>
+            </a:r>
+            <a:r>
+              <a:rPr sz="1100" b="1" i="0" dirty="0">
+                <a:solidFill>
+                  <a:srgbClr val="EDF1F8"/>
+                </a:solidFill>
+                <a:latin typeface="Segoe UI"/>
+              </a:rPr>
+              <a:t> </a:t>
+            </a:r>
+            <a:r>
+              <a:rPr sz="1100" b="1" i="0" dirty="0" err="1">
+                <a:solidFill>
+                  <a:srgbClr val="EDF1F8"/>
+                </a:solidFill>
+                <a:latin typeface="Segoe UI"/>
+              </a:rPr>
+              <a:t>thuật</a:t>
+            </a:r>
+            <a:r>
+              <a:rPr sz="1100" b="1" i="0" dirty="0">
+                <a:solidFill>
+                  <a:srgbClr val="EDF1F8"/>
+                </a:solidFill>
+                <a:latin typeface="Segoe UI"/>
+              </a:rPr>
+              <a:t> </a:t>
+            </a:r>
+            <a:r>
+              <a:rPr sz="1100" b="1" i="0" dirty="0" err="1">
+                <a:solidFill>
+                  <a:srgbClr val="EDF1F8"/>
+                </a:solidFill>
+                <a:latin typeface="Segoe UI"/>
+              </a:rPr>
+              <a:t>chắc</a:t>
+            </a:r>
+            <a:r>
+              <a:rPr sz="1100" b="1" i="0" dirty="0">
+                <a:solidFill>
+                  <a:srgbClr val="EDF1F8"/>
+                </a:solidFill>
+                <a:latin typeface="Segoe UI"/>
+              </a:rPr>
+              <a:t> → </a:t>
+            </a:r>
+            <a:r>
+              <a:rPr sz="1100" b="1" i="0" dirty="0" err="1">
+                <a:solidFill>
+                  <a:srgbClr val="EDF1F8"/>
+                </a:solidFill>
+                <a:latin typeface="Segoe UI"/>
+              </a:rPr>
+              <a:t>mở</a:t>
+            </a:r>
+            <a:r>
+              <a:rPr sz="1100" b="1" i="0" dirty="0">
+                <a:solidFill>
+                  <a:srgbClr val="EDF1F8"/>
+                </a:solidFill>
+                <a:latin typeface="Segoe UI"/>
+              </a:rPr>
+              <a:t> </a:t>
+            </a:r>
+            <a:r>
+              <a:rPr sz="1100" b="1" i="0" dirty="0" err="1">
+                <a:solidFill>
+                  <a:srgbClr val="EDF1F8"/>
+                </a:solidFill>
+                <a:latin typeface="Segoe UI"/>
+              </a:rPr>
+              <a:t>rộng</a:t>
+            </a:r>
+            <a:r>
+              <a:rPr sz="1100" b="1" i="0" dirty="0">
+                <a:solidFill>
+                  <a:srgbClr val="EDF1F8"/>
+                </a:solidFill>
+                <a:latin typeface="Segoe UI"/>
+              </a:rPr>
+              <a:t> </a:t>
+            </a:r>
+            <a:r>
+              <a:rPr sz="1100" b="1" i="0" dirty="0" err="1">
+                <a:solidFill>
+                  <a:srgbClr val="EDF1F8"/>
+                </a:solidFill>
+                <a:latin typeface="Segoe UI"/>
+              </a:rPr>
+              <a:t>tính</a:t>
+            </a:r>
+            <a:r>
+              <a:rPr sz="1100" b="1" i="0" dirty="0">
+                <a:solidFill>
+                  <a:srgbClr val="EDF1F8"/>
+                </a:solidFill>
+                <a:latin typeface="Segoe UI"/>
+              </a:rPr>
+              <a:t> </a:t>
+            </a:r>
+            <a:r>
+              <a:rPr sz="1100" b="1" i="0" dirty="0" err="1">
+                <a:solidFill>
+                  <a:srgbClr val="EDF1F8"/>
+                </a:solidFill>
+                <a:latin typeface="Segoe UI"/>
+              </a:rPr>
+              <a:t>năng</a:t>
+            </a:r>
+            <a:r>
+              <a:rPr sz="1100" b="1" i="0" dirty="0">
+                <a:solidFill>
+                  <a:srgbClr val="EDF1F8"/>
+                </a:solidFill>
+                <a:latin typeface="Segoe UI"/>
+              </a:rPr>
+              <a:t> </a:t>
+            </a:r>
+            <a:r>
+              <a:rPr sz="1100" b="1" i="0" dirty="0" err="1">
+                <a:solidFill>
+                  <a:srgbClr val="EDF1F8"/>
+                </a:solidFill>
+                <a:latin typeface="Segoe UI"/>
+              </a:rPr>
+              <a:t>là</a:t>
+            </a:r>
+            <a:r>
+              <a:rPr sz="1100" b="1" i="0" dirty="0">
+                <a:solidFill>
+                  <a:srgbClr val="EDF1F8"/>
+                </a:solidFill>
+                <a:latin typeface="Segoe UI"/>
+              </a:rPr>
+              <a:t> </a:t>
+            </a:r>
+            <a:r>
+              <a:rPr sz="1100" b="1" i="0" dirty="0" err="1">
+                <a:solidFill>
+                  <a:srgbClr val="EDF1F8"/>
+                </a:solidFill>
+                <a:latin typeface="Segoe UI"/>
+              </a:rPr>
+              <a:t>thêm</a:t>
+            </a:r>
+            <a:r>
+              <a:rPr sz="1100" b="1" i="0" dirty="0">
+                <a:solidFill>
+                  <a:srgbClr val="EDF1F8"/>
+                </a:solidFill>
+                <a:latin typeface="Segoe UI"/>
+              </a:rPr>
+              <a:t> </a:t>
+            </a:r>
+            <a:r>
+              <a:rPr sz="1100" b="1" i="0" dirty="0" err="1">
+                <a:solidFill>
+                  <a:srgbClr val="EDF1F8"/>
+                </a:solidFill>
+                <a:latin typeface="Segoe UI"/>
+              </a:rPr>
+              <a:t>lớp</a:t>
+            </a:r>
+            <a:r>
+              <a:rPr sz="1100" b="1" i="0" dirty="0">
+                <a:solidFill>
+                  <a:srgbClr val="EDF1F8"/>
+                </a:solidFill>
+                <a:latin typeface="Segoe UI"/>
+              </a:rPr>
+              <a:t>, </a:t>
+            </a:r>
+            <a:r>
+              <a:rPr sz="1100" b="1" i="0" dirty="0" err="1">
+                <a:solidFill>
+                  <a:srgbClr val="EDF1F8"/>
+                </a:solidFill>
+                <a:latin typeface="Segoe UI"/>
+              </a:rPr>
+              <a:t>không</a:t>
+            </a:r>
+            <a:r>
+              <a:rPr sz="1100" b="1" i="0" dirty="0">
+                <a:solidFill>
+                  <a:srgbClr val="EDF1F8"/>
+                </a:solidFill>
+                <a:latin typeface="Segoe UI"/>
+              </a:rPr>
+              <a:t> </a:t>
+            </a:r>
+            <a:r>
+              <a:rPr sz="1100" b="1" i="0" dirty="0" err="1">
+                <a:solidFill>
+                  <a:srgbClr val="EDF1F8"/>
+                </a:solidFill>
+                <a:latin typeface="Segoe UI"/>
+              </a:rPr>
+              <a:t>phải</a:t>
+            </a:r>
+            <a:r>
+              <a:rPr sz="1100" b="1" i="0" dirty="0">
+                <a:solidFill>
+                  <a:srgbClr val="EDF1F8"/>
+                </a:solidFill>
+                <a:latin typeface="Segoe UI"/>
+              </a:rPr>
+              <a:t> </a:t>
+            </a:r>
+            <a:r>
+              <a:rPr sz="1100" b="1" i="0" dirty="0" err="1">
+                <a:solidFill>
+                  <a:srgbClr val="EDF1F8"/>
+                </a:solidFill>
+                <a:latin typeface="Segoe UI"/>
+              </a:rPr>
+              <a:t>viết</a:t>
+            </a:r>
+            <a:r>
+              <a:rPr sz="1100" b="1" i="0" dirty="0">
+                <a:solidFill>
+                  <a:srgbClr val="EDF1F8"/>
+                </a:solidFill>
+                <a:latin typeface="Segoe UI"/>
+              </a:rPr>
+              <a:t> </a:t>
+            </a:r>
+            <a:r>
+              <a:rPr sz="1100" b="1" i="0" dirty="0" err="1">
+                <a:solidFill>
+                  <a:srgbClr val="EDF1F8"/>
+                </a:solidFill>
+                <a:latin typeface="Segoe UI"/>
+              </a:rPr>
+              <a:t>lại</a:t>
+            </a:r>
+            <a:r>
+              <a:rPr sz="1100" b="1" i="0" dirty="0">
+                <a:solidFill>
+                  <a:srgbClr val="EDF1F8"/>
+                </a:solidFill>
+                <a:latin typeface="Segoe UI"/>
+              </a:rPr>
+              <a:t>. </a:t>
+            </a:r>
+            <a:endParaRPr sz="1100" b="0" i="1" dirty="0">
+              <a:solidFill>
+                <a:srgbClr val="93A1B8"/>
+              </a:solidFill>
+              <a:latin typeface="Segoe UI"/>
+            </a:endParaRPr>
           </a:p>
         </p:txBody>
       </p:sp>
@@ -22323,7 +23929,7 @@
           <a:noFill/>
         </p:spPr>
         <p:txBody>
-          <a:bodyPr wrap="square" anchor="t" lIns="0" rIns="0" tIns="0" bIns="0">
+          <a:bodyPr wrap="square" lIns="0" tIns="0" rIns="0" bIns="0" anchor="t">
             <a:spAutoFit/>
           </a:bodyPr>
           <a:lstStyle/>
@@ -22346,16 +23952,7 @@
                 </a:solidFill>
                 <a:latin typeface="Segoe UI"/>
               </a:rPr>
-              <a:t>Affiliate GLOBAL · Phase 1   </a:t>
-            </a:r>
-            <a:r>
-              <a:rPr sz="850" b="0" i="0">
-                <a:solidFill>
-                  <a:srgbClr val="93A1B8"/>
-                </a:solidFill>
-                <a:latin typeface="Segoe UI"/>
-              </a:rPr>
-              <a:t>Bản đồ 22 Must: Plan/KE_HOACH_V2.md · Report/REQUIREMENT_TRACEABILITY_MATRIX.md</a:t>
+              <a:t>Affiliate GLOBAL · Phase 1   Bản đồ 22 Must: Plan/KE_HOACH_V2.md · Backend Go: Plan/GO_BACKEND_REWRITE_PLAN.md</a:t>
             </a:r>
           </a:p>
         </p:txBody>
@@ -22377,7 +23974,7 @@
           <a:noFill/>
         </p:spPr>
         <p:txBody>
-          <a:bodyPr wrap="square" anchor="t" lIns="0" rIns="0" tIns="0" bIns="0">
+          <a:bodyPr wrap="square" lIns="0" tIns="0" rIns="0" bIns="0" anchor="t">
             <a:spAutoFit/>
           </a:bodyPr>
           <a:lstStyle/>
